--- a/docs/presentation/IPI_Head_Separation_PoC_2nd [26-08-19].pptx
+++ b/docs/presentation/IPI_Head_Separation_PoC_2nd [26-08-19].pptx
@@ -5,25 +5,24 @@
     <p:sldMasterId id="2147483648" r:id="rId1"/>
   </p:sldMasterIdLst>
   <p:notesMasterIdLst>
-    <p:notesMasterId r:id="rId18"/>
+    <p:notesMasterId r:id="rId17"/>
   </p:notesMasterIdLst>
   <p:sldIdLst>
-    <p:sldId id="272" r:id="rId2"/>
-    <p:sldId id="307" r:id="rId3"/>
-    <p:sldId id="309" r:id="rId4"/>
-    <p:sldId id="319" r:id="rId5"/>
-    <p:sldId id="256" r:id="rId6"/>
-    <p:sldId id="257" r:id="rId7"/>
-    <p:sldId id="258" r:id="rId8"/>
-    <p:sldId id="259" r:id="rId9"/>
-    <p:sldId id="260" r:id="rId10"/>
-    <p:sldId id="261" r:id="rId11"/>
-    <p:sldId id="262" r:id="rId12"/>
-    <p:sldId id="263" r:id="rId13"/>
-    <p:sldId id="264" r:id="rId14"/>
-    <p:sldId id="265" r:id="rId15"/>
-    <p:sldId id="266" r:id="rId16"/>
-    <p:sldId id="267" r:id="rId17"/>
+    <p:sldId id="307" r:id="rId2"/>
+    <p:sldId id="309" r:id="rId3"/>
+    <p:sldId id="319" r:id="rId4"/>
+    <p:sldId id="272" r:id="rId5"/>
+    <p:sldId id="320" r:id="rId6"/>
+    <p:sldId id="258" r:id="rId7"/>
+    <p:sldId id="259" r:id="rId8"/>
+    <p:sldId id="260" r:id="rId9"/>
+    <p:sldId id="261" r:id="rId10"/>
+    <p:sldId id="262" r:id="rId11"/>
+    <p:sldId id="263" r:id="rId12"/>
+    <p:sldId id="264" r:id="rId13"/>
+    <p:sldId id="265" r:id="rId14"/>
+    <p:sldId id="266" r:id="rId15"/>
+    <p:sldId id="267" r:id="rId16"/>
   </p:sldIdLst>
   <p:sldSz cx="12192000" cy="6858000"/>
   <p:notesSz cx="6858000" cy="9144000"/>
@@ -495,197 +494,6 @@
   <p:cSld>
     <p:spTree>
       <p:nvGrpSpPr>
-        <p:cNvPr id="1" name=""/>
-        <p:cNvGrpSpPr/>
-        <p:nvPr/>
-      </p:nvGrpSpPr>
-      <p:grpSpPr>
-        <a:xfrm>
-          <a:off x="0" y="0"/>
-          <a:ext cx="0" cy="0"/>
-          <a:chOff x="0" y="0"/>
-          <a:chExt cx="0" cy="0"/>
-        </a:xfrm>
-      </p:grpSpPr>
-      <p:sp>
-        <p:nvSpPr>
-          <p:cNvPr id="2" name="슬라이드 이미지 개체 틀 1"/>
-          <p:cNvSpPr>
-            <a:spLocks noGrp="1" noRot="1" noChangeAspect="1"/>
-          </p:cNvSpPr>
-          <p:nvPr>
-            <p:ph type="sldImg"/>
-          </p:nvPr>
-        </p:nvSpPr>
-        <p:spPr>
-          <a:xfrm>
-            <a:off x="-228600" y="1524000"/>
-            <a:ext cx="7315200" cy="4114800"/>
-          </a:xfrm>
-          <a:prstGeom prst="rect">
-            <a:avLst/>
-          </a:prstGeom>
-          <a:noFill/>
-          <a:ln w="12700">
-            <a:solidFill>
-              <a:prstClr val="black"/>
-            </a:solidFill>
-          </a:ln>
-        </p:spPr>
-      </p:sp>
-      <p:sp>
-        <p:nvSpPr>
-          <p:cNvPr id="3" name="슬라이드 노트 개체 틀 2"/>
-          <p:cNvSpPr>
-            <a:spLocks noGrp="1"/>
-          </p:cNvSpPr>
-          <p:nvPr>
-            <p:ph type="body" idx="1"/>
-          </p:nvPr>
-        </p:nvSpPr>
-        <p:spPr>
-          <a:xfrm>
-            <a:off x="685800" y="5867400"/>
-            <a:ext cx="5486400" cy="4800600"/>
-          </a:xfrm>
-          <a:prstGeom prst="rect">
-            <a:avLst/>
-          </a:prstGeom>
-        </p:spPr>
-        <p:txBody>
-          <a:bodyPr/>
-          <a:lstStyle/>
-          <a:p>
-            <a:pPr marL="0" marR="0" lvl="0" indent="0" algn="l" defTabSz="914400" rtl="0" eaLnBrk="1" fontAlgn="auto" latinLnBrk="1" hangingPunct="1">
-              <a:lnSpc>
-                <a:spcPct val="100000"/>
-              </a:lnSpc>
-              <a:spcBef>
-                <a:spcPts val="0"/>
-              </a:spcBef>
-              <a:spcAft>
-                <a:spcPts val="0"/>
-              </a:spcAft>
-              <a:buClrTx/>
-              <a:buSzTx/>
-              <a:buFontTx/>
-              <a:buNone/>
-              <a:tabLst/>
-              <a:defRPr/>
-            </a:pPr>
-            <a:r>
-              <a:rPr lang="ko-KR" altLang="ko-KR" dirty="0"/>
-              <a:t>안녕하십니까, 오늘 리뷰할 논문은 </a:t>
-            </a:r>
-            <a:r>
-              <a:rPr lang="ko-KR" altLang="ko-KR" dirty="0" err="1"/>
-              <a:t>NeurIPS</a:t>
-            </a:r>
-            <a:r>
-              <a:rPr lang="ko-KR" altLang="ko-KR" dirty="0"/>
-              <a:t> 2025에 게재된 "The </a:t>
-            </a:r>
-            <a:r>
-              <a:rPr lang="ko-KR" altLang="ko-KR" dirty="0" err="1"/>
-              <a:t>Atlas</a:t>
-            </a:r>
-            <a:r>
-              <a:rPr lang="ko-KR" altLang="ko-KR" dirty="0"/>
-              <a:t> of </a:t>
-            </a:r>
-            <a:r>
-              <a:rPr lang="ko-KR" altLang="ko-KR" dirty="0" err="1"/>
-              <a:t>In-Context</a:t>
-            </a:r>
-            <a:r>
-              <a:rPr lang="ko-KR" altLang="ko-KR" dirty="0"/>
-              <a:t> </a:t>
-            </a:r>
-            <a:r>
-              <a:rPr lang="ko-KR" altLang="ko-KR" dirty="0" err="1"/>
-              <a:t>Learning</a:t>
-            </a:r>
-            <a:r>
-              <a:rPr lang="ko-KR" altLang="ko-KR" dirty="0"/>
-              <a:t>: </a:t>
-            </a:r>
-            <a:r>
-              <a:rPr lang="ko-KR" altLang="ko-KR" dirty="0" err="1"/>
-              <a:t>How</a:t>
-            </a:r>
-            <a:r>
-              <a:rPr lang="ko-KR" altLang="ko-KR" dirty="0"/>
-              <a:t> </a:t>
-            </a:r>
-            <a:r>
-              <a:rPr lang="ko-KR" altLang="ko-KR" dirty="0" err="1"/>
-              <a:t>Attention</a:t>
-            </a:r>
-            <a:r>
-              <a:rPr lang="ko-KR" altLang="ko-KR" dirty="0"/>
-              <a:t> </a:t>
-            </a:r>
-            <a:r>
-              <a:rPr lang="ko-KR" altLang="ko-KR" dirty="0" err="1"/>
-              <a:t>Heads</a:t>
-            </a:r>
-            <a:r>
-              <a:rPr lang="ko-KR" altLang="ko-KR" dirty="0"/>
-              <a:t> </a:t>
-            </a:r>
-            <a:r>
-              <a:rPr lang="ko-KR" altLang="ko-KR" dirty="0" err="1"/>
-              <a:t>Shape</a:t>
-            </a:r>
-            <a:r>
-              <a:rPr lang="ko-KR" altLang="ko-KR" dirty="0"/>
-              <a:t> </a:t>
-            </a:r>
-            <a:r>
-              <a:rPr lang="ko-KR" altLang="ko-KR" dirty="0" err="1"/>
-              <a:t>In-Context</a:t>
-            </a:r>
-            <a:r>
-              <a:rPr lang="ko-KR" altLang="ko-KR" dirty="0"/>
-              <a:t> </a:t>
-            </a:r>
-            <a:r>
-              <a:rPr lang="ko-KR" altLang="ko-KR" dirty="0" err="1"/>
-              <a:t>Retrieval</a:t>
-            </a:r>
-            <a:r>
-              <a:rPr lang="ko-KR" altLang="ko-KR" dirty="0"/>
-              <a:t> </a:t>
-            </a:r>
-            <a:r>
-              <a:rPr lang="ko-KR" altLang="ko-KR" dirty="0" err="1"/>
-              <a:t>Augmentation"입니다</a:t>
-            </a:r>
-            <a:r>
-              <a:rPr lang="ko-KR" altLang="ko-KR" dirty="0"/>
-              <a:t>. 발표는 원종빈이 진행하겠습니다.</a:t>
-            </a:r>
-          </a:p>
-        </p:txBody>
-      </p:sp>
-    </p:spTree>
-    <p:extLst>
-      <p:ext uri="{BB962C8B-B14F-4D97-AF65-F5344CB8AC3E}">
-        <p14:creationId xmlns:p14="http://schemas.microsoft.com/office/powerpoint/2010/main" val="2220463953"/>
-      </p:ext>
-    </p:extLst>
-  </p:cSld>
-  <p:clrMapOvr>
-    <a:masterClrMapping/>
-  </p:clrMapOvr>
-</p:notes>
-</file>
-
-<file path=ppt/notesSlides/notesSlide2.xml><?xml version="1.0" encoding="utf-8"?>
-<p:notes xmlns:a="http://schemas.openxmlformats.org/drawingml/2006/main" xmlns:r="http://schemas.openxmlformats.org/officeDocument/2006/relationships" xmlns:p="http://schemas.openxmlformats.org/presentationml/2006/main">
-  <p:cSld>
-    <p:spTree>
-      <p:nvGrpSpPr>
         <p:cNvPr id="1" name="">
           <a:extLst>
             <a:ext uri="{FF2B5EF4-FFF2-40B4-BE49-F238E27FC236}">
@@ -1522,7 +1330,7 @@
 </p:notes>
 </file>
 
-<file path=ppt/notesSlides/notesSlide3.xml><?xml version="1.0" encoding="utf-8"?>
+<file path=ppt/notesSlides/notesSlide2.xml><?xml version="1.0" encoding="utf-8"?>
 <p:notes xmlns:a="http://schemas.openxmlformats.org/drawingml/2006/main" xmlns:r="http://schemas.openxmlformats.org/officeDocument/2006/relationships" xmlns:p="http://schemas.openxmlformats.org/presentationml/2006/main">
   <p:cSld>
     <p:spTree>
@@ -2498,7 +2306,7 @@
 </p:notes>
 </file>
 
-<file path=ppt/notesSlides/notesSlide4.xml><?xml version="1.0" encoding="utf-8"?>
+<file path=ppt/notesSlides/notesSlide3.xml><?xml version="1.0" encoding="utf-8"?>
 <p:notes xmlns:a="http://schemas.openxmlformats.org/drawingml/2006/main" xmlns:r="http://schemas.openxmlformats.org/officeDocument/2006/relationships" xmlns:p="http://schemas.openxmlformats.org/presentationml/2006/main">
   <p:cSld>
     <p:spTree>
@@ -4482,6 +4290,1038 @@
     <p:extLst>
       <p:ext uri="{BB962C8B-B14F-4D97-AF65-F5344CB8AC3E}">
         <p14:creationId xmlns:p14="http://schemas.microsoft.com/office/powerpoint/2010/main" val="1654818149"/>
+      </p:ext>
+    </p:extLst>
+  </p:cSld>
+  <p:clrMapOvr>
+    <a:masterClrMapping/>
+  </p:clrMapOvr>
+</p:notes>
+</file>
+
+<file path=ppt/notesSlides/notesSlide4.xml><?xml version="1.0" encoding="utf-8"?>
+<p:notes xmlns:a="http://schemas.openxmlformats.org/drawingml/2006/main" xmlns:r="http://schemas.openxmlformats.org/officeDocument/2006/relationships" xmlns:p="http://schemas.openxmlformats.org/presentationml/2006/main">
+  <p:cSld>
+    <p:spTree>
+      <p:nvGrpSpPr>
+        <p:cNvPr id="1" name=""/>
+        <p:cNvGrpSpPr/>
+        <p:nvPr/>
+      </p:nvGrpSpPr>
+      <p:grpSpPr>
+        <a:xfrm>
+          <a:off x="0" y="0"/>
+          <a:ext cx="0" cy="0"/>
+          <a:chOff x="0" y="0"/>
+          <a:chExt cx="0" cy="0"/>
+        </a:xfrm>
+      </p:grpSpPr>
+      <p:sp>
+        <p:nvSpPr>
+          <p:cNvPr id="2" name="슬라이드 이미지 개체 틀 1"/>
+          <p:cNvSpPr>
+            <a:spLocks noGrp="1" noRot="1" noChangeAspect="1"/>
+          </p:cNvSpPr>
+          <p:nvPr>
+            <p:ph type="sldImg"/>
+          </p:nvPr>
+        </p:nvSpPr>
+        <p:spPr>
+          <a:xfrm>
+            <a:off x="-228600" y="1524000"/>
+            <a:ext cx="7315200" cy="4114800"/>
+          </a:xfrm>
+          <a:prstGeom prst="rect">
+            <a:avLst/>
+          </a:prstGeom>
+          <a:noFill/>
+          <a:ln w="12700">
+            <a:solidFill>
+              <a:prstClr val="black"/>
+            </a:solidFill>
+          </a:ln>
+        </p:spPr>
+      </p:sp>
+      <p:sp>
+        <p:nvSpPr>
+          <p:cNvPr id="3" name="슬라이드 노트 개체 틀 2"/>
+          <p:cNvSpPr>
+            <a:spLocks noGrp="1"/>
+          </p:cNvSpPr>
+          <p:nvPr>
+            <p:ph type="body" idx="1"/>
+          </p:nvPr>
+        </p:nvSpPr>
+        <p:spPr>
+          <a:xfrm>
+            <a:off x="685800" y="5867400"/>
+            <a:ext cx="5486400" cy="4800600"/>
+          </a:xfrm>
+          <a:prstGeom prst="rect">
+            <a:avLst/>
+          </a:prstGeom>
+        </p:spPr>
+        <p:txBody>
+          <a:bodyPr/>
+          <a:lstStyle/>
+          <a:p>
+            <a:pPr marL="0" marR="0" lvl="0" indent="0" algn="l" defTabSz="914400" rtl="0" eaLnBrk="1" fontAlgn="auto" latinLnBrk="1" hangingPunct="1">
+              <a:lnSpc>
+                <a:spcPct val="100000"/>
+              </a:lnSpc>
+              <a:spcBef>
+                <a:spcPts val="0"/>
+              </a:spcBef>
+              <a:spcAft>
+                <a:spcPts val="0"/>
+              </a:spcAft>
+              <a:buClrTx/>
+              <a:buSzTx/>
+              <a:buFontTx/>
+              <a:buNone/>
+              <a:tabLst/>
+              <a:defRPr/>
+            </a:pPr>
+            <a:r>
+              <a:rPr lang="ko-KR" altLang="ko-KR" dirty="0"/>
+              <a:t>안녕하십니까, 오늘 리뷰할 논문은 </a:t>
+            </a:r>
+            <a:r>
+              <a:rPr lang="ko-KR" altLang="ko-KR" dirty="0" err="1"/>
+              <a:t>NeurIPS</a:t>
+            </a:r>
+            <a:r>
+              <a:rPr lang="ko-KR" altLang="ko-KR" dirty="0"/>
+              <a:t> 2025에 게재된 "The </a:t>
+            </a:r>
+            <a:r>
+              <a:rPr lang="ko-KR" altLang="ko-KR" dirty="0" err="1"/>
+              <a:t>Atlas</a:t>
+            </a:r>
+            <a:r>
+              <a:rPr lang="ko-KR" altLang="ko-KR" dirty="0"/>
+              <a:t> of </a:t>
+            </a:r>
+            <a:r>
+              <a:rPr lang="ko-KR" altLang="ko-KR" dirty="0" err="1"/>
+              <a:t>In-Context</a:t>
+            </a:r>
+            <a:r>
+              <a:rPr lang="ko-KR" altLang="ko-KR" dirty="0"/>
+              <a:t> </a:t>
+            </a:r>
+            <a:r>
+              <a:rPr lang="ko-KR" altLang="ko-KR" dirty="0" err="1"/>
+              <a:t>Learning</a:t>
+            </a:r>
+            <a:r>
+              <a:rPr lang="ko-KR" altLang="ko-KR" dirty="0"/>
+              <a:t>: </a:t>
+            </a:r>
+            <a:r>
+              <a:rPr lang="ko-KR" altLang="ko-KR" dirty="0" err="1"/>
+              <a:t>How</a:t>
+            </a:r>
+            <a:r>
+              <a:rPr lang="ko-KR" altLang="ko-KR" dirty="0"/>
+              <a:t> </a:t>
+            </a:r>
+            <a:r>
+              <a:rPr lang="ko-KR" altLang="ko-KR" dirty="0" err="1"/>
+              <a:t>Attention</a:t>
+            </a:r>
+            <a:r>
+              <a:rPr lang="ko-KR" altLang="ko-KR" dirty="0"/>
+              <a:t> </a:t>
+            </a:r>
+            <a:r>
+              <a:rPr lang="ko-KR" altLang="ko-KR" dirty="0" err="1"/>
+              <a:t>Heads</a:t>
+            </a:r>
+            <a:r>
+              <a:rPr lang="ko-KR" altLang="ko-KR" dirty="0"/>
+              <a:t> </a:t>
+            </a:r>
+            <a:r>
+              <a:rPr lang="ko-KR" altLang="ko-KR" dirty="0" err="1"/>
+              <a:t>Shape</a:t>
+            </a:r>
+            <a:r>
+              <a:rPr lang="ko-KR" altLang="ko-KR" dirty="0"/>
+              <a:t> </a:t>
+            </a:r>
+            <a:r>
+              <a:rPr lang="ko-KR" altLang="ko-KR" dirty="0" err="1"/>
+              <a:t>In-Context</a:t>
+            </a:r>
+            <a:r>
+              <a:rPr lang="ko-KR" altLang="ko-KR" dirty="0"/>
+              <a:t> </a:t>
+            </a:r>
+            <a:r>
+              <a:rPr lang="ko-KR" altLang="ko-KR" dirty="0" err="1"/>
+              <a:t>Retrieval</a:t>
+            </a:r>
+            <a:r>
+              <a:rPr lang="ko-KR" altLang="ko-KR" dirty="0"/>
+              <a:t> </a:t>
+            </a:r>
+            <a:r>
+              <a:rPr lang="ko-KR" altLang="ko-KR" dirty="0" err="1"/>
+              <a:t>Augmentation"입니다</a:t>
+            </a:r>
+            <a:r>
+              <a:rPr lang="ko-KR" altLang="ko-KR" dirty="0"/>
+              <a:t>. 발표는 원종빈이 진행하겠습니다.</a:t>
+            </a:r>
+          </a:p>
+        </p:txBody>
+      </p:sp>
+    </p:spTree>
+    <p:extLst>
+      <p:ext uri="{BB962C8B-B14F-4D97-AF65-F5344CB8AC3E}">
+        <p14:creationId xmlns:p14="http://schemas.microsoft.com/office/powerpoint/2010/main" val="2220463953"/>
+      </p:ext>
+    </p:extLst>
+  </p:cSld>
+  <p:clrMapOvr>
+    <a:masterClrMapping/>
+  </p:clrMapOvr>
+</p:notes>
+</file>
+
+<file path=ppt/notesSlides/notesSlide5.xml><?xml version="1.0" encoding="utf-8"?>
+<p:notes xmlns:a="http://schemas.openxmlformats.org/drawingml/2006/main" xmlns:r="http://schemas.openxmlformats.org/officeDocument/2006/relationships" xmlns:p="http://schemas.openxmlformats.org/presentationml/2006/main">
+  <p:cSld>
+    <p:spTree>
+      <p:nvGrpSpPr>
+        <p:cNvPr id="1" name="">
+          <a:extLst>
+            <a:ext uri="{FF2B5EF4-FFF2-40B4-BE49-F238E27FC236}">
+              <a16:creationId xmlns:a16="http://schemas.microsoft.com/office/drawing/2014/main" id="{10A80858-1DA2-2BC0-D968-3DA7D096996E}"/>
+            </a:ext>
+          </a:extLst>
+        </p:cNvPr>
+        <p:cNvGrpSpPr/>
+        <p:nvPr/>
+      </p:nvGrpSpPr>
+      <p:grpSpPr>
+        <a:xfrm>
+          <a:off x="0" y="0"/>
+          <a:ext cx="0" cy="0"/>
+          <a:chOff x="0" y="0"/>
+          <a:chExt cx="0" cy="0"/>
+        </a:xfrm>
+      </p:grpSpPr>
+      <p:sp>
+        <p:nvSpPr>
+          <p:cNvPr id="2" name="슬라이드 이미지 개체 틀 1">
+            <a:extLst>
+              <a:ext uri="{FF2B5EF4-FFF2-40B4-BE49-F238E27FC236}">
+                <a16:creationId xmlns:a16="http://schemas.microsoft.com/office/drawing/2014/main" id="{F9C5D7A9-1B98-8AE3-3F3F-E05B8E67336C}"/>
+              </a:ext>
+            </a:extLst>
+          </p:cNvPr>
+          <p:cNvSpPr>
+            <a:spLocks noGrp="1" noRot="1" noChangeAspect="1"/>
+          </p:cNvSpPr>
+          <p:nvPr>
+            <p:ph type="sldImg"/>
+          </p:nvPr>
+        </p:nvSpPr>
+        <p:spPr>
+          <a:xfrm>
+            <a:off x="-228600" y="1524000"/>
+            <a:ext cx="7315200" cy="4114800"/>
+          </a:xfrm>
+          <a:prstGeom prst="rect">
+            <a:avLst/>
+          </a:prstGeom>
+          <a:noFill/>
+          <a:ln w="12700">
+            <a:solidFill>
+              <a:prstClr val="black"/>
+            </a:solidFill>
+          </a:ln>
+        </p:spPr>
+      </p:sp>
+      <p:sp>
+        <p:nvSpPr>
+          <p:cNvPr id="3" name="슬라이드 노트 개체 틀 2">
+            <a:extLst>
+              <a:ext uri="{FF2B5EF4-FFF2-40B4-BE49-F238E27FC236}">
+                <a16:creationId xmlns:a16="http://schemas.microsoft.com/office/drawing/2014/main" id="{CEF283D7-9EAA-CAEA-ECCB-1E6AFEAAF383}"/>
+              </a:ext>
+            </a:extLst>
+          </p:cNvPr>
+          <p:cNvSpPr>
+            <a:spLocks noGrp="1"/>
+          </p:cNvSpPr>
+          <p:nvPr>
+            <p:ph type="body" idx="1"/>
+          </p:nvPr>
+        </p:nvSpPr>
+        <p:spPr>
+          <a:xfrm>
+            <a:off x="685800" y="5867400"/>
+            <a:ext cx="5486400" cy="4800600"/>
+          </a:xfrm>
+          <a:prstGeom prst="rect">
+            <a:avLst/>
+          </a:prstGeom>
+        </p:spPr>
+        <p:txBody>
+          <a:bodyPr/>
+          <a:lstStyle/>
+          <a:p>
+            <a:r>
+              <a:rPr lang="ko-KR" altLang="ko-KR" sz="1200" b="0" kern="1200" dirty="0">
+                <a:solidFill>
+                  <a:schemeClr val="tx1"/>
+                </a:solidFill>
+                <a:effectLst/>
+                <a:latin typeface="+mn-lt"/>
+                <a:ea typeface="+mn-ea"/>
+                <a:cs typeface="+mn-cs"/>
+              </a:rPr>
+              <a:t>LLM 에이전트가 이메일 본문이나 </a:t>
+            </a:r>
+            <a:r>
+              <a:rPr lang="ko-KR" altLang="ko-KR" sz="1200" b="0" kern="1200" dirty="0" err="1">
+                <a:solidFill>
+                  <a:schemeClr val="tx1"/>
+                </a:solidFill>
+                <a:effectLst/>
+                <a:latin typeface="+mn-lt"/>
+                <a:ea typeface="+mn-ea"/>
+                <a:cs typeface="+mn-cs"/>
+              </a:rPr>
+              <a:t>tool</a:t>
+            </a:r>
+            <a:r>
+              <a:rPr lang="ko-KR" altLang="ko-KR" sz="1200" b="0" kern="1200" dirty="0">
+                <a:solidFill>
+                  <a:schemeClr val="tx1"/>
+                </a:solidFill>
+                <a:effectLst/>
+                <a:latin typeface="+mn-lt"/>
+                <a:ea typeface="+mn-ea"/>
+                <a:cs typeface="+mn-cs"/>
+              </a:rPr>
+              <a:t> 실행 결과 같은 외부 데이터를 프롬프트에 그대로</a:t>
+            </a:r>
+            <a:r>
+              <a:rPr lang="en-US" altLang="ko-KR" sz="1200" b="0" kern="1200" dirty="0">
+                <a:solidFill>
+                  <a:schemeClr val="tx1"/>
+                </a:solidFill>
+                <a:effectLst/>
+                <a:latin typeface="+mn-lt"/>
+                <a:ea typeface="+mn-ea"/>
+                <a:cs typeface="+mn-cs"/>
+              </a:rPr>
+              <a:t> </a:t>
+            </a:r>
+            <a:r>
+              <a:rPr lang="ko-KR" altLang="ko-KR" sz="1200" b="0" kern="1200" dirty="0">
+                <a:solidFill>
+                  <a:schemeClr val="tx1"/>
+                </a:solidFill>
+                <a:effectLst/>
+                <a:latin typeface="+mn-lt"/>
+                <a:ea typeface="+mn-ea"/>
+                <a:cs typeface="+mn-cs"/>
+              </a:rPr>
+              <a:t>넣어 처리할 때, 그 데이터 안에 공격자가 심어둔 명령문이 있으면 모델이 원래 사용자의</a:t>
+            </a:r>
+            <a:r>
+              <a:rPr lang="en-US" altLang="ko-KR" sz="1200" b="0" kern="1200" dirty="0">
+                <a:solidFill>
+                  <a:schemeClr val="tx1"/>
+                </a:solidFill>
+                <a:effectLst/>
+                <a:latin typeface="+mn-lt"/>
+                <a:ea typeface="+mn-ea"/>
+                <a:cs typeface="+mn-cs"/>
+              </a:rPr>
+              <a:t> </a:t>
+            </a:r>
+            <a:r>
+              <a:rPr lang="ko-KR" altLang="ko-KR" sz="1200" b="0" kern="1200" dirty="0">
+                <a:solidFill>
+                  <a:schemeClr val="tx1"/>
+                </a:solidFill>
+                <a:effectLst/>
+                <a:latin typeface="+mn-lt"/>
+                <a:ea typeface="+mn-ea"/>
+                <a:cs typeface="+mn-cs"/>
+              </a:rPr>
+              <a:t>지시 대신 그 명령을 따라버리는 문제가 발생합니다. 이게 </a:t>
+            </a:r>
+            <a:r>
+              <a:rPr lang="ko-KR" altLang="ko-KR" sz="1200" b="0" kern="1200" dirty="0" err="1">
+                <a:solidFill>
+                  <a:schemeClr val="tx1"/>
+                </a:solidFill>
+                <a:effectLst/>
+                <a:latin typeface="+mn-lt"/>
+                <a:ea typeface="+mn-ea"/>
+                <a:cs typeface="+mn-cs"/>
+              </a:rPr>
+              <a:t>Indirect</a:t>
+            </a:r>
+            <a:r>
+              <a:rPr lang="ko-KR" altLang="ko-KR" sz="1200" b="0" kern="1200" dirty="0">
+                <a:solidFill>
+                  <a:schemeClr val="tx1"/>
+                </a:solidFill>
+                <a:effectLst/>
+                <a:latin typeface="+mn-lt"/>
+                <a:ea typeface="+mn-ea"/>
+                <a:cs typeface="+mn-cs"/>
+              </a:rPr>
+              <a:t> </a:t>
+            </a:r>
+            <a:r>
+              <a:rPr lang="ko-KR" altLang="ko-KR" sz="1200" b="0" kern="1200" dirty="0" err="1">
+                <a:solidFill>
+                  <a:schemeClr val="tx1"/>
+                </a:solidFill>
+                <a:effectLst/>
+                <a:latin typeface="+mn-lt"/>
+                <a:ea typeface="+mn-ea"/>
+                <a:cs typeface="+mn-cs"/>
+              </a:rPr>
+              <a:t>Prompt</a:t>
+            </a:r>
+            <a:r>
+              <a:rPr lang="ko-KR" altLang="ko-KR" sz="1200" b="0" kern="1200" dirty="0">
+                <a:solidFill>
+                  <a:schemeClr val="tx1"/>
+                </a:solidFill>
+                <a:effectLst/>
+                <a:latin typeface="+mn-lt"/>
+                <a:ea typeface="+mn-ea"/>
+                <a:cs typeface="+mn-cs"/>
+              </a:rPr>
+              <a:t> </a:t>
+            </a:r>
+            <a:r>
+              <a:rPr lang="ko-KR" altLang="ko-KR" sz="1200" b="0" kern="1200" dirty="0" err="1">
+                <a:solidFill>
+                  <a:schemeClr val="tx1"/>
+                </a:solidFill>
+                <a:effectLst/>
+                <a:latin typeface="+mn-lt"/>
+                <a:ea typeface="+mn-ea"/>
+                <a:cs typeface="+mn-cs"/>
+              </a:rPr>
+              <a:t>Injection입니다</a:t>
+            </a:r>
+            <a:r>
+              <a:rPr lang="ko-KR" altLang="ko-KR" sz="1200" b="0" kern="1200" dirty="0">
+                <a:solidFill>
+                  <a:schemeClr val="tx1"/>
+                </a:solidFill>
+                <a:effectLst/>
+                <a:latin typeface="+mn-lt"/>
+                <a:ea typeface="+mn-ea"/>
+                <a:cs typeface="+mn-cs"/>
+              </a:rPr>
+              <a:t>.</a:t>
+            </a:r>
+            <a:br>
+              <a:rPr lang="ko-KR" altLang="ko-KR" sz="1200" b="0" kern="1200" dirty="0">
+                <a:solidFill>
+                  <a:schemeClr val="tx1"/>
+                </a:solidFill>
+                <a:effectLst/>
+                <a:latin typeface="+mn-lt"/>
+                <a:ea typeface="+mn-ea"/>
+                <a:cs typeface="+mn-cs"/>
+              </a:rPr>
+            </a:br>
+            <a:endParaRPr lang="ko-KR" altLang="ko-KR" sz="1200" b="0" kern="1200" dirty="0">
+              <a:solidFill>
+                <a:schemeClr val="tx1"/>
+              </a:solidFill>
+              <a:effectLst/>
+              <a:latin typeface="+mn-lt"/>
+              <a:ea typeface="+mn-ea"/>
+              <a:cs typeface="+mn-cs"/>
+            </a:endParaRPr>
+          </a:p>
+          <a:p>
+            <a:r>
+              <a:rPr lang="ko-KR" altLang="ko-KR" sz="1200" b="0" kern="1200" dirty="0">
+                <a:solidFill>
+                  <a:schemeClr val="tx1"/>
+                </a:solidFill>
+                <a:effectLst/>
+                <a:latin typeface="+mn-lt"/>
+                <a:ea typeface="+mn-ea"/>
+                <a:cs typeface="+mn-cs"/>
+              </a:rPr>
+              <a:t>저희 가설은 이렇습니다 — 모델 내부에서 </a:t>
+            </a:r>
+            <a:r>
+              <a:rPr lang="ko-KR" altLang="ko-KR" sz="1200" b="0" kern="1200" dirty="0" err="1">
+                <a:solidFill>
+                  <a:schemeClr val="tx1"/>
+                </a:solidFill>
+                <a:effectLst/>
+                <a:latin typeface="+mn-lt"/>
+                <a:ea typeface="+mn-ea"/>
+                <a:cs typeface="+mn-cs"/>
+              </a:rPr>
+              <a:t>attention</a:t>
+            </a:r>
+            <a:r>
+              <a:rPr lang="ko-KR" altLang="ko-KR" sz="1200" b="0" kern="1200" dirty="0">
+                <a:solidFill>
+                  <a:schemeClr val="tx1"/>
+                </a:solidFill>
+                <a:effectLst/>
+                <a:latin typeface="+mn-lt"/>
+                <a:ea typeface="+mn-ea"/>
+                <a:cs typeface="+mn-cs"/>
+              </a:rPr>
+              <a:t> </a:t>
+            </a:r>
+            <a:r>
+              <a:rPr lang="ko-KR" altLang="ko-KR" sz="1200" b="0" kern="1200" dirty="0" err="1">
+                <a:solidFill>
+                  <a:schemeClr val="tx1"/>
+                </a:solidFill>
+                <a:effectLst/>
+                <a:latin typeface="+mn-lt"/>
+                <a:ea typeface="+mn-ea"/>
+                <a:cs typeface="+mn-cs"/>
+              </a:rPr>
+              <a:t>head</a:t>
+            </a:r>
+            <a:r>
+              <a:rPr lang="ko-KR" altLang="ko-KR" sz="1200" b="0" kern="1200" dirty="0">
+                <a:solidFill>
+                  <a:schemeClr val="tx1"/>
+                </a:solidFill>
+                <a:effectLst/>
+                <a:latin typeface="+mn-lt"/>
+                <a:ea typeface="+mn-ea"/>
+                <a:cs typeface="+mn-cs"/>
+              </a:rPr>
+              <a:t> 수준으로 봤을 때, 외부 데이터의</a:t>
+            </a:r>
+            <a:r>
+              <a:rPr lang="ko-KR" altLang="ko-KR" sz="1200" b="1" kern="1200" dirty="0">
+                <a:solidFill>
+                  <a:schemeClr val="tx1"/>
+                </a:solidFill>
+                <a:effectLst/>
+                <a:latin typeface="+mn-lt"/>
+                <a:ea typeface="+mn-ea"/>
+                <a:cs typeface="+mn-cs"/>
+              </a:rPr>
+              <a:t>**내용을 읽는 데**</a:t>
+            </a:r>
+            <a:r>
+              <a:rPr lang="ko-KR" altLang="ko-KR" sz="1200" b="0" kern="1200" dirty="0">
+                <a:solidFill>
+                  <a:schemeClr val="tx1"/>
+                </a:solidFill>
+                <a:effectLst/>
+                <a:latin typeface="+mn-lt"/>
+                <a:ea typeface="+mn-ea"/>
+                <a:cs typeface="+mn-cs"/>
+              </a:rPr>
+              <a:t> 관여하는 </a:t>
+            </a:r>
+            <a:r>
+              <a:rPr lang="ko-KR" altLang="ko-KR" sz="1200" b="0" kern="1200" dirty="0" err="1">
+                <a:solidFill>
+                  <a:schemeClr val="tx1"/>
+                </a:solidFill>
+                <a:effectLst/>
+                <a:latin typeface="+mn-lt"/>
+                <a:ea typeface="+mn-ea"/>
+                <a:cs typeface="+mn-cs"/>
+              </a:rPr>
+              <a:t>head</a:t>
+            </a:r>
+            <a:r>
+              <a:rPr lang="ko-KR" altLang="ko-KR" sz="1200" b="0" kern="1200" dirty="0">
+                <a:solidFill>
+                  <a:schemeClr val="tx1"/>
+                </a:solidFill>
+                <a:effectLst/>
+                <a:latin typeface="+mn-lt"/>
+                <a:ea typeface="+mn-ea"/>
+                <a:cs typeface="+mn-cs"/>
+              </a:rPr>
+              <a:t> 그룹(</a:t>
+            </a:r>
+            <a:r>
+              <a:rPr lang="ko-KR" altLang="ko-KR" sz="1200" b="0" kern="1200" dirty="0" err="1">
+                <a:solidFill>
+                  <a:schemeClr val="tx1"/>
+                </a:solidFill>
+                <a:effectLst/>
+                <a:latin typeface="+mn-lt"/>
+                <a:ea typeface="+mn-ea"/>
+                <a:cs typeface="+mn-cs"/>
+              </a:rPr>
+              <a:t>Read</a:t>
+            </a:r>
+            <a:r>
+              <a:rPr lang="ko-KR" altLang="ko-KR" sz="1200" b="0" kern="1200" dirty="0">
+                <a:solidFill>
+                  <a:schemeClr val="tx1"/>
+                </a:solidFill>
+                <a:effectLst/>
+                <a:latin typeface="+mn-lt"/>
+                <a:ea typeface="+mn-ea"/>
+                <a:cs typeface="+mn-cs"/>
+              </a:rPr>
+              <a:t> </a:t>
+            </a:r>
+            <a:r>
+              <a:rPr lang="ko-KR" altLang="ko-KR" sz="1200" b="0" kern="1200" dirty="0" err="1">
+                <a:solidFill>
+                  <a:schemeClr val="tx1"/>
+                </a:solidFill>
+                <a:effectLst/>
+                <a:latin typeface="+mn-lt"/>
+                <a:ea typeface="+mn-ea"/>
+                <a:cs typeface="+mn-cs"/>
+              </a:rPr>
+              <a:t>Head</a:t>
+            </a:r>
+            <a:r>
+              <a:rPr lang="ko-KR" altLang="ko-KR" sz="1200" b="0" kern="1200" dirty="0">
+                <a:solidFill>
+                  <a:schemeClr val="tx1"/>
+                </a:solidFill>
+                <a:effectLst/>
+                <a:latin typeface="+mn-lt"/>
+                <a:ea typeface="+mn-ea"/>
+                <a:cs typeface="+mn-cs"/>
+              </a:rPr>
+              <a:t>)과, 그 데이터 속 **명령을 실행에</a:t>
+            </a:r>
+            <a:r>
+              <a:rPr lang="en-US" altLang="ko-KR" sz="1200" b="0" kern="1200" dirty="0">
+                <a:solidFill>
+                  <a:schemeClr val="tx1"/>
+                </a:solidFill>
+                <a:effectLst/>
+                <a:latin typeface="+mn-lt"/>
+                <a:ea typeface="+mn-ea"/>
+                <a:cs typeface="+mn-cs"/>
+              </a:rPr>
+              <a:t> </a:t>
+            </a:r>
+            <a:r>
+              <a:rPr lang="ko-KR" altLang="ko-KR" sz="1200" b="0" kern="1200" dirty="0">
+                <a:solidFill>
+                  <a:schemeClr val="tx1"/>
+                </a:solidFill>
+                <a:effectLst/>
+                <a:latin typeface="+mn-lt"/>
+                <a:ea typeface="+mn-ea"/>
+                <a:cs typeface="+mn-cs"/>
+              </a:rPr>
+              <a:t>옮기는 데** 관여하는 </a:t>
+            </a:r>
+            <a:r>
+              <a:rPr lang="ko-KR" altLang="ko-KR" sz="1200" b="0" kern="1200" dirty="0" err="1">
+                <a:solidFill>
+                  <a:schemeClr val="tx1"/>
+                </a:solidFill>
+                <a:effectLst/>
+                <a:latin typeface="+mn-lt"/>
+                <a:ea typeface="+mn-ea"/>
+                <a:cs typeface="+mn-cs"/>
+              </a:rPr>
+              <a:t>head</a:t>
+            </a:r>
+            <a:r>
+              <a:rPr lang="ko-KR" altLang="ko-KR" sz="1200" b="0" kern="1200" dirty="0">
+                <a:solidFill>
+                  <a:schemeClr val="tx1"/>
+                </a:solidFill>
+                <a:effectLst/>
+                <a:latin typeface="+mn-lt"/>
+                <a:ea typeface="+mn-ea"/>
+                <a:cs typeface="+mn-cs"/>
+              </a:rPr>
+              <a:t> 그룹(</a:t>
+            </a:r>
+            <a:r>
+              <a:rPr lang="ko-KR" altLang="ko-KR" sz="1200" b="0" kern="1200" dirty="0" err="1">
+                <a:solidFill>
+                  <a:schemeClr val="tx1"/>
+                </a:solidFill>
+                <a:effectLst/>
+                <a:latin typeface="+mn-lt"/>
+                <a:ea typeface="+mn-ea"/>
+                <a:cs typeface="+mn-cs"/>
+              </a:rPr>
+              <a:t>Control</a:t>
+            </a:r>
+            <a:r>
+              <a:rPr lang="ko-KR" altLang="ko-KR" sz="1200" b="0" kern="1200" dirty="0">
+                <a:solidFill>
+                  <a:schemeClr val="tx1"/>
+                </a:solidFill>
+                <a:effectLst/>
+                <a:latin typeface="+mn-lt"/>
+                <a:ea typeface="+mn-ea"/>
+                <a:cs typeface="+mn-cs"/>
+              </a:rPr>
+              <a:t> </a:t>
+            </a:r>
+            <a:r>
+              <a:rPr lang="ko-KR" altLang="ko-KR" sz="1200" b="0" kern="1200" dirty="0" err="1">
+                <a:solidFill>
+                  <a:schemeClr val="tx1"/>
+                </a:solidFill>
+                <a:effectLst/>
+                <a:latin typeface="+mn-lt"/>
+                <a:ea typeface="+mn-ea"/>
+                <a:cs typeface="+mn-cs"/>
+              </a:rPr>
+              <a:t>Head</a:t>
+            </a:r>
+            <a:r>
+              <a:rPr lang="ko-KR" altLang="ko-KR" sz="1200" b="0" kern="1200" dirty="0">
+                <a:solidFill>
+                  <a:schemeClr val="tx1"/>
+                </a:solidFill>
+                <a:effectLst/>
+                <a:latin typeface="+mn-lt"/>
+                <a:ea typeface="+mn-ea"/>
+                <a:cs typeface="+mn-cs"/>
+              </a:rPr>
+              <a:t>)이 서로 분리되어 있을 것이라는 겁니다.</a:t>
+            </a:r>
+          </a:p>
+          <a:p>
+            <a:endParaRPr lang="ko-KR" altLang="ko-KR" sz="1200" b="0" kern="1200" dirty="0">
+              <a:solidFill>
+                <a:schemeClr val="tx1"/>
+              </a:solidFill>
+              <a:effectLst/>
+              <a:latin typeface="+mn-lt"/>
+              <a:ea typeface="+mn-ea"/>
+              <a:cs typeface="+mn-cs"/>
+            </a:endParaRPr>
+          </a:p>
+          <a:p>
+            <a:r>
+              <a:rPr lang="ko-KR" altLang="ko-KR" sz="1200" b="0" kern="1200" dirty="0">
+                <a:solidFill>
+                  <a:schemeClr val="tx1"/>
+                </a:solidFill>
+                <a:effectLst/>
+                <a:latin typeface="+mn-lt"/>
+                <a:ea typeface="+mn-ea"/>
+                <a:cs typeface="+mn-cs"/>
+              </a:rPr>
+              <a:t>분리되어 있다면, </a:t>
+            </a:r>
+            <a:r>
+              <a:rPr lang="ko-KR" altLang="ko-KR" sz="1200" b="0" kern="1200" dirty="0" err="1">
+                <a:solidFill>
+                  <a:schemeClr val="tx1"/>
+                </a:solidFill>
+                <a:effectLst/>
+                <a:latin typeface="+mn-lt"/>
+                <a:ea typeface="+mn-ea"/>
+                <a:cs typeface="+mn-cs"/>
+              </a:rPr>
+              <a:t>Control</a:t>
+            </a:r>
+            <a:r>
+              <a:rPr lang="ko-KR" altLang="ko-KR" sz="1200" b="0" kern="1200" dirty="0">
+                <a:solidFill>
+                  <a:schemeClr val="tx1"/>
+                </a:solidFill>
+                <a:effectLst/>
+                <a:latin typeface="+mn-lt"/>
+                <a:ea typeface="+mn-ea"/>
+                <a:cs typeface="+mn-cs"/>
+              </a:rPr>
+              <a:t> </a:t>
+            </a:r>
+            <a:r>
+              <a:rPr lang="ko-KR" altLang="ko-KR" sz="1200" b="0" kern="1200" dirty="0" err="1">
+                <a:solidFill>
+                  <a:schemeClr val="tx1"/>
+                </a:solidFill>
+                <a:effectLst/>
+                <a:latin typeface="+mn-lt"/>
+                <a:ea typeface="+mn-ea"/>
+                <a:cs typeface="+mn-cs"/>
+              </a:rPr>
+              <a:t>Head만</a:t>
+            </a:r>
+            <a:r>
+              <a:rPr lang="ko-KR" altLang="ko-KR" sz="1200" b="0" kern="1200" dirty="0">
+                <a:solidFill>
+                  <a:schemeClr val="tx1"/>
+                </a:solidFill>
+                <a:effectLst/>
+                <a:latin typeface="+mn-lt"/>
+                <a:ea typeface="+mn-ea"/>
+                <a:cs typeface="+mn-cs"/>
+              </a:rPr>
+              <a:t> 정밀하게 무력화해도 </a:t>
+            </a:r>
+            <a:r>
+              <a:rPr lang="ko-KR" altLang="ko-KR" sz="1200" b="0" kern="1200" dirty="0" err="1">
+                <a:solidFill>
+                  <a:schemeClr val="tx1"/>
+                </a:solidFill>
+                <a:effectLst/>
+                <a:latin typeface="+mn-lt"/>
+                <a:ea typeface="+mn-ea"/>
+                <a:cs typeface="+mn-cs"/>
+              </a:rPr>
+              <a:t>Read</a:t>
+            </a:r>
+            <a:r>
+              <a:rPr lang="ko-KR" altLang="ko-KR" sz="1200" b="0" kern="1200" dirty="0">
+                <a:solidFill>
+                  <a:schemeClr val="tx1"/>
+                </a:solidFill>
+                <a:effectLst/>
+                <a:latin typeface="+mn-lt"/>
+                <a:ea typeface="+mn-ea"/>
+                <a:cs typeface="+mn-cs"/>
+              </a:rPr>
+              <a:t> </a:t>
+            </a:r>
+            <a:r>
+              <a:rPr lang="ko-KR" altLang="ko-KR" sz="1200" b="0" kern="1200" dirty="0" err="1">
+                <a:solidFill>
+                  <a:schemeClr val="tx1"/>
+                </a:solidFill>
+                <a:effectLst/>
+                <a:latin typeface="+mn-lt"/>
+                <a:ea typeface="+mn-ea"/>
+                <a:cs typeface="+mn-cs"/>
+              </a:rPr>
+              <a:t>Head의</a:t>
+            </a:r>
+            <a:r>
+              <a:rPr lang="ko-KR" altLang="ko-KR" sz="1200" b="0" kern="1200" dirty="0">
+                <a:solidFill>
+                  <a:schemeClr val="tx1"/>
+                </a:solidFill>
+                <a:effectLst/>
+                <a:latin typeface="+mn-lt"/>
+                <a:ea typeface="+mn-ea"/>
+                <a:cs typeface="+mn-cs"/>
+              </a:rPr>
+              <a:t> 정상 기능은 보존한</a:t>
+            </a:r>
+            <a:r>
+              <a:rPr lang="en-US" altLang="ko-KR" sz="1200" b="0" kern="1200" dirty="0">
+                <a:solidFill>
+                  <a:schemeClr val="tx1"/>
+                </a:solidFill>
+                <a:effectLst/>
+                <a:latin typeface="+mn-lt"/>
+                <a:ea typeface="+mn-ea"/>
+                <a:cs typeface="+mn-cs"/>
+              </a:rPr>
+              <a:t> </a:t>
+            </a:r>
+            <a:r>
+              <a:rPr lang="ko-KR" altLang="ko-KR" sz="1200" b="0" kern="1200" dirty="0">
+                <a:solidFill>
+                  <a:schemeClr val="tx1"/>
+                </a:solidFill>
+                <a:effectLst/>
+                <a:latin typeface="+mn-lt"/>
+                <a:ea typeface="+mn-ea"/>
+                <a:cs typeface="+mn-cs"/>
+              </a:rPr>
+              <a:t>채로 공격만 막을 수 있습니다. 이걸 검증하는 방법은 두 단계입니다: 첫째, </a:t>
+            </a:r>
+            <a:r>
+              <a:rPr lang="ko-KR" altLang="ko-KR" sz="1200" b="0" kern="1200" dirty="0" err="1">
+                <a:solidFill>
+                  <a:schemeClr val="tx1"/>
+                </a:solidFill>
+                <a:effectLst/>
+                <a:latin typeface="+mn-lt"/>
+                <a:ea typeface="+mn-ea"/>
+                <a:cs typeface="+mn-cs"/>
+              </a:rPr>
+              <a:t>relevance로</a:t>
+            </a:r>
+            <a:r>
+              <a:rPr lang="en-US" altLang="ko-KR" sz="1200" b="0" kern="1200" dirty="0">
+                <a:solidFill>
+                  <a:schemeClr val="tx1"/>
+                </a:solidFill>
+                <a:effectLst/>
+                <a:latin typeface="+mn-lt"/>
+                <a:ea typeface="+mn-ea"/>
+                <a:cs typeface="+mn-cs"/>
+              </a:rPr>
+              <a:t> </a:t>
+            </a:r>
+            <a:r>
+              <a:rPr lang="ko-KR" altLang="ko-KR" sz="1200" b="0" kern="1200" dirty="0" err="1">
+                <a:solidFill>
+                  <a:schemeClr val="tx1"/>
+                </a:solidFill>
+                <a:effectLst/>
+                <a:latin typeface="+mn-lt"/>
+                <a:ea typeface="+mn-ea"/>
+                <a:cs typeface="+mn-cs"/>
+              </a:rPr>
+              <a:t>head를</a:t>
+            </a:r>
+            <a:r>
+              <a:rPr lang="ko-KR" altLang="ko-KR" sz="1200" b="0" kern="1200" dirty="0">
+                <a:solidFill>
+                  <a:schemeClr val="tx1"/>
+                </a:solidFill>
+                <a:effectLst/>
+                <a:latin typeface="+mn-lt"/>
+                <a:ea typeface="+mn-ea"/>
+                <a:cs typeface="+mn-cs"/>
+              </a:rPr>
+              <a:t> 찾고, 둘째, 그 </a:t>
+            </a:r>
+            <a:r>
+              <a:rPr lang="ko-KR" altLang="ko-KR" sz="1200" b="0" kern="1200" dirty="0" err="1">
+                <a:solidFill>
+                  <a:schemeClr val="tx1"/>
+                </a:solidFill>
+                <a:effectLst/>
+                <a:latin typeface="+mn-lt"/>
+                <a:ea typeface="+mn-ea"/>
+                <a:cs typeface="+mn-cs"/>
+              </a:rPr>
+              <a:t>head의</a:t>
+            </a:r>
+            <a:r>
+              <a:rPr lang="ko-KR" altLang="ko-KR" sz="1200" b="0" kern="1200" dirty="0">
+                <a:solidFill>
+                  <a:schemeClr val="tx1"/>
+                </a:solidFill>
+                <a:effectLst/>
+                <a:latin typeface="+mn-lt"/>
+                <a:ea typeface="+mn-ea"/>
+                <a:cs typeface="+mn-cs"/>
+              </a:rPr>
+              <a:t> </a:t>
+            </a:r>
+            <a:r>
+              <a:rPr lang="ko-KR" altLang="ko-KR" sz="1200" b="0" kern="1200" dirty="0" err="1">
+                <a:solidFill>
+                  <a:schemeClr val="tx1"/>
+                </a:solidFill>
+                <a:effectLst/>
+                <a:latin typeface="+mn-lt"/>
+                <a:ea typeface="+mn-ea"/>
+                <a:cs typeface="+mn-cs"/>
+              </a:rPr>
+              <a:t>D_inj</a:t>
+            </a:r>
+            <a:r>
+              <a:rPr lang="ko-KR" altLang="ko-KR" sz="1200" b="0" kern="1200" dirty="0">
+                <a:solidFill>
+                  <a:schemeClr val="tx1"/>
+                </a:solidFill>
+                <a:effectLst/>
+                <a:latin typeface="+mn-lt"/>
+                <a:ea typeface="+mn-ea"/>
+                <a:cs typeface="+mn-cs"/>
+              </a:rPr>
+              <a:t> 방향 </a:t>
+            </a:r>
+            <a:r>
+              <a:rPr lang="ko-KR" altLang="ko-KR" sz="1200" b="0" kern="1200" dirty="0" err="1">
+                <a:solidFill>
+                  <a:schemeClr val="tx1"/>
+                </a:solidFill>
+                <a:effectLst/>
+                <a:latin typeface="+mn-lt"/>
+                <a:ea typeface="+mn-ea"/>
+                <a:cs typeface="+mn-cs"/>
+              </a:rPr>
+              <a:t>attention</a:t>
+            </a:r>
+            <a:r>
+              <a:rPr lang="ko-KR" altLang="ko-KR" sz="1200" b="0" kern="1200" dirty="0">
+                <a:solidFill>
+                  <a:schemeClr val="tx1"/>
+                </a:solidFill>
+                <a:effectLst/>
+                <a:latin typeface="+mn-lt"/>
+                <a:ea typeface="+mn-ea"/>
+                <a:cs typeface="+mn-cs"/>
+              </a:rPr>
+              <a:t> </a:t>
+            </a:r>
+            <a:r>
+              <a:rPr lang="ko-KR" altLang="ko-KR" sz="1200" b="0" kern="1200" dirty="0" err="1">
+                <a:solidFill>
+                  <a:schemeClr val="tx1"/>
+                </a:solidFill>
+                <a:effectLst/>
+                <a:latin typeface="+mn-lt"/>
+                <a:ea typeface="+mn-ea"/>
+                <a:cs typeface="+mn-cs"/>
+              </a:rPr>
+              <a:t>edge만</a:t>
+            </a:r>
+            <a:r>
+              <a:rPr lang="ko-KR" altLang="ko-KR" sz="1200" b="0" kern="1200" dirty="0">
+                <a:solidFill>
+                  <a:schemeClr val="tx1"/>
+                </a:solidFill>
+                <a:effectLst/>
+                <a:latin typeface="+mn-lt"/>
+                <a:ea typeface="+mn-ea"/>
+                <a:cs typeface="+mn-cs"/>
+              </a:rPr>
+              <a:t> 끊습니다.</a:t>
+            </a:r>
+          </a:p>
+          <a:p>
+            <a:br>
+              <a:rPr lang="ko-KR" altLang="ko-KR" sz="1200" b="0" kern="1200" dirty="0">
+                <a:solidFill>
+                  <a:schemeClr val="tx1"/>
+                </a:solidFill>
+                <a:effectLst/>
+                <a:latin typeface="+mn-lt"/>
+                <a:ea typeface="+mn-ea"/>
+                <a:cs typeface="+mn-cs"/>
+              </a:rPr>
+            </a:br>
+            <a:endParaRPr lang="ko-KR" altLang="ko-KR" sz="1200" b="0" kern="1200" dirty="0">
+              <a:solidFill>
+                <a:schemeClr val="tx1"/>
+              </a:solidFill>
+              <a:effectLst/>
+              <a:latin typeface="+mn-lt"/>
+              <a:ea typeface="+mn-ea"/>
+              <a:cs typeface="+mn-cs"/>
+            </a:endParaRPr>
+          </a:p>
+        </p:txBody>
+      </p:sp>
+    </p:spTree>
+    <p:extLst>
+      <p:ext uri="{BB962C8B-B14F-4D97-AF65-F5344CB8AC3E}">
+        <p14:creationId xmlns:p14="http://schemas.microsoft.com/office/powerpoint/2010/main" val="1116456474"/>
       </p:ext>
     </p:extLst>
   </p:cSld>
@@ -8374,7 +9214,13 @@
   <p:cSld>
     <p:spTree>
       <p:nvGrpSpPr>
-        <p:cNvPr id="1" name=""/>
+        <p:cNvPr id="1" name="">
+          <a:extLst>
+            <a:ext uri="{FF2B5EF4-FFF2-40B4-BE49-F238E27FC236}">
+              <a16:creationId xmlns:a16="http://schemas.microsoft.com/office/drawing/2014/main" id="{06F24B3A-C572-38DA-98A6-40F6E2F0369B}"/>
+            </a:ext>
+          </a:extLst>
+        </p:cNvPr>
         <p:cNvGrpSpPr/>
         <p:nvPr/>
       </p:nvGrpSpPr>
@@ -8388,203 +9234,28 @@
       </p:grpSpPr>
       <p:sp>
         <p:nvSpPr>
-          <p:cNvPr id="3" name="제목 2">
+          <p:cNvPr id="31" name="Rounded Rectangle 8">
             <a:extLst>
               <a:ext uri="{FF2B5EF4-FFF2-40B4-BE49-F238E27FC236}">
-                <a16:creationId xmlns:a16="http://schemas.microsoft.com/office/drawing/2014/main" id="{2177C468-DE04-5456-4313-8DD2291994FD}"/>
+                <a16:creationId xmlns:a16="http://schemas.microsoft.com/office/drawing/2014/main" id="{AD632057-1FB1-4A4F-5D50-30ECB860843D}"/>
               </a:ext>
             </a:extLst>
           </p:cNvPr>
-          <p:cNvSpPr>
-            <a:spLocks noGrp="1"/>
-          </p:cNvSpPr>
-          <p:nvPr>
-            <p:ph type="title" idx="102"/>
-          </p:nvPr>
-        </p:nvSpPr>
-        <p:spPr>
-          <a:xfrm>
-            <a:off x="195943" y="2480854"/>
-            <a:ext cx="11551920" cy="1097280"/>
-          </a:xfrm>
-        </p:spPr>
-        <p:txBody>
-          <a:bodyPr/>
-          <a:lstStyle/>
-          <a:p>
-            <a:r>
-              <a:rPr lang="en-US" altLang="ko-KR" sz="4800" dirty="0">
-                <a:latin typeface="프리젠테이션 5 Medium" pitchFamily="2" charset="-127"/>
-                <a:ea typeface="프리젠테이션 5 Medium" pitchFamily="2" charset="-127"/>
-              </a:rPr>
-              <a:t>Read Head,</a:t>
-            </a:r>
-            <a:r>
-              <a:rPr lang="ko-KR" altLang="en-US" sz="4800" dirty="0">
-                <a:latin typeface="프리젠테이션 5 Medium" pitchFamily="2" charset="-127"/>
-                <a:ea typeface="프리젠테이션 5 Medium" pitchFamily="2" charset="-127"/>
-              </a:rPr>
-              <a:t> </a:t>
-            </a:r>
-            <a:r>
-              <a:rPr lang="en-US" altLang="ko-KR" sz="4800" dirty="0">
-                <a:latin typeface="프리젠테이션 5 Medium" pitchFamily="2" charset="-127"/>
-                <a:ea typeface="프리젠테이션 5 Medium" pitchFamily="2" charset="-127"/>
-              </a:rPr>
-              <a:t>Control Head</a:t>
-            </a:r>
-            <a:r>
-              <a:rPr lang="ko-KR" altLang="en-US" sz="4800" dirty="0">
-                <a:latin typeface="프리젠테이션 5 Medium" pitchFamily="2" charset="-127"/>
-                <a:ea typeface="프리젠테이션 5 Medium" pitchFamily="2" charset="-127"/>
-              </a:rPr>
-              <a:t> 분리 </a:t>
-            </a:r>
-            <a:r>
-              <a:rPr lang="en-US" altLang="ko-KR" sz="4800" dirty="0">
-                <a:latin typeface="프리젠테이션 5 Medium" pitchFamily="2" charset="-127"/>
-                <a:ea typeface="프리젠테이션 5 Medium" pitchFamily="2" charset="-127"/>
-              </a:rPr>
-              <a:t>PoC</a:t>
-            </a:r>
-          </a:p>
-        </p:txBody>
-      </p:sp>
-      <p:sp>
-        <p:nvSpPr>
-          <p:cNvPr id="4" name="텍스트 개체 틀 3">
-            <a:extLst>
-              <a:ext uri="{FF2B5EF4-FFF2-40B4-BE49-F238E27FC236}">
-                <a16:creationId xmlns:a16="http://schemas.microsoft.com/office/drawing/2014/main" id="{3EAE1255-7519-D80E-B995-55F7E828629E}"/>
-              </a:ext>
-            </a:extLst>
-          </p:cNvPr>
-          <p:cNvSpPr>
-            <a:spLocks noGrp="1"/>
-          </p:cNvSpPr>
-          <p:nvPr>
-            <p:ph type="body" idx="103"/>
-          </p:nvPr>
-        </p:nvSpPr>
-        <p:spPr>
-          <a:xfrm>
-            <a:off x="1728652" y="3429000"/>
-            <a:ext cx="8486502" cy="457200"/>
-          </a:xfrm>
-        </p:spPr>
-        <p:txBody>
-          <a:bodyPr/>
-          <a:lstStyle/>
-          <a:p>
-            <a:r>
-              <a:rPr lang="en-US" altLang="ko-KR" sz="2400" dirty="0">
-                <a:solidFill>
-                  <a:srgbClr val="5FB8C4"/>
-                </a:solidFill>
-                <a:latin typeface="프리젠테이션 5 Medium" pitchFamily="2" charset="-127"/>
-                <a:ea typeface="프리젠테이션 5 Medium" pitchFamily="2" charset="-127"/>
-                <a:cs typeface="Calibri" pitchFamily="34" charset="-120"/>
-              </a:rPr>
-              <a:t>Atlas of In-Context Learning </a:t>
-            </a:r>
-            <a:r>
-              <a:rPr lang="ko-KR" altLang="en-US" sz="2400" dirty="0">
-                <a:solidFill>
-                  <a:srgbClr val="5FB8C4"/>
-                </a:solidFill>
-                <a:latin typeface="프리젠테이션 5 Medium" pitchFamily="2" charset="-127"/>
-                <a:ea typeface="프리젠테이션 5 Medium" pitchFamily="2" charset="-127"/>
-                <a:cs typeface="Calibri" pitchFamily="34" charset="-120"/>
-              </a:rPr>
-              <a:t>방법론 응용 </a:t>
-            </a:r>
-            <a:endParaRPr lang="en-US" altLang="ko-KR" sz="2400" dirty="0">
-              <a:solidFill>
-                <a:prstClr val="black"/>
-              </a:solidFill>
-              <a:latin typeface="프리젠테이션 5 Medium" pitchFamily="2" charset="-127"/>
-              <a:ea typeface="프리젠테이션 5 Medium" pitchFamily="2" charset="-127"/>
-            </a:endParaRPr>
-          </a:p>
-        </p:txBody>
-      </p:sp>
-      <p:sp>
-        <p:nvSpPr>
-          <p:cNvPr id="5" name="텍스트 개체 틀 4">
-            <a:extLst>
-              <a:ext uri="{FF2B5EF4-FFF2-40B4-BE49-F238E27FC236}">
-                <a16:creationId xmlns:a16="http://schemas.microsoft.com/office/drawing/2014/main" id="{2EC17B35-4365-F89F-F120-6110CE71454E}"/>
-              </a:ext>
-            </a:extLst>
-          </p:cNvPr>
-          <p:cNvSpPr>
-            <a:spLocks noGrp="1"/>
-          </p:cNvSpPr>
-          <p:nvPr>
-            <p:ph type="body" idx="104"/>
-          </p:nvPr>
-        </p:nvSpPr>
-        <p:spPr/>
-        <p:txBody>
-          <a:bodyPr/>
-          <a:lstStyle/>
-          <a:p>
-            <a:r>
-              <a:rPr lang="ko-KR" altLang="en-US" sz="1600" dirty="0">
-                <a:latin typeface="프리젠테이션 5 Medium" pitchFamily="2" charset="-127"/>
-                <a:ea typeface="프리젠테이션 5 Medium" pitchFamily="2" charset="-127"/>
-              </a:rPr>
-              <a:t>원종빈</a:t>
-            </a:r>
-          </a:p>
-        </p:txBody>
-      </p:sp>
-    </p:spTree>
-    <p:extLst>
-      <p:ext uri="{BB962C8B-B14F-4D97-AF65-F5344CB8AC3E}">
-        <p14:creationId xmlns:p14="http://schemas.microsoft.com/office/powerpoint/2010/main" val="3270782358"/>
-      </p:ext>
-    </p:extLst>
-  </p:cSld>
-  <p:clrMapOvr>
-    <a:masterClrMapping/>
-  </p:clrMapOvr>
-</p:sld>
-</file>
-
-<file path=ppt/slides/slide10.xml><?xml version="1.0" encoding="utf-8"?>
-<p:sld xmlns:a="http://schemas.openxmlformats.org/drawingml/2006/main" xmlns:r="http://schemas.openxmlformats.org/officeDocument/2006/relationships" xmlns:p="http://schemas.openxmlformats.org/presentationml/2006/main">
-  <p:cSld>
-    <p:spTree>
-      <p:nvGrpSpPr>
-        <p:cNvPr id="1" name=""/>
-        <p:cNvGrpSpPr/>
-        <p:nvPr/>
-      </p:nvGrpSpPr>
-      <p:grpSpPr>
-        <a:xfrm>
-          <a:off x="0" y="0"/>
-          <a:ext cx="0" cy="0"/>
-          <a:chOff x="0" y="0"/>
-          <a:chExt cx="0" cy="0"/>
-        </a:xfrm>
-      </p:grpSpPr>
-      <p:sp>
-        <p:nvSpPr>
-          <p:cNvPr id="2" name="Rectangle 1"/>
           <p:cNvSpPr/>
           <p:nvPr/>
         </p:nvSpPr>
         <p:spPr>
           <a:xfrm>
-            <a:off x="0" y="0"/>
-            <a:ext cx="12188952" cy="6858000"/>
+            <a:off x="1257531" y="4451927"/>
+            <a:ext cx="9676940" cy="1308793"/>
           </a:xfrm>
-          <a:prstGeom prst="rect">
-            <a:avLst/>
+          <a:prstGeom prst="roundRect">
+            <a:avLst>
+              <a:gd name="adj" fmla="val 10000"/>
+            </a:avLst>
           </a:prstGeom>
           <a:solidFill>
-            <a:srgbClr val="FFFFFF"/>
+            <a:srgbClr val="FBE0C4"/>
           </a:solidFill>
           <a:ln>
             <a:noFill/>
@@ -8616,14 +9287,212 @@
       </p:sp>
       <p:sp>
         <p:nvSpPr>
-          <p:cNvPr id="3" name="TextBox 2"/>
+          <p:cNvPr id="25" name="Shape 3">
+            <a:extLst>
+              <a:ext uri="{FF2B5EF4-FFF2-40B4-BE49-F238E27FC236}">
+                <a16:creationId xmlns:a16="http://schemas.microsoft.com/office/drawing/2014/main" id="{55C4EC47-E0E7-319D-53CD-900509DA6C2D}"/>
+              </a:ext>
+            </a:extLst>
+          </p:cNvPr>
+          <p:cNvSpPr/>
+          <p:nvPr/>
+        </p:nvSpPr>
+        <p:spPr>
+          <a:xfrm>
+            <a:off x="6232084" y="2853053"/>
+            <a:ext cx="4702386" cy="1151894"/>
+          </a:xfrm>
+          <a:prstGeom prst="roundRect">
+            <a:avLst>
+              <a:gd name="adj" fmla="val 4587"/>
+            </a:avLst>
+          </a:prstGeom>
+          <a:solidFill>
+            <a:srgbClr val="FFFFFF"/>
+          </a:solidFill>
+          <a:ln w="15240">
+            <a:solidFill>
+              <a:srgbClr val="DEDFE8"/>
+            </a:solidFill>
+            <a:prstDash val="solid"/>
+          </a:ln>
+          <a:effectLst>
+            <a:outerShdw blurRad="76200" dist="25400" dir="5400000" algn="bl" rotWithShape="0">
+              <a:srgbClr val="000000">
+                <a:alpha val="12000"/>
+              </a:srgbClr>
+            </a:outerShdw>
+          </a:effectLst>
+        </p:spPr>
+        <p:txBody>
+          <a:bodyPr/>
+          <a:lstStyle/>
+          <a:p>
+            <a:endParaRPr lang="ko-KR" altLang="en-US" sz="2000" dirty="0">
+              <a:latin typeface="프리젠테이션 5 Medium" pitchFamily="2" charset="-127"/>
+              <a:ea typeface="프리젠테이션 5 Medium" pitchFamily="2" charset="-127"/>
+            </a:endParaRPr>
+          </a:p>
+        </p:txBody>
+      </p:sp>
+      <p:sp>
+        <p:nvSpPr>
+          <p:cNvPr id="24" name="Shape 3">
+            <a:extLst>
+              <a:ext uri="{FF2B5EF4-FFF2-40B4-BE49-F238E27FC236}">
+                <a16:creationId xmlns:a16="http://schemas.microsoft.com/office/drawing/2014/main" id="{428D085C-30EC-A05C-91DF-4F179D815D53}"/>
+              </a:ext>
+            </a:extLst>
+          </p:cNvPr>
+          <p:cNvSpPr/>
+          <p:nvPr/>
+        </p:nvSpPr>
+        <p:spPr>
+          <a:xfrm>
+            <a:off x="1257530" y="2853053"/>
+            <a:ext cx="4702386" cy="1151894"/>
+          </a:xfrm>
+          <a:prstGeom prst="roundRect">
+            <a:avLst>
+              <a:gd name="adj" fmla="val 4587"/>
+            </a:avLst>
+          </a:prstGeom>
+          <a:solidFill>
+            <a:srgbClr val="FFFFFF"/>
+          </a:solidFill>
+          <a:ln w="15240">
+            <a:solidFill>
+              <a:srgbClr val="DEDFE8"/>
+            </a:solidFill>
+            <a:prstDash val="solid"/>
+          </a:ln>
+          <a:effectLst>
+            <a:outerShdw blurRad="76200" dist="25400" dir="5400000" algn="bl" rotWithShape="0">
+              <a:srgbClr val="000000">
+                <a:alpha val="12000"/>
+              </a:srgbClr>
+            </a:outerShdw>
+          </a:effectLst>
+        </p:spPr>
+        <p:txBody>
+          <a:bodyPr/>
+          <a:lstStyle/>
+          <a:p>
+            <a:endParaRPr lang="ko-KR" altLang="en-US" sz="2000">
+              <a:latin typeface="프리젠테이션 5 Medium" pitchFamily="2" charset="-127"/>
+              <a:ea typeface="프리젠테이션 5 Medium" pitchFamily="2" charset="-127"/>
+            </a:endParaRPr>
+          </a:p>
+        </p:txBody>
+      </p:sp>
+      <p:sp>
+        <p:nvSpPr>
+          <p:cNvPr id="2" name="제목 1">
+            <a:extLst>
+              <a:ext uri="{FF2B5EF4-FFF2-40B4-BE49-F238E27FC236}">
+                <a16:creationId xmlns:a16="http://schemas.microsoft.com/office/drawing/2014/main" id="{B17F4F86-F63A-3D8B-C213-E5FB941C2799}"/>
+              </a:ext>
+            </a:extLst>
+          </p:cNvPr>
+          <p:cNvSpPr>
+            <a:spLocks noGrp="1"/>
+          </p:cNvSpPr>
+          <p:nvPr>
+            <p:ph type="title" idx="100"/>
+          </p:nvPr>
+        </p:nvSpPr>
+        <p:spPr/>
+        <p:txBody>
+          <a:bodyPr>
+            <a:normAutofit fontScale="90000"/>
+          </a:bodyPr>
+          <a:lstStyle/>
+          <a:p>
+            <a:r>
+              <a:rPr lang="ko-KR" altLang="en-US" sz="3600" dirty="0">
+                <a:latin typeface="프리젠테이션 5 Medium" pitchFamily="2" charset="-127"/>
+                <a:ea typeface="프리젠테이션 5 Medium" pitchFamily="2" charset="-127"/>
+              </a:rPr>
+              <a:t>개요</a:t>
+            </a:r>
+          </a:p>
+        </p:txBody>
+      </p:sp>
+      <p:sp>
+        <p:nvSpPr>
+          <p:cNvPr id="3" name="텍스트 개체 틀 2">
+            <a:extLst>
+              <a:ext uri="{FF2B5EF4-FFF2-40B4-BE49-F238E27FC236}">
+                <a16:creationId xmlns:a16="http://schemas.microsoft.com/office/drawing/2014/main" id="{C4E59EF0-0E8E-03E9-405C-D4D851555780}"/>
+              </a:ext>
+            </a:extLst>
+          </p:cNvPr>
+          <p:cNvSpPr>
+            <a:spLocks noGrp="1"/>
+          </p:cNvSpPr>
+          <p:nvPr>
+            <p:ph type="body" idx="101"/>
+          </p:nvPr>
+        </p:nvSpPr>
+        <p:spPr/>
+        <p:txBody>
+          <a:bodyPr/>
+          <a:lstStyle/>
+          <a:p>
+            <a:r>
+              <a:rPr lang="ko-KR" altLang="en-US" dirty="0">
+                <a:latin typeface="프리젠테이션 5 Medium" pitchFamily="2" charset="-127"/>
+                <a:ea typeface="프리젠테이션 5 Medium" pitchFamily="2" charset="-127"/>
+              </a:rPr>
+              <a:t>가설 </a:t>
+            </a:r>
+            <a:r>
+              <a:rPr lang="en-US" altLang="ko-KR" dirty="0">
+                <a:latin typeface="프리젠테이션 5 Medium" pitchFamily="2" charset="-127"/>
+                <a:ea typeface="프리젠테이션 5 Medium" pitchFamily="2" charset="-127"/>
+              </a:rPr>
+              <a:t>- Read Head</a:t>
+            </a:r>
+            <a:r>
+              <a:rPr lang="ko-KR" altLang="en-US" dirty="0">
+                <a:latin typeface="프리젠테이션 5 Medium" pitchFamily="2" charset="-127"/>
+                <a:ea typeface="프리젠테이션 5 Medium" pitchFamily="2" charset="-127"/>
+              </a:rPr>
+              <a:t>와 </a:t>
+            </a:r>
+            <a:r>
+              <a:rPr lang="en-US" altLang="ko-KR" dirty="0">
+                <a:latin typeface="프리젠테이션 5 Medium" pitchFamily="2" charset="-127"/>
+                <a:ea typeface="프리젠테이션 5 Medium" pitchFamily="2" charset="-127"/>
+              </a:rPr>
+              <a:t>Control Head</a:t>
+            </a:r>
+            <a:r>
+              <a:rPr lang="ko-KR" altLang="en-US" dirty="0">
+                <a:latin typeface="프리젠테이션 5 Medium" pitchFamily="2" charset="-127"/>
+                <a:ea typeface="프리젠테이션 5 Medium" pitchFamily="2" charset="-127"/>
+              </a:rPr>
+              <a:t>는 분리되어 있다</a:t>
+            </a:r>
+          </a:p>
+        </p:txBody>
+      </p:sp>
+      <p:sp>
+        <p:nvSpPr>
+          <p:cNvPr id="9" name="TextBox 8">
+            <a:extLst>
+              <a:ext uri="{FF2B5EF4-FFF2-40B4-BE49-F238E27FC236}">
+                <a16:creationId xmlns:a16="http://schemas.microsoft.com/office/drawing/2014/main" id="{C3A7E16B-BE12-84F5-0D21-35BF5A10661D}"/>
+              </a:ext>
+            </a:extLst>
+          </p:cNvPr>
           <p:cNvSpPr txBox="1"/>
           <p:nvPr/>
         </p:nvSpPr>
         <p:spPr>
           <a:xfrm>
-            <a:off x="640080" y="411480"/>
-            <a:ext cx="10908792" cy="365760"/>
+            <a:off x="3796146" y="1949678"/>
+            <a:ext cx="4599404" cy="215444"/>
           </a:xfrm>
           <a:prstGeom prst="rect">
             <a:avLst/>
@@ -8631,40 +9500,258 @@
           <a:noFill/>
         </p:spPr>
         <p:txBody>
-          <a:bodyPr wrap="square" lIns="0" tIns="0" rIns="0" bIns="0">
+          <a:bodyPr wrap="square" lIns="0" tIns="0" rIns="0" bIns="0" anchor="ctr">
             <a:spAutoFit/>
           </a:bodyPr>
           <a:lstStyle/>
           <a:p>
-            <a:pPr algn="l">
-              <a:lnSpc>
-                <a:spcPct val="125000"/>
-              </a:lnSpc>
-            </a:pPr>
-            <a:r>
-              <a:rPr sz="1200" b="1">
+            <a:pPr algn="ctr"/>
+            <a:r>
+              <a:rPr sz="1400" b="0" i="0" dirty="0">
+                <a:solidFill>
+                  <a:srgbClr val="565C66"/>
+                </a:solidFill>
+                <a:latin typeface="프리젠테이션 5 Medium" pitchFamily="2" charset="-127"/>
+                <a:ea typeface="프리젠테이션 5 Medium" pitchFamily="2" charset="-127"/>
+              </a:rPr>
+              <a:t>[</a:t>
+            </a:r>
+            <a:r>
+              <a:rPr sz="1400" b="0" i="0" dirty="0" err="1">
+                <a:solidFill>
+                  <a:srgbClr val="565C66"/>
+                </a:solidFill>
+                <a:latin typeface="프리젠테이션 5 Medium" pitchFamily="2" charset="-127"/>
+                <a:ea typeface="프리젠테이션 5 Medium" pitchFamily="2" charset="-127"/>
+              </a:rPr>
+              <a:t>정상</a:t>
+            </a:r>
+            <a:r>
+              <a:rPr sz="1400" b="0" i="0" dirty="0">
+                <a:solidFill>
+                  <a:srgbClr val="565C66"/>
+                </a:solidFill>
+                <a:latin typeface="프리젠테이션 5 Medium" pitchFamily="2" charset="-127"/>
+                <a:ea typeface="프리젠테이션 5 Medium" pitchFamily="2" charset="-127"/>
+              </a:rPr>
+              <a:t> </a:t>
+            </a:r>
+            <a:r>
+              <a:rPr sz="1400" b="0" i="0" dirty="0" err="1">
+                <a:solidFill>
+                  <a:srgbClr val="565C66"/>
+                </a:solidFill>
+                <a:latin typeface="프리젠테이션 5 Medium" pitchFamily="2" charset="-127"/>
+                <a:ea typeface="프리젠테이션 5 Medium" pitchFamily="2" charset="-127"/>
+              </a:rPr>
+              <a:t>지시</a:t>
+            </a:r>
+            <a:r>
+              <a:rPr sz="1400" b="0" i="0" dirty="0">
+                <a:solidFill>
+                  <a:srgbClr val="565C66"/>
+                </a:solidFill>
+                <a:latin typeface="프리젠테이션 5 Medium" pitchFamily="2" charset="-127"/>
+                <a:ea typeface="프리젠테이션 5 Medium" pitchFamily="2" charset="-127"/>
+              </a:rPr>
+              <a:t>] + [</a:t>
+            </a:r>
+            <a:r>
+              <a:rPr sz="1400" b="0" i="0" dirty="0" err="1">
+                <a:solidFill>
+                  <a:srgbClr val="565C66"/>
+                </a:solidFill>
+                <a:latin typeface="프리젠테이션 5 Medium" pitchFamily="2" charset="-127"/>
+                <a:ea typeface="프리젠테이션 5 Medium" pitchFamily="2" charset="-127"/>
+              </a:rPr>
+              <a:t>외부</a:t>
+            </a:r>
+            <a:r>
+              <a:rPr sz="1400" b="0" i="0" dirty="0">
+                <a:solidFill>
+                  <a:srgbClr val="565C66"/>
+                </a:solidFill>
+                <a:latin typeface="프리젠테이션 5 Medium" pitchFamily="2" charset="-127"/>
+                <a:ea typeface="프리젠테이션 5 Medium" pitchFamily="2" charset="-127"/>
+              </a:rPr>
+              <a:t> </a:t>
+            </a:r>
+            <a:r>
+              <a:rPr sz="1400" b="0" i="0" dirty="0" err="1">
+                <a:solidFill>
+                  <a:srgbClr val="565C66"/>
+                </a:solidFill>
+                <a:latin typeface="프리젠테이션 5 Medium" pitchFamily="2" charset="-127"/>
+                <a:ea typeface="프리젠테이션 5 Medium" pitchFamily="2" charset="-127"/>
+              </a:rPr>
+              <a:t>데이터</a:t>
+            </a:r>
+            <a:r>
+              <a:rPr sz="1400" b="0" i="0" dirty="0">
+                <a:solidFill>
+                  <a:srgbClr val="565C66"/>
+                </a:solidFill>
+                <a:latin typeface="프리젠테이션 5 Medium" pitchFamily="2" charset="-127"/>
+                <a:ea typeface="프리젠테이션 5 Medium" pitchFamily="2" charset="-127"/>
+              </a:rPr>
+              <a:t> </a:t>
+            </a:r>
+            <a:r>
+              <a:rPr sz="1400" b="0" i="0" dirty="0">
                 <a:solidFill>
                   <a:srgbClr val="C06A1F"/>
                 </a:solidFill>
-                <a:latin typeface="Consolas"/>
-                <a:ea typeface="Consolas"/>
-                <a:cs typeface="Consolas"/>
-              </a:rPr>
-              <a:t>02 · 피드백 ① 대응</a:t>
-            </a:r>
+                <a:latin typeface="프리젠테이션 5 Medium" pitchFamily="2" charset="-127"/>
+                <a:ea typeface="프리젠테이션 5 Medium" pitchFamily="2" charset="-127"/>
+              </a:rPr>
+              <a:t>(</a:t>
+            </a:r>
+            <a:r>
+              <a:rPr sz="1400" b="0" i="0" dirty="0" err="1">
+                <a:solidFill>
+                  <a:srgbClr val="C06A1F"/>
+                </a:solidFill>
+                <a:latin typeface="프리젠테이션 5 Medium" pitchFamily="2" charset="-127"/>
+                <a:ea typeface="프리젠테이션 5 Medium" pitchFamily="2" charset="-127"/>
+              </a:rPr>
+              <a:t>공격자</a:t>
+            </a:r>
+            <a:r>
+              <a:rPr sz="1400" b="0" i="0" dirty="0">
+                <a:solidFill>
+                  <a:srgbClr val="C06A1F"/>
+                </a:solidFill>
+                <a:latin typeface="프리젠테이션 5 Medium" pitchFamily="2" charset="-127"/>
+                <a:ea typeface="프리젠테이션 5 Medium" pitchFamily="2" charset="-127"/>
+              </a:rPr>
+              <a:t> </a:t>
+            </a:r>
+            <a:r>
+              <a:rPr sz="1400" b="0" i="0" dirty="0" err="1">
+                <a:solidFill>
+                  <a:srgbClr val="C06A1F"/>
+                </a:solidFill>
+                <a:latin typeface="프리젠테이션 5 Medium" pitchFamily="2" charset="-127"/>
+                <a:ea typeface="프리젠테이션 5 Medium" pitchFamily="2" charset="-127"/>
+              </a:rPr>
+              <a:t>명령</a:t>
+            </a:r>
+            <a:r>
+              <a:rPr sz="1400" b="0" i="0" dirty="0">
+                <a:solidFill>
+                  <a:srgbClr val="C06A1F"/>
+                </a:solidFill>
+                <a:latin typeface="프리젠테이션 5 Medium" pitchFamily="2" charset="-127"/>
+                <a:ea typeface="프리젠테이션 5 Medium" pitchFamily="2" charset="-127"/>
+              </a:rPr>
+              <a:t> </a:t>
+            </a:r>
+            <a:r>
+              <a:rPr sz="1400" b="0" i="0" dirty="0" err="1">
+                <a:solidFill>
+                  <a:srgbClr val="C06A1F"/>
+                </a:solidFill>
+                <a:latin typeface="프리젠테이션 5 Medium" pitchFamily="2" charset="-127"/>
+                <a:ea typeface="프리젠테이션 5 Medium" pitchFamily="2" charset="-127"/>
+              </a:rPr>
+              <a:t>삽입</a:t>
+            </a:r>
+            <a:r>
+              <a:rPr sz="1400" b="0" i="0" dirty="0">
+                <a:solidFill>
+                  <a:srgbClr val="C06A1F"/>
+                </a:solidFill>
+                <a:latin typeface="프리젠테이션 5 Medium" pitchFamily="2" charset="-127"/>
+                <a:ea typeface="프리젠테이션 5 Medium" pitchFamily="2" charset="-127"/>
+              </a:rPr>
+              <a:t>)</a:t>
+            </a:r>
+            <a:r>
+              <a:rPr sz="1400" b="0" i="0" dirty="0">
+                <a:solidFill>
+                  <a:srgbClr val="565C66"/>
+                </a:solidFill>
+                <a:latin typeface="프리젠테이션 5 Medium" pitchFamily="2" charset="-127"/>
+                <a:ea typeface="프리젠테이션 5 Medium" pitchFamily="2" charset="-127"/>
+              </a:rPr>
+              <a:t>] → </a:t>
+            </a:r>
+            <a:r>
+              <a:rPr sz="1400" b="1" i="0" dirty="0">
+                <a:solidFill>
+                  <a:srgbClr val="16181D"/>
+                </a:solidFill>
+                <a:latin typeface="프리젠테이션 5 Medium" pitchFamily="2" charset="-127"/>
+                <a:ea typeface="프리젠테이션 5 Medium" pitchFamily="2" charset="-127"/>
+              </a:rPr>
+              <a:t>LLM</a:t>
+            </a:r>
+            <a:r>
+              <a:rPr sz="1400" b="0" i="0" dirty="0">
+                <a:solidFill>
+                  <a:srgbClr val="565C66"/>
+                </a:solidFill>
+                <a:latin typeface="프리젠테이션 5 Medium" pitchFamily="2" charset="-127"/>
+                <a:ea typeface="프리젠테이션 5 Medium" pitchFamily="2" charset="-127"/>
+              </a:rPr>
+              <a:t> → </a:t>
+            </a:r>
+            <a:r>
+              <a:rPr sz="1400" b="0" i="0" dirty="0" err="1">
+                <a:solidFill>
+                  <a:srgbClr val="C1442A"/>
+                </a:solidFill>
+                <a:latin typeface="프리젠테이션 5 Medium" pitchFamily="2" charset="-127"/>
+                <a:ea typeface="프리젠테이션 5 Medium" pitchFamily="2" charset="-127"/>
+              </a:rPr>
+              <a:t>공격</a:t>
+            </a:r>
+            <a:r>
+              <a:rPr sz="1400" b="0" i="0" dirty="0">
+                <a:solidFill>
+                  <a:srgbClr val="C1442A"/>
+                </a:solidFill>
+                <a:latin typeface="프리젠테이션 5 Medium" pitchFamily="2" charset="-127"/>
+                <a:ea typeface="프리젠테이션 5 Medium" pitchFamily="2" charset="-127"/>
+              </a:rPr>
+              <a:t> </a:t>
+            </a:r>
+            <a:r>
+              <a:rPr sz="1400" b="0" i="0" dirty="0" err="1">
+                <a:solidFill>
+                  <a:srgbClr val="C1442A"/>
+                </a:solidFill>
+                <a:latin typeface="프리젠테이션 5 Medium" pitchFamily="2" charset="-127"/>
+                <a:ea typeface="프리젠테이션 5 Medium" pitchFamily="2" charset="-127"/>
+              </a:rPr>
+              <a:t>실행</a:t>
+            </a:r>
+            <a:endParaRPr sz="1400" b="0" i="0" dirty="0">
+              <a:solidFill>
+                <a:srgbClr val="C1442A"/>
+              </a:solidFill>
+              <a:latin typeface="프리젠테이션 5 Medium" pitchFamily="2" charset="-127"/>
+              <a:ea typeface="프리젠테이션 5 Medium" pitchFamily="2" charset="-127"/>
+            </a:endParaRPr>
           </a:p>
         </p:txBody>
       </p:sp>
       <p:sp>
         <p:nvSpPr>
-          <p:cNvPr id="4" name="TextBox 3"/>
+          <p:cNvPr id="15" name="TextBox 14">
+            <a:extLst>
+              <a:ext uri="{FF2B5EF4-FFF2-40B4-BE49-F238E27FC236}">
+                <a16:creationId xmlns:a16="http://schemas.microsoft.com/office/drawing/2014/main" id="{E667CEED-1777-349D-C36E-C4501904379E}"/>
+              </a:ext>
+            </a:extLst>
+          </p:cNvPr>
           <p:cNvSpPr txBox="1"/>
           <p:nvPr/>
         </p:nvSpPr>
         <p:spPr>
           <a:xfrm>
-            <a:off x="640080" y="777240"/>
-            <a:ext cx="10908792" cy="822960"/>
+            <a:off x="1538162" y="3134882"/>
+            <a:ext cx="4174375" cy="482183"/>
           </a:xfrm>
           <a:prstGeom prst="rect">
             <a:avLst/>
@@ -8672,86 +9759,204 @@
           <a:noFill/>
         </p:spPr>
         <p:txBody>
-          <a:bodyPr wrap="square" lIns="0" tIns="0" rIns="0" bIns="0">
+          <a:bodyPr wrap="square" lIns="0" tIns="0" rIns="0" bIns="0" anchor="t">
             <a:spAutoFit/>
           </a:bodyPr>
           <a:lstStyle/>
           <a:p>
-            <a:pPr algn="l">
-              <a:lnSpc>
-                <a:spcPct val="110000"/>
-              </a:lnSpc>
+            <a:r>
+              <a:rPr sz="1400" b="1" i="0" dirty="0">
+                <a:solidFill>
+                  <a:srgbClr val="2F6FCE"/>
+                </a:solidFill>
+                <a:latin typeface="프리젠테이션 5 Medium" pitchFamily="2" charset="-127"/>
+                <a:ea typeface="프리젠테이션 5 Medium" pitchFamily="2" charset="-127"/>
+              </a:rPr>
+              <a:t>Read Head</a:t>
+            </a:r>
+          </a:p>
+          <a:p>
+            <a:pPr>
+              <a:spcBef>
+                <a:spcPts val="400"/>
+              </a:spcBef>
             </a:pPr>
             <a:r>
-              <a:rPr sz="2600" b="1">
-                <a:solidFill>
-                  <a:srgbClr val="16181D"/>
-                </a:solidFill>
-                <a:latin typeface="Malgun Gothic"/>
-                <a:ea typeface="Malgun Gothic"/>
-                <a:cs typeface="Malgun Gothic"/>
-              </a:rPr>
-              <a:t>AgentDojo를 어떻게 붙였나 — 탐색과 평가를 분리</a:t>
-            </a:r>
+              <a:rPr sz="1400" b="0" i="0" dirty="0" err="1">
+                <a:solidFill>
+                  <a:srgbClr val="565C66"/>
+                </a:solidFill>
+                <a:latin typeface="프리젠테이션 5 Medium" pitchFamily="2" charset="-127"/>
+                <a:ea typeface="프리젠테이션 5 Medium" pitchFamily="2" charset="-127"/>
+              </a:rPr>
+              <a:t>외부</a:t>
+            </a:r>
+            <a:r>
+              <a:rPr sz="1400" b="0" i="0" dirty="0">
+                <a:solidFill>
+                  <a:srgbClr val="565C66"/>
+                </a:solidFill>
+                <a:latin typeface="프리젠테이션 5 Medium" pitchFamily="2" charset="-127"/>
+                <a:ea typeface="프리젠테이션 5 Medium" pitchFamily="2" charset="-127"/>
+              </a:rPr>
+              <a:t> </a:t>
+            </a:r>
+            <a:r>
+              <a:rPr sz="1400" b="0" i="0" dirty="0" err="1">
+                <a:solidFill>
+                  <a:srgbClr val="565C66"/>
+                </a:solidFill>
+                <a:latin typeface="프리젠테이션 5 Medium" pitchFamily="2" charset="-127"/>
+                <a:ea typeface="프리젠테이션 5 Medium" pitchFamily="2" charset="-127"/>
+              </a:rPr>
+              <a:t>데이터의</a:t>
+            </a:r>
+            <a:r>
+              <a:rPr sz="1400" b="0" i="0" dirty="0">
+                <a:solidFill>
+                  <a:srgbClr val="565C66"/>
+                </a:solidFill>
+                <a:latin typeface="프리젠테이션 5 Medium" pitchFamily="2" charset="-127"/>
+                <a:ea typeface="프리젠테이션 5 Medium" pitchFamily="2" charset="-127"/>
+              </a:rPr>
+              <a:t> </a:t>
+            </a:r>
+            <a:r>
+              <a:rPr sz="1400" b="0" i="0" dirty="0" err="1">
+                <a:solidFill>
+                  <a:srgbClr val="565C66"/>
+                </a:solidFill>
+                <a:latin typeface="프리젠테이션 5 Medium" pitchFamily="2" charset="-127"/>
+                <a:ea typeface="프리젠테이션 5 Medium" pitchFamily="2" charset="-127"/>
+              </a:rPr>
+              <a:t>내용을</a:t>
+            </a:r>
+            <a:r>
+              <a:rPr sz="1400" b="0" i="0" dirty="0">
+                <a:solidFill>
+                  <a:srgbClr val="565C66"/>
+                </a:solidFill>
+                <a:latin typeface="프리젠테이션 5 Medium" pitchFamily="2" charset="-127"/>
+                <a:ea typeface="프리젠테이션 5 Medium" pitchFamily="2" charset="-127"/>
+              </a:rPr>
+              <a:t> </a:t>
+            </a:r>
+            <a:r>
+              <a:rPr sz="1400" b="0" i="0" dirty="0" err="1">
+                <a:solidFill>
+                  <a:srgbClr val="565C66"/>
+                </a:solidFill>
+                <a:latin typeface="프리젠테이션 5 Medium" pitchFamily="2" charset="-127"/>
+                <a:ea typeface="프리젠테이션 5 Medium" pitchFamily="2" charset="-127"/>
+              </a:rPr>
+              <a:t>읽는</a:t>
+            </a:r>
+            <a:r>
+              <a:rPr sz="1400" b="0" i="0" dirty="0">
+                <a:solidFill>
+                  <a:srgbClr val="565C66"/>
+                </a:solidFill>
+                <a:latin typeface="프리젠테이션 5 Medium" pitchFamily="2" charset="-127"/>
+                <a:ea typeface="프리젠테이션 5 Medium" pitchFamily="2" charset="-127"/>
+              </a:rPr>
+              <a:t> 데 </a:t>
+            </a:r>
+            <a:r>
+              <a:rPr sz="1400" b="0" i="0" dirty="0" err="1">
+                <a:solidFill>
+                  <a:srgbClr val="565C66"/>
+                </a:solidFill>
+                <a:latin typeface="프리젠테이션 5 Medium" pitchFamily="2" charset="-127"/>
+                <a:ea typeface="프리젠테이션 5 Medium" pitchFamily="2" charset="-127"/>
+              </a:rPr>
+              <a:t>관여</a:t>
+            </a:r>
+            <a:r>
+              <a:rPr sz="1400" b="0" i="0" dirty="0">
+                <a:solidFill>
+                  <a:srgbClr val="565C66"/>
+                </a:solidFill>
+                <a:latin typeface="프리젠테이션 5 Medium" pitchFamily="2" charset="-127"/>
+                <a:ea typeface="프리젠테이션 5 Medium" pitchFamily="2" charset="-127"/>
+              </a:rPr>
+              <a:t> — </a:t>
+            </a:r>
+            <a:r>
+              <a:rPr sz="1400" b="0" i="0" dirty="0" err="1">
+                <a:solidFill>
+                  <a:srgbClr val="565C66"/>
+                </a:solidFill>
+                <a:latin typeface="프리젠테이션 5 Medium" pitchFamily="2" charset="-127"/>
+                <a:ea typeface="프리젠테이션 5 Medium" pitchFamily="2" charset="-127"/>
+              </a:rPr>
+              <a:t>정상</a:t>
+            </a:r>
+            <a:r>
+              <a:rPr sz="1400" b="0" i="0" dirty="0">
+                <a:solidFill>
+                  <a:srgbClr val="565C66"/>
+                </a:solidFill>
+                <a:latin typeface="프리젠테이션 5 Medium" pitchFamily="2" charset="-127"/>
+                <a:ea typeface="프리젠테이션 5 Medium" pitchFamily="2" charset="-127"/>
+              </a:rPr>
+              <a:t> </a:t>
+            </a:r>
+            <a:r>
+              <a:rPr sz="1400" b="0" i="0" dirty="0" err="1">
+                <a:solidFill>
+                  <a:srgbClr val="565C66"/>
+                </a:solidFill>
+                <a:latin typeface="프리젠테이션 5 Medium" pitchFamily="2" charset="-127"/>
+                <a:ea typeface="프리젠테이션 5 Medium" pitchFamily="2" charset="-127"/>
+              </a:rPr>
+              <a:t>기능을</a:t>
+            </a:r>
+            <a:r>
+              <a:rPr sz="1400" b="0" i="0" dirty="0">
+                <a:solidFill>
+                  <a:srgbClr val="565C66"/>
+                </a:solidFill>
+                <a:latin typeface="프리젠테이션 5 Medium" pitchFamily="2" charset="-127"/>
+                <a:ea typeface="프리젠테이션 5 Medium" pitchFamily="2" charset="-127"/>
+              </a:rPr>
+              <a:t> </a:t>
+            </a:r>
+            <a:r>
+              <a:rPr sz="1400" b="0" i="0" dirty="0" err="1">
+                <a:solidFill>
+                  <a:srgbClr val="565C66"/>
+                </a:solidFill>
+                <a:latin typeface="프리젠테이션 5 Medium" pitchFamily="2" charset="-127"/>
+                <a:ea typeface="프리젠테이션 5 Medium" pitchFamily="2" charset="-127"/>
+              </a:rPr>
+              <a:t>담당</a:t>
+            </a:r>
+            <a:endParaRPr sz="1400" b="0" i="0" dirty="0">
+              <a:solidFill>
+                <a:srgbClr val="565C66"/>
+              </a:solidFill>
+              <a:latin typeface="프리젠테이션 5 Medium" pitchFamily="2" charset="-127"/>
+              <a:ea typeface="프리젠테이션 5 Medium" pitchFamily="2" charset="-127"/>
+            </a:endParaRPr>
           </a:p>
         </p:txBody>
       </p:sp>
       <p:sp>
         <p:nvSpPr>
-          <p:cNvPr id="5" name="Rounded Rectangle 4"/>
-          <p:cNvSpPr/>
-          <p:nvPr/>
-        </p:nvSpPr>
-        <p:spPr>
-          <a:xfrm>
-            <a:off x="640080" y="1691640"/>
-            <a:ext cx="6400800" cy="1691640"/>
-          </a:xfrm>
-          <a:prstGeom prst="roundRect">
-            <a:avLst>
-              <a:gd name="adj" fmla="val 9000"/>
-            </a:avLst>
-          </a:prstGeom>
-          <a:solidFill>
-            <a:srgbClr val="F2F2F4"/>
-          </a:solidFill>
-          <a:ln>
-            <a:noFill/>
-          </a:ln>
-          <a:effectLst/>
-        </p:spPr>
-        <p:style>
-          <a:lnRef idx="1">
-            <a:schemeClr val="accent1"/>
-          </a:lnRef>
-          <a:fillRef idx="3">
-            <a:schemeClr val="accent1"/>
-          </a:fillRef>
-          <a:effectRef idx="2">
-            <a:schemeClr val="accent1"/>
-          </a:effectRef>
-          <a:fontRef idx="minor">
-            <a:schemeClr val="lt1"/>
-          </a:fontRef>
-        </p:style>
-        <p:txBody>
-          <a:bodyPr rtlCol="0" anchor="ctr"/>
-          <a:lstStyle/>
-          <a:p>
-            <a:endParaRPr/>
-          </a:p>
-        </p:txBody>
-      </p:sp>
-      <p:sp>
-        <p:nvSpPr>
-          <p:cNvPr id="6" name="TextBox 5"/>
+          <p:cNvPr id="21" name="TextBox 20">
+            <a:extLst>
+              <a:ext uri="{FF2B5EF4-FFF2-40B4-BE49-F238E27FC236}">
+                <a16:creationId xmlns:a16="http://schemas.microsoft.com/office/drawing/2014/main" id="{E2949205-E297-703D-EFF8-DD578196E492}"/>
+              </a:ext>
+            </a:extLst>
+          </p:cNvPr>
           <p:cNvSpPr txBox="1"/>
           <p:nvPr/>
         </p:nvSpPr>
         <p:spPr>
           <a:xfrm>
-            <a:off x="841248" y="1920240"/>
-            <a:ext cx="5998464" cy="1280160"/>
+            <a:off x="6552126" y="3134882"/>
+            <a:ext cx="4196694" cy="482183"/>
           </a:xfrm>
           <a:prstGeom prst="rect">
             <a:avLst/>
@@ -8759,140 +9964,204 @@
           <a:noFill/>
         </p:spPr>
         <p:txBody>
-          <a:bodyPr wrap="square" lIns="0" tIns="0" rIns="0" bIns="0">
+          <a:bodyPr wrap="square" lIns="0" tIns="0" rIns="0" bIns="0" anchor="t">
             <a:spAutoFit/>
           </a:bodyPr>
           <a:lstStyle/>
           <a:p>
-            <a:pPr algn="l">
-              <a:lnSpc>
-                <a:spcPct val="135000"/>
-              </a:lnSpc>
+            <a:r>
+              <a:rPr sz="1400" b="1" i="0" dirty="0">
+                <a:solidFill>
+                  <a:srgbClr val="2F6FCE"/>
+                </a:solidFill>
+                <a:latin typeface="프리젠테이션 5 Medium" pitchFamily="2" charset="-127"/>
+                <a:ea typeface="프리젠테이션 5 Medium" pitchFamily="2" charset="-127"/>
+              </a:rPr>
+              <a:t>Control Head</a:t>
+            </a:r>
+          </a:p>
+          <a:p>
+            <a:pPr>
+              <a:spcBef>
+                <a:spcPts val="400"/>
+              </a:spcBef>
             </a:pPr>
             <a:r>
-              <a:rPr sz="1200" b="0">
-                <a:solidFill>
-                  <a:srgbClr val="16181D"/>
-                </a:solidFill>
-                <a:latin typeface="Consolas"/>
-                <a:ea typeface="Consolas"/>
-                <a:cs typeface="Consolas"/>
-              </a:rPr>
-              <a:t>                ┌─ Track A (탐색)</a:t>
-            </a:r>
-          </a:p>
-          <a:p>
-            <a:pPr algn="l">
-              <a:lnSpc>
-                <a:spcPct val="135000"/>
-              </a:lnSpc>
-            </a:pPr>
-            <a:r>
-              <a:rPr sz="1200" b="0">
-                <a:solidFill>
-                  <a:srgbClr val="2F6FCE"/>
-                </a:solidFill>
-                <a:latin typeface="Consolas"/>
-                <a:ea typeface="Consolas"/>
-                <a:cs typeface="Consolas"/>
-              </a:rPr>
-              <a:t>  AgentDojo ────┤   단일 턴으로 잘라 relevance 계산</a:t>
-            </a:r>
-          </a:p>
-          <a:p>
-            <a:pPr algn="l">
-              <a:lnSpc>
-                <a:spcPct val="135000"/>
-              </a:lnSpc>
-            </a:pPr>
-            <a:r>
-              <a:rPr sz="1200" b="0">
-                <a:solidFill>
-                  <a:srgbClr val="16181D"/>
-                </a:solidFill>
-                <a:latin typeface="Consolas"/>
-                <a:ea typeface="Consolas"/>
-                <a:cs typeface="Consolas"/>
-              </a:rPr>
-              <a:t>                └─ Track B (평가)</a:t>
-            </a:r>
-          </a:p>
-          <a:p>
-            <a:pPr algn="l">
-              <a:lnSpc>
-                <a:spcPct val="135000"/>
-              </a:lnSpc>
-            </a:pPr>
-            <a:r>
-              <a:rPr sz="1200" b="0">
-                <a:solidFill>
-                  <a:srgbClr val="C06A1F"/>
-                </a:solidFill>
-                <a:latin typeface="Consolas"/>
-                <a:ea typeface="Consolas"/>
-                <a:cs typeface="Consolas"/>
-              </a:rPr>
-              <a:t>                    멀티턴 agent loop + 네이티브 채점</a:t>
-            </a:r>
+              <a:rPr sz="1400" b="0" i="0" dirty="0" err="1">
+                <a:solidFill>
+                  <a:srgbClr val="565C66"/>
+                </a:solidFill>
+                <a:latin typeface="프리젠테이션 5 Medium" pitchFamily="2" charset="-127"/>
+                <a:ea typeface="프리젠테이션 5 Medium" pitchFamily="2" charset="-127"/>
+              </a:rPr>
+              <a:t>데이터</a:t>
+            </a:r>
+            <a:r>
+              <a:rPr sz="1400" b="0" i="0" dirty="0">
+                <a:solidFill>
+                  <a:srgbClr val="565C66"/>
+                </a:solidFill>
+                <a:latin typeface="프리젠테이션 5 Medium" pitchFamily="2" charset="-127"/>
+                <a:ea typeface="프리젠테이션 5 Medium" pitchFamily="2" charset="-127"/>
+              </a:rPr>
+              <a:t> 속 “</a:t>
+            </a:r>
+            <a:r>
+              <a:rPr sz="1400" b="0" i="0" dirty="0" err="1">
+                <a:solidFill>
+                  <a:srgbClr val="565C66"/>
+                </a:solidFill>
+                <a:latin typeface="프리젠테이션 5 Medium" pitchFamily="2" charset="-127"/>
+                <a:ea typeface="프리젠테이션 5 Medium" pitchFamily="2" charset="-127"/>
+              </a:rPr>
+              <a:t>명령”을</a:t>
+            </a:r>
+            <a:r>
+              <a:rPr sz="1400" b="0" i="0" dirty="0">
+                <a:solidFill>
+                  <a:srgbClr val="565C66"/>
+                </a:solidFill>
+                <a:latin typeface="프리젠테이션 5 Medium" pitchFamily="2" charset="-127"/>
+                <a:ea typeface="프리젠테이션 5 Medium" pitchFamily="2" charset="-127"/>
+              </a:rPr>
+              <a:t> </a:t>
+            </a:r>
+            <a:r>
+              <a:rPr sz="1400" b="0" i="0" dirty="0" err="1">
+                <a:solidFill>
+                  <a:srgbClr val="565C66"/>
+                </a:solidFill>
+                <a:latin typeface="프리젠테이션 5 Medium" pitchFamily="2" charset="-127"/>
+                <a:ea typeface="프리젠테이션 5 Medium" pitchFamily="2" charset="-127"/>
+              </a:rPr>
+              <a:t>실행에</a:t>
+            </a:r>
+            <a:r>
+              <a:rPr sz="1400" b="0" i="0" dirty="0">
+                <a:solidFill>
+                  <a:srgbClr val="565C66"/>
+                </a:solidFill>
+                <a:latin typeface="프리젠테이션 5 Medium" pitchFamily="2" charset="-127"/>
+                <a:ea typeface="프리젠테이션 5 Medium" pitchFamily="2" charset="-127"/>
+              </a:rPr>
+              <a:t> </a:t>
+            </a:r>
+            <a:r>
+              <a:rPr sz="1400" b="0" i="0" dirty="0" err="1">
+                <a:solidFill>
+                  <a:srgbClr val="565C66"/>
+                </a:solidFill>
+                <a:latin typeface="프리젠테이션 5 Medium" pitchFamily="2" charset="-127"/>
+                <a:ea typeface="프리젠테이션 5 Medium" pitchFamily="2" charset="-127"/>
+              </a:rPr>
+              <a:t>옮기는</a:t>
+            </a:r>
+            <a:r>
+              <a:rPr sz="1400" b="0" i="0" dirty="0">
+                <a:solidFill>
+                  <a:srgbClr val="565C66"/>
+                </a:solidFill>
+                <a:latin typeface="프리젠테이션 5 Medium" pitchFamily="2" charset="-127"/>
+                <a:ea typeface="프리젠테이션 5 Medium" pitchFamily="2" charset="-127"/>
+              </a:rPr>
+              <a:t> 데 </a:t>
+            </a:r>
+            <a:r>
+              <a:rPr sz="1400" b="0" i="0" dirty="0" err="1">
+                <a:solidFill>
+                  <a:srgbClr val="565C66"/>
+                </a:solidFill>
+                <a:latin typeface="프리젠테이션 5 Medium" pitchFamily="2" charset="-127"/>
+                <a:ea typeface="프리젠테이션 5 Medium" pitchFamily="2" charset="-127"/>
+              </a:rPr>
+              <a:t>관여</a:t>
+            </a:r>
+            <a:r>
+              <a:rPr sz="1400" b="0" i="0" dirty="0">
+                <a:solidFill>
+                  <a:srgbClr val="565C66"/>
+                </a:solidFill>
+                <a:latin typeface="프리젠테이션 5 Medium" pitchFamily="2" charset="-127"/>
+                <a:ea typeface="프리젠테이션 5 Medium" pitchFamily="2" charset="-127"/>
+              </a:rPr>
+              <a:t> — </a:t>
+            </a:r>
+            <a:r>
+              <a:rPr sz="1400" b="0" i="0" dirty="0" err="1">
+                <a:solidFill>
+                  <a:srgbClr val="565C66"/>
+                </a:solidFill>
+                <a:latin typeface="프리젠테이션 5 Medium" pitchFamily="2" charset="-127"/>
+                <a:ea typeface="프리젠테이션 5 Medium" pitchFamily="2" charset="-127"/>
+              </a:rPr>
+              <a:t>공격이</a:t>
+            </a:r>
+            <a:r>
+              <a:rPr sz="1400" b="0" i="0" dirty="0">
+                <a:solidFill>
+                  <a:srgbClr val="565C66"/>
+                </a:solidFill>
+                <a:latin typeface="프리젠테이션 5 Medium" pitchFamily="2" charset="-127"/>
+                <a:ea typeface="프리젠테이션 5 Medium" pitchFamily="2" charset="-127"/>
+              </a:rPr>
+              <a:t> </a:t>
+            </a:r>
+            <a:r>
+              <a:rPr sz="1400" b="0" i="0" dirty="0" err="1">
+                <a:solidFill>
+                  <a:srgbClr val="565C66"/>
+                </a:solidFill>
+                <a:latin typeface="프리젠테이션 5 Medium" pitchFamily="2" charset="-127"/>
+                <a:ea typeface="프리젠테이션 5 Medium" pitchFamily="2" charset="-127"/>
+              </a:rPr>
+              <a:t>성공하는</a:t>
+            </a:r>
+            <a:r>
+              <a:rPr sz="1400" b="0" i="0" dirty="0">
+                <a:solidFill>
+                  <a:srgbClr val="565C66"/>
+                </a:solidFill>
+                <a:latin typeface="프리젠테이션 5 Medium" pitchFamily="2" charset="-127"/>
+                <a:ea typeface="프리젠테이션 5 Medium" pitchFamily="2" charset="-127"/>
+              </a:rPr>
+              <a:t> </a:t>
+            </a:r>
+            <a:r>
+              <a:rPr sz="1400" b="0" i="0" dirty="0" err="1">
+                <a:solidFill>
+                  <a:srgbClr val="565C66"/>
+                </a:solidFill>
+                <a:latin typeface="프리젠테이션 5 Medium" pitchFamily="2" charset="-127"/>
+                <a:ea typeface="프리젠테이션 5 Medium" pitchFamily="2" charset="-127"/>
+              </a:rPr>
+              <a:t>경로</a:t>
+            </a:r>
+            <a:endParaRPr sz="1400" b="0" i="0" dirty="0">
+              <a:solidFill>
+                <a:srgbClr val="565C66"/>
+              </a:solidFill>
+              <a:latin typeface="프리젠테이션 5 Medium" pitchFamily="2" charset="-127"/>
+              <a:ea typeface="프리젠테이션 5 Medium" pitchFamily="2" charset="-127"/>
+            </a:endParaRPr>
           </a:p>
         </p:txBody>
       </p:sp>
       <p:sp>
         <p:nvSpPr>
-          <p:cNvPr id="7" name="Rounded Rectangle 6"/>
-          <p:cNvSpPr/>
-          <p:nvPr/>
-        </p:nvSpPr>
-        <p:spPr>
-          <a:xfrm>
-            <a:off x="7360920" y="1691640"/>
-            <a:ext cx="4187952" cy="1691640"/>
-          </a:xfrm>
-          <a:prstGeom prst="roundRect">
-            <a:avLst>
-              <a:gd name="adj" fmla="val 9000"/>
-            </a:avLst>
-          </a:prstGeom>
-          <a:solidFill>
-            <a:srgbClr val="F2F2F4"/>
-          </a:solidFill>
-          <a:ln>
-            <a:noFill/>
-          </a:ln>
-          <a:effectLst/>
-        </p:spPr>
-        <p:style>
-          <a:lnRef idx="1">
-            <a:schemeClr val="accent1"/>
-          </a:lnRef>
-          <a:fillRef idx="3">
-            <a:schemeClr val="accent1"/>
-          </a:fillRef>
-          <a:effectRef idx="2">
-            <a:schemeClr val="accent1"/>
-          </a:effectRef>
-          <a:fontRef idx="minor">
-            <a:schemeClr val="lt1"/>
-          </a:fontRef>
-        </p:style>
-        <p:txBody>
-          <a:bodyPr rtlCol="0" anchor="ctr"/>
-          <a:lstStyle/>
-          <a:p>
-            <a:endParaRPr/>
-          </a:p>
-        </p:txBody>
-      </p:sp>
-      <p:sp>
-        <p:nvSpPr>
-          <p:cNvPr id="8" name="TextBox 7"/>
+          <p:cNvPr id="28" name="TextBox 27">
+            <a:extLst>
+              <a:ext uri="{FF2B5EF4-FFF2-40B4-BE49-F238E27FC236}">
+                <a16:creationId xmlns:a16="http://schemas.microsoft.com/office/drawing/2014/main" id="{EACF2754-93F8-556E-9224-4271E1E7A9B1}"/>
+              </a:ext>
+            </a:extLst>
+          </p:cNvPr>
           <p:cNvSpPr txBox="1"/>
           <p:nvPr/>
         </p:nvSpPr>
         <p:spPr>
           <a:xfrm>
-            <a:off x="7598664" y="1874519"/>
-            <a:ext cx="3712463" cy="1371600"/>
+            <a:off x="1794012" y="4745102"/>
+            <a:ext cx="8603672" cy="722442"/>
           </a:xfrm>
           <a:prstGeom prst="rect">
             <a:avLst/>
@@ -8900,584 +10169,252 @@
           <a:noFill/>
         </p:spPr>
         <p:txBody>
-          <a:bodyPr wrap="square" lIns="0" tIns="0" rIns="0" bIns="0">
+          <a:bodyPr wrap="square">
             <a:spAutoFit/>
           </a:bodyPr>
           <a:lstStyle/>
           <a:p>
-            <a:pPr algn="l">
+            <a:pPr>
               <a:lnSpc>
-                <a:spcPct val="115000"/>
+                <a:spcPct val="135000"/>
               </a:lnSpc>
             </a:pPr>
             <a:r>
-              <a:rPr sz="1350" b="1">
-                <a:solidFill>
-                  <a:srgbClr val="2F6FCE"/>
-                </a:solidFill>
-                <a:latin typeface="Malgun Gothic"/>
-                <a:ea typeface="Malgun Gothic"/>
-                <a:cs typeface="Malgun Gothic"/>
-              </a:rPr>
-              <a:t>왜 나눴나</a:t>
-            </a:r>
-          </a:p>
-          <a:p>
-            <a:pPr algn="l">
+              <a:rPr lang="ko-KR" altLang="en-US" sz="1600" b="0" i="0" dirty="0">
+                <a:solidFill>
+                  <a:srgbClr val="565C66"/>
+                </a:solidFill>
+                <a:latin typeface="프리젠테이션 5 Medium" pitchFamily="2" charset="-127"/>
+                <a:ea typeface="프리젠테이션 5 Medium" pitchFamily="2" charset="-127"/>
+              </a:rPr>
+              <a:t>둘이 분리되어 있다면 </a:t>
+            </a:r>
+            <a:r>
+              <a:rPr lang="en-US" altLang="ko-KR" sz="1600" b="0" i="0" dirty="0">
+                <a:solidFill>
+                  <a:srgbClr val="565C66"/>
+                </a:solidFill>
+                <a:latin typeface="프리젠테이션 5 Medium" pitchFamily="2" charset="-127"/>
+                <a:ea typeface="프리젠테이션 5 Medium" pitchFamily="2" charset="-127"/>
+              </a:rPr>
+              <a:t>control head</a:t>
+            </a:r>
+            <a:r>
+              <a:rPr lang="ko-KR" altLang="en-US" sz="1600" b="0" i="0" dirty="0">
+                <a:solidFill>
+                  <a:srgbClr val="565C66"/>
+                </a:solidFill>
+                <a:latin typeface="프리젠테이션 5 Medium" pitchFamily="2" charset="-127"/>
+                <a:ea typeface="프리젠테이션 5 Medium" pitchFamily="2" charset="-127"/>
+              </a:rPr>
+              <a:t>만 무력화해 </a:t>
+            </a:r>
+            <a:r>
+              <a:rPr lang="en-US" altLang="ko-KR" sz="1600" b="0" i="0" dirty="0">
+                <a:solidFill>
+                  <a:srgbClr val="565C66"/>
+                </a:solidFill>
+                <a:latin typeface="프리젠테이션 5 Medium" pitchFamily="2" charset="-127"/>
+                <a:ea typeface="프리젠테이션 5 Medium" pitchFamily="2" charset="-127"/>
+              </a:rPr>
+              <a:t>read </a:t>
+            </a:r>
+            <a:r>
+              <a:rPr lang="ko-KR" altLang="en-US" sz="1600" b="0" i="0" dirty="0">
+                <a:solidFill>
+                  <a:srgbClr val="565C66"/>
+                </a:solidFill>
+                <a:latin typeface="프리젠테이션 5 Medium" pitchFamily="2" charset="-127"/>
+                <a:ea typeface="프리젠테이션 5 Medium" pitchFamily="2" charset="-127"/>
+              </a:rPr>
+              <a:t>기능은 보존한 채 공격만 방어 가능</a:t>
+            </a:r>
+            <a:r>
+              <a:rPr lang="en-US" altLang="ko-KR" sz="1600" b="0" i="0" dirty="0">
+                <a:solidFill>
+                  <a:srgbClr val="565C66"/>
+                </a:solidFill>
+                <a:latin typeface="프리젠테이션 5 Medium" pitchFamily="2" charset="-127"/>
+                <a:ea typeface="프리젠테이션 5 Medium" pitchFamily="2" charset="-127"/>
+              </a:rPr>
+              <a:t> </a:t>
+            </a:r>
+          </a:p>
+          <a:p>
+            <a:pPr>
               <a:lnSpc>
-                <a:spcPct val="125000"/>
-              </a:lnSpc>
-              <a:spcBef>
-                <a:spcPts val="300"/>
-              </a:spcBef>
-            </a:pPr>
-            <a:r>
-              <a:rPr sz="1100" b="0">
-                <a:solidFill>
-                  <a:srgbClr val="565C66"/>
-                </a:solidFill>
-                <a:latin typeface="Malgun Gothic"/>
-                <a:ea typeface="Malgun Gothic"/>
-                <a:cs typeface="Malgun Gothic"/>
-              </a:rPr>
-              <a:t>탐색은 backward가 필요해 단일 턴이어야 하고, 평가는 반대로 실제 멀티턴이어야 의미가 있다 — 두 요구가 양립 불가.</a:t>
-            </a:r>
-          </a:p>
-        </p:txBody>
-      </p:sp>
-      <p:sp>
-        <p:nvSpPr>
-          <p:cNvPr id="9" name="Rounded Rectangle 8"/>
-          <p:cNvSpPr/>
-          <p:nvPr/>
-        </p:nvSpPr>
-        <p:spPr>
-          <a:xfrm>
-            <a:off x="640080" y="3566160"/>
-            <a:ext cx="6400800" cy="1417320"/>
-          </a:xfrm>
-          <a:prstGeom prst="roundRect">
-            <a:avLst>
-              <a:gd name="adj" fmla="val 9000"/>
-            </a:avLst>
-          </a:prstGeom>
-          <a:solidFill>
-            <a:srgbClr val="DBE9F8"/>
-          </a:solidFill>
-          <a:ln>
-            <a:noFill/>
-          </a:ln>
-          <a:effectLst/>
-        </p:spPr>
-        <p:style>
-          <a:lnRef idx="1">
-            <a:schemeClr val="accent1"/>
-          </a:lnRef>
-          <a:fillRef idx="3">
-            <a:schemeClr val="accent1"/>
-          </a:fillRef>
-          <a:effectRef idx="2">
-            <a:schemeClr val="accent1"/>
-          </a:effectRef>
-          <a:fontRef idx="minor">
-            <a:schemeClr val="lt1"/>
-          </a:fontRef>
-        </p:style>
-        <p:txBody>
-          <a:bodyPr rtlCol="0" anchor="ctr"/>
-          <a:lstStyle/>
-          <a:p>
-            <a:endParaRPr/>
-          </a:p>
-        </p:txBody>
-      </p:sp>
-      <p:sp>
-        <p:nvSpPr>
-          <p:cNvPr id="10" name="TextBox 9"/>
-          <p:cNvSpPr txBox="1"/>
-          <p:nvPr/>
-        </p:nvSpPr>
-        <p:spPr>
-          <a:xfrm>
-            <a:off x="877824" y="3749039"/>
-            <a:ext cx="5925312" cy="1097280"/>
-          </a:xfrm>
-          <a:prstGeom prst="rect">
-            <a:avLst/>
-          </a:prstGeom>
-          <a:noFill/>
-        </p:spPr>
-        <p:txBody>
-          <a:bodyPr wrap="square" lIns="0" tIns="0" rIns="0" bIns="0">
-            <a:spAutoFit/>
-          </a:bodyPr>
-          <a:lstStyle/>
-          <a:p>
-            <a:pPr algn="l">
-              <a:lnSpc>
-                <a:spcPct val="115000"/>
+                <a:spcPct val="135000"/>
               </a:lnSpc>
             </a:pPr>
             <a:r>
-              <a:rPr sz="1350" b="1">
-                <a:solidFill>
-                  <a:srgbClr val="2F6FCE"/>
-                </a:solidFill>
-                <a:latin typeface="Malgun Gothic"/>
-                <a:ea typeface="Malgun Gothic"/>
-                <a:cs typeface="Malgun Gothic"/>
-              </a:rPr>
-              <a:t>네이티브 채점이란</a:t>
-            </a:r>
-          </a:p>
-          <a:p>
-            <a:pPr algn="l">
-              <a:lnSpc>
-                <a:spcPct val="125000"/>
-              </a:lnSpc>
-              <a:spcBef>
-                <a:spcPts val="400"/>
-              </a:spcBef>
-            </a:pPr>
-            <a:r>
-              <a:rPr sz="1150" b="0">
+              <a:rPr lang="ko-KR" altLang="en-US" sz="1600" b="0" i="0" dirty="0">
                 <a:solidFill>
                   <a:srgbClr val="565C66"/>
                 </a:solidFill>
-                <a:latin typeface="Malgun Gothic"/>
-                <a:ea typeface="Malgun Gothic"/>
-                <a:cs typeface="Malgun Gothic"/>
-              </a:rPr>
-              <a:t>모델 출력 토큰 확률이 아니라, tool을 </a:t>
-            </a:r>
-            <a:r>
-              <a:rPr sz="1150" b="1">
+                <a:latin typeface="프리젠테이션 5 Medium" pitchFamily="2" charset="-127"/>
+                <a:ea typeface="프리젠테이션 5 Medium" pitchFamily="2" charset="-127"/>
+              </a:rPr>
+              <a:t>방법은 두 단계</a:t>
+            </a:r>
+            <a:r>
+              <a:rPr lang="en-US" altLang="ko-KR" sz="1600" b="0" i="0" dirty="0">
+                <a:solidFill>
+                  <a:srgbClr val="565C66"/>
+                </a:solidFill>
+                <a:latin typeface="프리젠테이션 5 Medium" pitchFamily="2" charset="-127"/>
+                <a:ea typeface="프리젠테이션 5 Medium" pitchFamily="2" charset="-127"/>
+              </a:rPr>
+              <a:t>: </a:t>
+            </a:r>
+            <a:r>
+              <a:rPr lang="ko-KR" altLang="en-US" sz="1600" b="1" i="0" dirty="0">
                 <a:solidFill>
                   <a:srgbClr val="16181D"/>
                 </a:solidFill>
-                <a:latin typeface="Malgun Gothic"/>
-                <a:ea typeface="Malgun Gothic"/>
-                <a:cs typeface="Malgun Gothic"/>
-              </a:rPr>
-              <a:t>실제로 실행한 뒤 환경 상태(계좌 잔액·전송된 메일)를 검사하는 결정론적 함수.</a:t>
-            </a:r>
-            <a:r>
-              <a:rPr sz="1150" b="0">
-                <a:solidFill>
-                  <a:srgbClr val="565C66"/>
-                </a:solidFill>
-                <a:latin typeface="Malgun Gothic"/>
-                <a:ea typeface="Malgun Gothic"/>
-                <a:cs typeface="Malgun Gothic"/>
-              </a:rPr>
-              <a:t> 교수님이 말씀하신 "제대로 된 성능 측정"에 대한 답.</a:t>
-            </a:r>
-          </a:p>
-        </p:txBody>
-      </p:sp>
-      <p:sp>
-        <p:nvSpPr>
-          <p:cNvPr id="11" name="TextBox 10"/>
-          <p:cNvSpPr txBox="1"/>
-          <p:nvPr/>
-        </p:nvSpPr>
-        <p:spPr>
-          <a:xfrm>
-            <a:off x="7360920" y="3566160"/>
-            <a:ext cx="4187952" cy="274320"/>
-          </a:xfrm>
-          <a:prstGeom prst="rect">
-            <a:avLst/>
-          </a:prstGeom>
-          <a:noFill/>
-        </p:spPr>
-        <p:txBody>
-          <a:bodyPr wrap="square" lIns="0" tIns="0" rIns="0" bIns="0">
-            <a:spAutoFit/>
-          </a:bodyPr>
-          <a:lstStyle/>
-          <a:p>
-            <a:pPr algn="l">
-              <a:lnSpc>
-                <a:spcPct val="125000"/>
-              </a:lnSpc>
-            </a:pPr>
-            <a:r>
-              <a:rPr sz="1200" b="1">
-                <a:solidFill>
-                  <a:srgbClr val="2F6FCE"/>
-                </a:solidFill>
-                <a:latin typeface="Malgun Gothic"/>
-                <a:ea typeface="Malgun Gothic"/>
-                <a:cs typeface="Malgun Gothic"/>
-              </a:rPr>
-              <a:t>Track A 어댑터에서 걸린 문제 3가지</a:t>
-            </a:r>
-          </a:p>
-        </p:txBody>
-      </p:sp>
-      <p:graphicFrame>
-        <p:nvGraphicFramePr>
-          <p:cNvPr id="12" name="Table 11"/>
-          <p:cNvGraphicFramePr>
-            <a:graphicFrameLocks noGrp="1"/>
-          </p:cNvGraphicFramePr>
-          <p:nvPr/>
-        </p:nvGraphicFramePr>
-        <p:xfrm>
-          <a:off x="7360920" y="3913632"/>
-          <a:ext cx="4187951" cy="1298448"/>
-        </p:xfrm>
-        <a:graphic>
-          <a:graphicData uri="http://schemas.openxmlformats.org/drawingml/2006/table">
-            <a:tbl>
-              <a:tblPr>
-                <a:tableStyleId>{5C22544A-7EE6-4342-B048-85BDC9FD1C3A}</a:tableStyleId>
-              </a:tblPr>
-              <a:tblGrid>
-                <a:gridCol w="1729806">
-                  <a:extLst>
-                    <a:ext uri="{9D8B030D-6E8A-4147-A177-3AD203B41FA5}">
-                      <a16:colId xmlns:a16="http://schemas.microsoft.com/office/drawing/2014/main" val="20000"/>
-                    </a:ext>
-                  </a:extLst>
-                </a:gridCol>
-                <a:gridCol w="2458145">
-                  <a:extLst>
-                    <a:ext uri="{9D8B030D-6E8A-4147-A177-3AD203B41FA5}">
-                      <a16:colId xmlns:a16="http://schemas.microsoft.com/office/drawing/2014/main" val="20001"/>
-                    </a:ext>
-                  </a:extLst>
-                </a:gridCol>
-              </a:tblGrid>
-              <a:tr h="310896">
-                <a:tc>
-                  <a:txBody>
-                    <a:bodyPr/>
-                    <a:lstStyle/>
-                    <a:p>
-                      <a:pPr algn="l">
-                        <a:lnSpc>
-                          <a:spcPct val="100000"/>
-                        </a:lnSpc>
-                      </a:pPr>
-                      <a:r>
-                        <a:rPr sz="1000" b="1">
-                          <a:solidFill>
-                            <a:srgbClr val="8B9099"/>
-                          </a:solidFill>
-                          <a:latin typeface="Malgun Gothic"/>
-                          <a:ea typeface="Malgun Gothic"/>
-                          <a:cs typeface="Malgun Gothic"/>
-                        </a:rPr>
-                        <a:t>문제</a:t>
-                      </a:r>
-                    </a:p>
-                  </a:txBody>
-                  <a:tcPr marL="82296" marR="82296" marT="41148" marB="41148" anchor="ctr">
-                    <a:solidFill>
-                      <a:srgbClr val="E9EAED"/>
-                    </a:solidFill>
-                  </a:tcPr>
-                </a:tc>
-                <a:tc>
-                  <a:txBody>
-                    <a:bodyPr/>
-                    <a:lstStyle/>
-                    <a:p>
-                      <a:pPr algn="l">
-                        <a:lnSpc>
-                          <a:spcPct val="100000"/>
-                        </a:lnSpc>
-                      </a:pPr>
-                      <a:r>
-                        <a:rPr sz="1000" b="1">
-                          <a:solidFill>
-                            <a:srgbClr val="8B9099"/>
-                          </a:solidFill>
-                          <a:latin typeface="Malgun Gothic"/>
-                          <a:ea typeface="Malgun Gothic"/>
-                          <a:cs typeface="Malgun Gothic"/>
-                        </a:rPr>
-                        <a:t>해결</a:t>
-                      </a:r>
-                    </a:p>
-                  </a:txBody>
-                  <a:tcPr marL="82296" marR="82296" marT="41148" marB="41148" anchor="ctr">
-                    <a:solidFill>
-                      <a:srgbClr val="E9EAED"/>
-                    </a:solidFill>
-                  </a:tcPr>
-                </a:tc>
-                <a:extLst>
-                  <a:ext uri="{0D108BD9-81ED-4DB2-BD59-A6C34878D82A}">
-                    <a16:rowId xmlns:a16="http://schemas.microsoft.com/office/drawing/2014/main" val="10000"/>
-                  </a:ext>
-                </a:extLst>
-              </a:tr>
-              <a:tr h="329184">
-                <a:tc>
-                  <a:txBody>
-                    <a:bodyPr/>
-                    <a:lstStyle/>
-                    <a:p>
-                      <a:pPr algn="l">
-                        <a:lnSpc>
-                          <a:spcPct val="115000"/>
-                        </a:lnSpc>
-                      </a:pPr>
-                      <a:r>
-                        <a:rPr sz="1000" b="0">
-                          <a:solidFill>
-                            <a:srgbClr val="565C66"/>
-                          </a:solidFill>
-                          <a:latin typeface="Malgun Gothic"/>
-                          <a:ea typeface="Malgun Gothic"/>
-                          <a:cs typeface="Malgun Gothic"/>
-                        </a:rPr>
-                        <a:t>YAML 개행 정규화</a:t>
-                      </a:r>
-                    </a:p>
-                  </a:txBody>
-                  <a:tcPr marL="82296" marR="82296" marT="41148" marB="41148" anchor="ctr">
-                    <a:solidFill>
-                      <a:srgbClr val="FFFFFF"/>
-                    </a:solidFill>
-                  </a:tcPr>
-                </a:tc>
-                <a:tc>
-                  <a:txBody>
-                    <a:bodyPr/>
-                    <a:lstStyle/>
-                    <a:p>
-                      <a:pPr algn="l">
-                        <a:lnSpc>
-                          <a:spcPct val="115000"/>
-                        </a:lnSpc>
-                      </a:pPr>
-                      <a:r>
-                        <a:rPr sz="1000" b="0">
-                          <a:solidFill>
-                            <a:srgbClr val="565C66"/>
-                          </a:solidFill>
-                          <a:latin typeface="Malgun Gothic"/>
-                          <a:ea typeface="Malgun Gothic"/>
-                          <a:cs typeface="Malgun Gothic"/>
-                        </a:rPr>
-                        <a:t>&lt;INFORMATION&gt; 태그를 앵커로</a:t>
-                      </a:r>
-                    </a:p>
-                  </a:txBody>
-                  <a:tcPr marL="82296" marR="82296" marT="41148" marB="41148" anchor="ctr">
-                    <a:solidFill>
-                      <a:srgbClr val="FFFFFF"/>
-                    </a:solidFill>
-                  </a:tcPr>
-                </a:tc>
-                <a:extLst>
-                  <a:ext uri="{0D108BD9-81ED-4DB2-BD59-A6C34878D82A}">
-                    <a16:rowId xmlns:a16="http://schemas.microsoft.com/office/drawing/2014/main" val="10001"/>
-                  </a:ext>
-                </a:extLst>
-              </a:tr>
-              <a:tr h="329184">
-                <a:tc>
-                  <a:txBody>
-                    <a:bodyPr/>
-                    <a:lstStyle/>
-                    <a:p>
-                      <a:pPr algn="l">
-                        <a:lnSpc>
-                          <a:spcPct val="115000"/>
-                        </a:lnSpc>
-                      </a:pPr>
-                      <a:r>
-                        <a:rPr sz="1000" b="0">
-                          <a:solidFill>
-                            <a:srgbClr val="565C66"/>
-                          </a:solidFill>
-                          <a:latin typeface="Malgun Gothic"/>
-                          <a:ea typeface="Malgun Gothic"/>
-                          <a:cs typeface="Malgun Gothic"/>
-                        </a:rPr>
-                        <a:t>인자 오염형 공격</a:t>
-                      </a:r>
-                    </a:p>
-                  </a:txBody>
-                  <a:tcPr marL="82296" marR="82296" marT="41148" marB="41148" anchor="ctr">
-                    <a:solidFill>
-                      <a:srgbClr val="F7F7F9"/>
-                    </a:solidFill>
-                  </a:tcPr>
-                </a:tc>
-                <a:tc>
-                  <a:txBody>
-                    <a:bodyPr/>
-                    <a:lstStyle/>
-                    <a:p>
-                      <a:pPr algn="l">
-                        <a:lnSpc>
-                          <a:spcPct val="115000"/>
-                        </a:lnSpc>
-                      </a:pPr>
-                      <a:r>
-                        <a:rPr sz="1000" b="0">
-                          <a:solidFill>
-                            <a:srgbClr val="565C66"/>
-                          </a:solidFill>
-                          <a:latin typeface="Malgun Gothic"/>
-                          <a:ea typeface="Malgun Gothic"/>
-                          <a:cs typeface="Malgun Gothic"/>
-                        </a:rPr>
-                        <a:t>해당 case 제외</a:t>
-                      </a:r>
-                    </a:p>
-                  </a:txBody>
-                  <a:tcPr marL="82296" marR="82296" marT="41148" marB="41148" anchor="ctr">
-                    <a:solidFill>
-                      <a:srgbClr val="F7F7F9"/>
-                    </a:solidFill>
-                  </a:tcPr>
-                </a:tc>
-                <a:extLst>
-                  <a:ext uri="{0D108BD9-81ED-4DB2-BD59-A6C34878D82A}">
-                    <a16:rowId xmlns:a16="http://schemas.microsoft.com/office/drawing/2014/main" val="10002"/>
-                  </a:ext>
-                </a:extLst>
-              </a:tr>
-              <a:tr h="329184">
-                <a:tc>
-                  <a:txBody>
-                    <a:bodyPr/>
-                    <a:lstStyle/>
-                    <a:p>
-                      <a:pPr algn="l">
-                        <a:lnSpc>
-                          <a:spcPct val="115000"/>
-                        </a:lnSpc>
-                      </a:pPr>
-                      <a:r>
-                        <a:rPr sz="1000" b="0">
-                          <a:solidFill>
-                            <a:srgbClr val="565C66"/>
-                          </a:solidFill>
-                          <a:latin typeface="Malgun Gothic"/>
-                          <a:ea typeface="Malgun Gothic"/>
-                          <a:cs typeface="Malgun Gothic"/>
-                        </a:rPr>
-                        <a:t>토큰 충돌</a:t>
-                      </a:r>
-                    </a:p>
-                  </a:txBody>
-                  <a:tcPr marL="82296" marR="82296" marT="41148" marB="41148" anchor="ctr">
-                    <a:solidFill>
-                      <a:srgbClr val="FFFFFF"/>
-                    </a:solidFill>
-                  </a:tcPr>
-                </a:tc>
-                <a:tc>
-                  <a:txBody>
-                    <a:bodyPr/>
-                    <a:lstStyle/>
-                    <a:p>
-                      <a:pPr algn="l">
-                        <a:lnSpc>
-                          <a:spcPct val="115000"/>
-                        </a:lnSpc>
-                      </a:pPr>
-                      <a:r>
-                        <a:rPr sz="1000" b="0">
-                          <a:solidFill>
-                            <a:srgbClr val="565C66"/>
-                          </a:solidFill>
-                          <a:latin typeface="Malgun Gothic"/>
-                          <a:ea typeface="Malgun Gothic"/>
-                          <a:cs typeface="Malgun Gothic"/>
-                        </a:rPr>
-                        <a:t>토큰 id 기준 재필터</a:t>
-                      </a:r>
-                    </a:p>
-                  </a:txBody>
-                  <a:tcPr marL="82296" marR="82296" marT="41148" marB="41148" anchor="ctr">
-                    <a:solidFill>
-                      <a:srgbClr val="FFFFFF"/>
-                    </a:solidFill>
-                  </a:tcPr>
-                </a:tc>
-                <a:extLst>
-                  <a:ext uri="{0D108BD9-81ED-4DB2-BD59-A6C34878D82A}">
-                    <a16:rowId xmlns:a16="http://schemas.microsoft.com/office/drawing/2014/main" val="10003"/>
-                  </a:ext>
-                </a:extLst>
-              </a:tr>
-            </a:tbl>
-          </a:graphicData>
-        </a:graphic>
-      </p:graphicFrame>
-      <p:sp>
-        <p:nvSpPr>
-          <p:cNvPr id="13" name="TextBox 12"/>
-          <p:cNvSpPr txBox="1"/>
-          <p:nvPr/>
-        </p:nvSpPr>
-        <p:spPr>
-          <a:xfrm>
-            <a:off x="640080" y="5760720"/>
-            <a:ext cx="10908792" cy="365760"/>
-          </a:xfrm>
-          <a:prstGeom prst="rect">
-            <a:avLst/>
-          </a:prstGeom>
-          <a:noFill/>
-        </p:spPr>
-        <p:txBody>
-          <a:bodyPr wrap="square" lIns="0" tIns="0" rIns="0" bIns="0">
-            <a:spAutoFit/>
-          </a:bodyPr>
-          <a:lstStyle/>
-          <a:p>
-            <a:pPr algn="l">
-              <a:lnSpc>
-                <a:spcPct val="120000"/>
-              </a:lnSpc>
-            </a:pPr>
-            <a:r>
-              <a:rPr sz="1050" b="0">
-                <a:solidFill>
-                  <a:srgbClr val="8B9099"/>
-                </a:solidFill>
-                <a:latin typeface="Malgun Gothic"/>
-                <a:ea typeface="Malgun Gothic"/>
-                <a:cs typeface="Malgun Gothic"/>
-              </a:rPr>
-              <a:t>Track A: 4개 suite 949조합 → 필터 통과 </a:t>
-            </a:r>
-            <a:r>
-              <a:rPr sz="1050" b="1">
+                <a:latin typeface="프리젠테이션 5 Medium" pitchFamily="2" charset="-127"/>
+                <a:ea typeface="프리젠테이션 5 Medium" pitchFamily="2" charset="-127"/>
+              </a:rPr>
+              <a:t>① </a:t>
+            </a:r>
+            <a:r>
+              <a:rPr lang="en-US" altLang="ko-KR" sz="1600" b="1" i="0" dirty="0">
                 <a:solidFill>
                   <a:srgbClr val="16181D"/>
                 </a:solidFill>
-                <a:latin typeface="Malgun Gothic"/>
-                <a:ea typeface="Malgun Gothic"/>
-                <a:cs typeface="Malgun Gothic"/>
-              </a:rPr>
-              <a:t>220쌍</a:t>
-            </a:r>
-            <a:r>
-              <a:rPr sz="1050" b="0">
-                <a:solidFill>
-                  <a:srgbClr val="8B9099"/>
-                </a:solidFill>
-                <a:latin typeface="Malgun Gothic"/>
-                <a:ea typeface="Malgun Gothic"/>
-                <a:cs typeface="Malgun Gothic"/>
-              </a:rPr>
-              <a:t>       Track B: KnockoutLocalLLM으로 우리 HF 모델을 agentdojo 파이프라인에 직접 끼워, 롤아웃 내내 D_inj edge를 차단</a:t>
+                <a:latin typeface="프리젠테이션 5 Medium" pitchFamily="2" charset="-127"/>
+                <a:ea typeface="프리젠테이션 5 Medium" pitchFamily="2" charset="-127"/>
+              </a:rPr>
+              <a:t>relevance</a:t>
+            </a:r>
+            <a:r>
+              <a:rPr lang="ko-KR" altLang="en-US" sz="1600" b="1" i="0" dirty="0">
+                <a:solidFill>
+                  <a:srgbClr val="16181D"/>
+                </a:solidFill>
+                <a:latin typeface="프리젠테이션 5 Medium" pitchFamily="2" charset="-127"/>
+                <a:ea typeface="프리젠테이션 5 Medium" pitchFamily="2" charset="-127"/>
+              </a:rPr>
+              <a:t>로 </a:t>
+            </a:r>
+            <a:r>
+              <a:rPr lang="en-US" altLang="ko-KR" sz="1600" b="1" i="0" dirty="0">
+                <a:solidFill>
+                  <a:srgbClr val="16181D"/>
+                </a:solidFill>
+                <a:latin typeface="프리젠테이션 5 Medium" pitchFamily="2" charset="-127"/>
+                <a:ea typeface="프리젠테이션 5 Medium" pitchFamily="2" charset="-127"/>
+              </a:rPr>
+              <a:t>head</a:t>
+            </a:r>
+            <a:r>
+              <a:rPr lang="ko-KR" altLang="en-US" sz="1600" b="1" i="0" dirty="0">
+                <a:solidFill>
+                  <a:srgbClr val="16181D"/>
+                </a:solidFill>
+                <a:latin typeface="프리젠테이션 5 Medium" pitchFamily="2" charset="-127"/>
+                <a:ea typeface="프리젠테이션 5 Medium" pitchFamily="2" charset="-127"/>
+              </a:rPr>
+              <a:t>를 찾고 </a:t>
+            </a:r>
+            <a:r>
+              <a:rPr lang="ko-KR" altLang="en-US" sz="1600" b="1" dirty="0">
+                <a:solidFill>
+                  <a:srgbClr val="16181D"/>
+                </a:solidFill>
+                <a:latin typeface="프리젠테이션 5 Medium" pitchFamily="2" charset="-127"/>
+                <a:ea typeface="프리젠테이션 5 Medium" pitchFamily="2" charset="-127"/>
+              </a:rPr>
+              <a:t> </a:t>
+            </a:r>
+            <a:r>
+              <a:rPr lang="ko-KR" altLang="en-US" sz="1600" b="1" i="0" dirty="0">
+                <a:solidFill>
+                  <a:srgbClr val="16181D"/>
+                </a:solidFill>
+                <a:latin typeface="프리젠테이션 5 Medium" pitchFamily="2" charset="-127"/>
+                <a:ea typeface="프리젠테이션 5 Medium" pitchFamily="2" charset="-127"/>
+              </a:rPr>
+              <a:t>② 그 </a:t>
+            </a:r>
+            <a:r>
+              <a:rPr lang="en-US" altLang="ko-KR" sz="1600" b="1" i="0" dirty="0">
+                <a:solidFill>
+                  <a:srgbClr val="16181D"/>
+                </a:solidFill>
+                <a:latin typeface="프리젠테이션 5 Medium" pitchFamily="2" charset="-127"/>
+                <a:ea typeface="프리젠테이션 5 Medium" pitchFamily="2" charset="-127"/>
+              </a:rPr>
+              <a:t>head</a:t>
+            </a:r>
+            <a:r>
+              <a:rPr lang="ko-KR" altLang="en-US" sz="1600" b="1" i="0" dirty="0">
+                <a:solidFill>
+                  <a:srgbClr val="16181D"/>
+                </a:solidFill>
+                <a:latin typeface="프리젠테이션 5 Medium" pitchFamily="2" charset="-127"/>
+                <a:ea typeface="프리젠테이션 5 Medium" pitchFamily="2" charset="-127"/>
+              </a:rPr>
+              <a:t>의 </a:t>
+            </a:r>
+            <a:r>
+              <a:rPr lang="en-US" altLang="ko-KR" sz="1600" b="1" i="0" dirty="0" err="1">
+                <a:solidFill>
+                  <a:srgbClr val="16181D"/>
+                </a:solidFill>
+                <a:latin typeface="프리젠테이션 5 Medium" pitchFamily="2" charset="-127"/>
+                <a:ea typeface="프리젠테이션 5 Medium" pitchFamily="2" charset="-127"/>
+              </a:rPr>
+              <a:t>D_inj</a:t>
+            </a:r>
+            <a:r>
+              <a:rPr lang="ko-KR" altLang="en-US" sz="1600" b="1" i="0" dirty="0">
+                <a:solidFill>
+                  <a:srgbClr val="16181D"/>
+                </a:solidFill>
+                <a:latin typeface="프리젠테이션 5 Medium" pitchFamily="2" charset="-127"/>
+                <a:ea typeface="프리젠테이션 5 Medium" pitchFamily="2" charset="-127"/>
+              </a:rPr>
+              <a:t> 방향 </a:t>
+            </a:r>
+            <a:r>
+              <a:rPr lang="en-US" altLang="ko-KR" sz="1600" b="1" i="0" dirty="0">
+                <a:solidFill>
+                  <a:srgbClr val="16181D"/>
+                </a:solidFill>
+                <a:latin typeface="프리젠테이션 5 Medium" pitchFamily="2" charset="-127"/>
+                <a:ea typeface="프리젠테이션 5 Medium" pitchFamily="2" charset="-127"/>
+              </a:rPr>
+              <a:t>attention edge</a:t>
+            </a:r>
+            <a:r>
+              <a:rPr lang="ko-KR" altLang="en-US" sz="1600" b="1" i="0" dirty="0">
+                <a:solidFill>
+                  <a:srgbClr val="16181D"/>
+                </a:solidFill>
+                <a:latin typeface="프리젠테이션 5 Medium" pitchFamily="2" charset="-127"/>
+                <a:ea typeface="프리젠테이션 5 Medium" pitchFamily="2" charset="-127"/>
+              </a:rPr>
+              <a:t>만 끊는다</a:t>
+            </a:r>
+            <a:r>
+              <a:rPr lang="en-US" altLang="ko-KR" sz="1600" b="1" i="0" dirty="0">
+                <a:solidFill>
+                  <a:srgbClr val="16181D"/>
+                </a:solidFill>
+                <a:latin typeface="프리젠테이션 5 Medium" pitchFamily="2" charset="-127"/>
+                <a:ea typeface="프리젠테이션 5 Medium" pitchFamily="2" charset="-127"/>
+              </a:rPr>
+              <a:t>.</a:t>
             </a:r>
           </a:p>
         </p:txBody>
       </p:sp>
     </p:spTree>
+    <p:extLst>
+      <p:ext uri="{BB962C8B-B14F-4D97-AF65-F5344CB8AC3E}">
+        <p14:creationId xmlns:p14="http://schemas.microsoft.com/office/powerpoint/2010/main" val="968100418"/>
+      </p:ext>
+    </p:extLst>
   </p:cSld>
   <p:clrMapOvr>
     <a:masterClrMapping/>
@@ -9485,7 +10422,7 @@
 </p:sld>
 </file>
 
-<file path=ppt/slides/slide11.xml><?xml version="1.0" encoding="utf-8"?>
+<file path=ppt/slides/slide10.xml><?xml version="1.0" encoding="utf-8"?>
 <p:sld xmlns:a="http://schemas.openxmlformats.org/drawingml/2006/main" xmlns:r="http://schemas.openxmlformats.org/officeDocument/2006/relationships" xmlns:p="http://schemas.openxmlformats.org/presentationml/2006/main">
   <p:cSld>
     <p:spTree>
@@ -10702,7 +11639,7 @@
 </p:sld>
 </file>
 
-<file path=ppt/slides/slide12.xml><?xml version="1.0" encoding="utf-8"?>
+<file path=ppt/slides/slide11.xml><?xml version="1.0" encoding="utf-8"?>
 <p:sld xmlns:a="http://schemas.openxmlformats.org/drawingml/2006/main" xmlns:r="http://schemas.openxmlformats.org/officeDocument/2006/relationships" xmlns:p="http://schemas.openxmlformats.org/presentationml/2006/main">
   <p:cSld>
     <p:spTree>
@@ -12193,7 +13130,7 @@
 </p:sld>
 </file>
 
-<file path=ppt/slides/slide13.xml><?xml version="1.0" encoding="utf-8"?>
+<file path=ppt/slides/slide12.xml><?xml version="1.0" encoding="utf-8"?>
 <p:sld xmlns:a="http://schemas.openxmlformats.org/drawingml/2006/main" xmlns:r="http://schemas.openxmlformats.org/officeDocument/2006/relationships" xmlns:p="http://schemas.openxmlformats.org/presentationml/2006/main">
   <p:cSld>
     <p:spTree>
@@ -13607,7 +14544,7 @@
 </p:sld>
 </file>
 
-<file path=ppt/slides/slide14.xml><?xml version="1.0" encoding="utf-8"?>
+<file path=ppt/slides/slide13.xml><?xml version="1.0" encoding="utf-8"?>
 <p:sld xmlns:a="http://schemas.openxmlformats.org/drawingml/2006/main" xmlns:r="http://schemas.openxmlformats.org/officeDocument/2006/relationships" xmlns:p="http://schemas.openxmlformats.org/presentationml/2006/main">
   <p:cSld>
     <p:spTree>
@@ -14709,7 +15646,7 @@
 </p:sld>
 </file>
 
-<file path=ppt/slides/slide15.xml><?xml version="1.0" encoding="utf-8"?>
+<file path=ppt/slides/slide14.xml><?xml version="1.0" encoding="utf-8"?>
 <p:sld xmlns:a="http://schemas.openxmlformats.org/drawingml/2006/main" xmlns:r="http://schemas.openxmlformats.org/officeDocument/2006/relationships" xmlns:p="http://schemas.openxmlformats.org/presentationml/2006/main">
   <p:cSld>
     <p:spTree>
@@ -15732,7 +16669,7 @@
 </p:sld>
 </file>
 
-<file path=ppt/slides/slide16.xml><?xml version="1.0" encoding="utf-8"?>
+<file path=ppt/slides/slide15.xml><?xml version="1.0" encoding="utf-8"?>
 <p:sld xmlns:a="http://schemas.openxmlformats.org/drawingml/2006/main" xmlns:r="http://schemas.openxmlformats.org/officeDocument/2006/relationships" xmlns:p="http://schemas.openxmlformats.org/presentationml/2006/main">
   <p:cSld>
     <p:spTree>
@@ -16691,1219 +17628,6 @@
 </file>
 
 <file path=ppt/slides/slide2.xml><?xml version="1.0" encoding="utf-8"?>
-<p:sld xmlns:a="http://schemas.openxmlformats.org/drawingml/2006/main" xmlns:r="http://schemas.openxmlformats.org/officeDocument/2006/relationships" xmlns:p="http://schemas.openxmlformats.org/presentationml/2006/main">
-  <p:cSld>
-    <p:spTree>
-      <p:nvGrpSpPr>
-        <p:cNvPr id="1" name="">
-          <a:extLst>
-            <a:ext uri="{FF2B5EF4-FFF2-40B4-BE49-F238E27FC236}">
-              <a16:creationId xmlns:a16="http://schemas.microsoft.com/office/drawing/2014/main" id="{06F24B3A-C572-38DA-98A6-40F6E2F0369B}"/>
-            </a:ext>
-          </a:extLst>
-        </p:cNvPr>
-        <p:cNvGrpSpPr/>
-        <p:nvPr/>
-      </p:nvGrpSpPr>
-      <p:grpSpPr>
-        <a:xfrm>
-          <a:off x="0" y="0"/>
-          <a:ext cx="0" cy="0"/>
-          <a:chOff x="0" y="0"/>
-          <a:chExt cx="0" cy="0"/>
-        </a:xfrm>
-      </p:grpSpPr>
-      <p:sp>
-        <p:nvSpPr>
-          <p:cNvPr id="31" name="Rounded Rectangle 8">
-            <a:extLst>
-              <a:ext uri="{FF2B5EF4-FFF2-40B4-BE49-F238E27FC236}">
-                <a16:creationId xmlns:a16="http://schemas.microsoft.com/office/drawing/2014/main" id="{AD632057-1FB1-4A4F-5D50-30ECB860843D}"/>
-              </a:ext>
-            </a:extLst>
-          </p:cNvPr>
-          <p:cNvSpPr/>
-          <p:nvPr/>
-        </p:nvSpPr>
-        <p:spPr>
-          <a:xfrm>
-            <a:off x="1257531" y="4451927"/>
-            <a:ext cx="9676940" cy="1308793"/>
-          </a:xfrm>
-          <a:prstGeom prst="roundRect">
-            <a:avLst>
-              <a:gd name="adj" fmla="val 10000"/>
-            </a:avLst>
-          </a:prstGeom>
-          <a:solidFill>
-            <a:srgbClr val="FBE0C4"/>
-          </a:solidFill>
-          <a:ln>
-            <a:noFill/>
-          </a:ln>
-          <a:effectLst/>
-        </p:spPr>
-        <p:style>
-          <a:lnRef idx="1">
-            <a:schemeClr val="accent1"/>
-          </a:lnRef>
-          <a:fillRef idx="3">
-            <a:schemeClr val="accent1"/>
-          </a:fillRef>
-          <a:effectRef idx="2">
-            <a:schemeClr val="accent1"/>
-          </a:effectRef>
-          <a:fontRef idx="minor">
-            <a:schemeClr val="lt1"/>
-          </a:fontRef>
-        </p:style>
-        <p:txBody>
-          <a:bodyPr rtlCol="0" anchor="ctr"/>
-          <a:lstStyle/>
-          <a:p>
-            <a:pPr algn="ctr"/>
-            <a:endParaRPr/>
-          </a:p>
-        </p:txBody>
-      </p:sp>
-      <p:sp>
-        <p:nvSpPr>
-          <p:cNvPr id="25" name="Shape 3">
-            <a:extLst>
-              <a:ext uri="{FF2B5EF4-FFF2-40B4-BE49-F238E27FC236}">
-                <a16:creationId xmlns:a16="http://schemas.microsoft.com/office/drawing/2014/main" id="{55C4EC47-E0E7-319D-53CD-900509DA6C2D}"/>
-              </a:ext>
-            </a:extLst>
-          </p:cNvPr>
-          <p:cNvSpPr/>
-          <p:nvPr/>
-        </p:nvSpPr>
-        <p:spPr>
-          <a:xfrm>
-            <a:off x="6232084" y="2853053"/>
-            <a:ext cx="4702386" cy="1151894"/>
-          </a:xfrm>
-          <a:prstGeom prst="roundRect">
-            <a:avLst>
-              <a:gd name="adj" fmla="val 4587"/>
-            </a:avLst>
-          </a:prstGeom>
-          <a:solidFill>
-            <a:srgbClr val="FFFFFF"/>
-          </a:solidFill>
-          <a:ln w="15240">
-            <a:solidFill>
-              <a:srgbClr val="DEDFE8"/>
-            </a:solidFill>
-            <a:prstDash val="solid"/>
-          </a:ln>
-          <a:effectLst>
-            <a:outerShdw blurRad="76200" dist="25400" dir="5400000" algn="bl" rotWithShape="0">
-              <a:srgbClr val="000000">
-                <a:alpha val="12000"/>
-              </a:srgbClr>
-            </a:outerShdw>
-          </a:effectLst>
-        </p:spPr>
-        <p:txBody>
-          <a:bodyPr/>
-          <a:lstStyle/>
-          <a:p>
-            <a:endParaRPr lang="ko-KR" altLang="en-US" sz="2000" dirty="0">
-              <a:latin typeface="프리젠테이션 5 Medium" pitchFamily="2" charset="-127"/>
-              <a:ea typeface="프리젠테이션 5 Medium" pitchFamily="2" charset="-127"/>
-            </a:endParaRPr>
-          </a:p>
-        </p:txBody>
-      </p:sp>
-      <p:sp>
-        <p:nvSpPr>
-          <p:cNvPr id="24" name="Shape 3">
-            <a:extLst>
-              <a:ext uri="{FF2B5EF4-FFF2-40B4-BE49-F238E27FC236}">
-                <a16:creationId xmlns:a16="http://schemas.microsoft.com/office/drawing/2014/main" id="{428D085C-30EC-A05C-91DF-4F179D815D53}"/>
-              </a:ext>
-            </a:extLst>
-          </p:cNvPr>
-          <p:cNvSpPr/>
-          <p:nvPr/>
-        </p:nvSpPr>
-        <p:spPr>
-          <a:xfrm>
-            <a:off x="1257530" y="2853053"/>
-            <a:ext cx="4702386" cy="1151894"/>
-          </a:xfrm>
-          <a:prstGeom prst="roundRect">
-            <a:avLst>
-              <a:gd name="adj" fmla="val 4587"/>
-            </a:avLst>
-          </a:prstGeom>
-          <a:solidFill>
-            <a:srgbClr val="FFFFFF"/>
-          </a:solidFill>
-          <a:ln w="15240">
-            <a:solidFill>
-              <a:srgbClr val="DEDFE8"/>
-            </a:solidFill>
-            <a:prstDash val="solid"/>
-          </a:ln>
-          <a:effectLst>
-            <a:outerShdw blurRad="76200" dist="25400" dir="5400000" algn="bl" rotWithShape="0">
-              <a:srgbClr val="000000">
-                <a:alpha val="12000"/>
-              </a:srgbClr>
-            </a:outerShdw>
-          </a:effectLst>
-        </p:spPr>
-        <p:txBody>
-          <a:bodyPr/>
-          <a:lstStyle/>
-          <a:p>
-            <a:endParaRPr lang="ko-KR" altLang="en-US" sz="2000">
-              <a:latin typeface="프리젠테이션 5 Medium" pitchFamily="2" charset="-127"/>
-              <a:ea typeface="프리젠테이션 5 Medium" pitchFamily="2" charset="-127"/>
-            </a:endParaRPr>
-          </a:p>
-        </p:txBody>
-      </p:sp>
-      <p:sp>
-        <p:nvSpPr>
-          <p:cNvPr id="2" name="제목 1">
-            <a:extLst>
-              <a:ext uri="{FF2B5EF4-FFF2-40B4-BE49-F238E27FC236}">
-                <a16:creationId xmlns:a16="http://schemas.microsoft.com/office/drawing/2014/main" id="{B17F4F86-F63A-3D8B-C213-E5FB941C2799}"/>
-              </a:ext>
-            </a:extLst>
-          </p:cNvPr>
-          <p:cNvSpPr>
-            <a:spLocks noGrp="1"/>
-          </p:cNvSpPr>
-          <p:nvPr>
-            <p:ph type="title" idx="100"/>
-          </p:nvPr>
-        </p:nvSpPr>
-        <p:spPr/>
-        <p:txBody>
-          <a:bodyPr>
-            <a:normAutofit fontScale="90000"/>
-          </a:bodyPr>
-          <a:lstStyle/>
-          <a:p>
-            <a:r>
-              <a:rPr lang="ko-KR" altLang="en-US" sz="3600" dirty="0">
-                <a:latin typeface="프리젠테이션 5 Medium" pitchFamily="2" charset="-127"/>
-                <a:ea typeface="프리젠테이션 5 Medium" pitchFamily="2" charset="-127"/>
-              </a:rPr>
-              <a:t>개요</a:t>
-            </a:r>
-          </a:p>
-        </p:txBody>
-      </p:sp>
-      <p:sp>
-        <p:nvSpPr>
-          <p:cNvPr id="3" name="텍스트 개체 틀 2">
-            <a:extLst>
-              <a:ext uri="{FF2B5EF4-FFF2-40B4-BE49-F238E27FC236}">
-                <a16:creationId xmlns:a16="http://schemas.microsoft.com/office/drawing/2014/main" id="{C4E59EF0-0E8E-03E9-405C-D4D851555780}"/>
-              </a:ext>
-            </a:extLst>
-          </p:cNvPr>
-          <p:cNvSpPr>
-            <a:spLocks noGrp="1"/>
-          </p:cNvSpPr>
-          <p:nvPr>
-            <p:ph type="body" idx="101"/>
-          </p:nvPr>
-        </p:nvSpPr>
-        <p:spPr/>
-        <p:txBody>
-          <a:bodyPr/>
-          <a:lstStyle/>
-          <a:p>
-            <a:r>
-              <a:rPr lang="ko-KR" altLang="en-US" dirty="0">
-                <a:latin typeface="프리젠테이션 5 Medium" pitchFamily="2" charset="-127"/>
-                <a:ea typeface="프리젠테이션 5 Medium" pitchFamily="2" charset="-127"/>
-              </a:rPr>
-              <a:t>가설 </a:t>
-            </a:r>
-            <a:r>
-              <a:rPr lang="en-US" altLang="ko-KR" dirty="0">
-                <a:latin typeface="프리젠테이션 5 Medium" pitchFamily="2" charset="-127"/>
-                <a:ea typeface="프리젠테이션 5 Medium" pitchFamily="2" charset="-127"/>
-              </a:rPr>
-              <a:t>- Read Head</a:t>
-            </a:r>
-            <a:r>
-              <a:rPr lang="ko-KR" altLang="en-US" dirty="0">
-                <a:latin typeface="프리젠테이션 5 Medium" pitchFamily="2" charset="-127"/>
-                <a:ea typeface="프리젠테이션 5 Medium" pitchFamily="2" charset="-127"/>
-              </a:rPr>
-              <a:t>와 </a:t>
-            </a:r>
-            <a:r>
-              <a:rPr lang="en-US" altLang="ko-KR" dirty="0">
-                <a:latin typeface="프리젠테이션 5 Medium" pitchFamily="2" charset="-127"/>
-                <a:ea typeface="프리젠테이션 5 Medium" pitchFamily="2" charset="-127"/>
-              </a:rPr>
-              <a:t>Control Head</a:t>
-            </a:r>
-            <a:r>
-              <a:rPr lang="ko-KR" altLang="en-US" dirty="0">
-                <a:latin typeface="프리젠테이션 5 Medium" pitchFamily="2" charset="-127"/>
-                <a:ea typeface="프리젠테이션 5 Medium" pitchFamily="2" charset="-127"/>
-              </a:rPr>
-              <a:t>는 분리되어 있다</a:t>
-            </a:r>
-          </a:p>
-        </p:txBody>
-      </p:sp>
-      <p:sp>
-        <p:nvSpPr>
-          <p:cNvPr id="9" name="TextBox 8">
-            <a:extLst>
-              <a:ext uri="{FF2B5EF4-FFF2-40B4-BE49-F238E27FC236}">
-                <a16:creationId xmlns:a16="http://schemas.microsoft.com/office/drawing/2014/main" id="{C3A7E16B-BE12-84F5-0D21-35BF5A10661D}"/>
-              </a:ext>
-            </a:extLst>
-          </p:cNvPr>
-          <p:cNvSpPr txBox="1"/>
-          <p:nvPr/>
-        </p:nvSpPr>
-        <p:spPr>
-          <a:xfrm>
-            <a:off x="3796146" y="1949678"/>
-            <a:ext cx="4599404" cy="215444"/>
-          </a:xfrm>
-          <a:prstGeom prst="rect">
-            <a:avLst/>
-          </a:prstGeom>
-          <a:noFill/>
-        </p:spPr>
-        <p:txBody>
-          <a:bodyPr wrap="square" lIns="0" tIns="0" rIns="0" bIns="0" anchor="ctr">
-            <a:spAutoFit/>
-          </a:bodyPr>
-          <a:lstStyle/>
-          <a:p>
-            <a:pPr algn="ctr"/>
-            <a:r>
-              <a:rPr sz="1400" b="0" i="0" dirty="0">
-                <a:solidFill>
-                  <a:srgbClr val="565C66"/>
-                </a:solidFill>
-                <a:latin typeface="프리젠테이션 5 Medium" pitchFamily="2" charset="-127"/>
-                <a:ea typeface="프리젠테이션 5 Medium" pitchFamily="2" charset="-127"/>
-              </a:rPr>
-              <a:t>[</a:t>
-            </a:r>
-            <a:r>
-              <a:rPr sz="1400" b="0" i="0" dirty="0" err="1">
-                <a:solidFill>
-                  <a:srgbClr val="565C66"/>
-                </a:solidFill>
-                <a:latin typeface="프리젠테이션 5 Medium" pitchFamily="2" charset="-127"/>
-                <a:ea typeface="프리젠테이션 5 Medium" pitchFamily="2" charset="-127"/>
-              </a:rPr>
-              <a:t>정상</a:t>
-            </a:r>
-            <a:r>
-              <a:rPr sz="1400" b="0" i="0" dirty="0">
-                <a:solidFill>
-                  <a:srgbClr val="565C66"/>
-                </a:solidFill>
-                <a:latin typeface="프리젠테이션 5 Medium" pitchFamily="2" charset="-127"/>
-                <a:ea typeface="프리젠테이션 5 Medium" pitchFamily="2" charset="-127"/>
-              </a:rPr>
-              <a:t> </a:t>
-            </a:r>
-            <a:r>
-              <a:rPr sz="1400" b="0" i="0" dirty="0" err="1">
-                <a:solidFill>
-                  <a:srgbClr val="565C66"/>
-                </a:solidFill>
-                <a:latin typeface="프리젠테이션 5 Medium" pitchFamily="2" charset="-127"/>
-                <a:ea typeface="프리젠테이션 5 Medium" pitchFamily="2" charset="-127"/>
-              </a:rPr>
-              <a:t>지시</a:t>
-            </a:r>
-            <a:r>
-              <a:rPr sz="1400" b="0" i="0" dirty="0">
-                <a:solidFill>
-                  <a:srgbClr val="565C66"/>
-                </a:solidFill>
-                <a:latin typeface="프리젠테이션 5 Medium" pitchFamily="2" charset="-127"/>
-                <a:ea typeface="프리젠테이션 5 Medium" pitchFamily="2" charset="-127"/>
-              </a:rPr>
-              <a:t>] + [</a:t>
-            </a:r>
-            <a:r>
-              <a:rPr sz="1400" b="0" i="0" dirty="0" err="1">
-                <a:solidFill>
-                  <a:srgbClr val="565C66"/>
-                </a:solidFill>
-                <a:latin typeface="프리젠테이션 5 Medium" pitchFamily="2" charset="-127"/>
-                <a:ea typeface="프리젠테이션 5 Medium" pitchFamily="2" charset="-127"/>
-              </a:rPr>
-              <a:t>외부</a:t>
-            </a:r>
-            <a:r>
-              <a:rPr sz="1400" b="0" i="0" dirty="0">
-                <a:solidFill>
-                  <a:srgbClr val="565C66"/>
-                </a:solidFill>
-                <a:latin typeface="프리젠테이션 5 Medium" pitchFamily="2" charset="-127"/>
-                <a:ea typeface="프리젠테이션 5 Medium" pitchFamily="2" charset="-127"/>
-              </a:rPr>
-              <a:t> </a:t>
-            </a:r>
-            <a:r>
-              <a:rPr sz="1400" b="0" i="0" dirty="0" err="1">
-                <a:solidFill>
-                  <a:srgbClr val="565C66"/>
-                </a:solidFill>
-                <a:latin typeface="프리젠테이션 5 Medium" pitchFamily="2" charset="-127"/>
-                <a:ea typeface="프리젠테이션 5 Medium" pitchFamily="2" charset="-127"/>
-              </a:rPr>
-              <a:t>데이터</a:t>
-            </a:r>
-            <a:r>
-              <a:rPr sz="1400" b="0" i="0" dirty="0">
-                <a:solidFill>
-                  <a:srgbClr val="565C66"/>
-                </a:solidFill>
-                <a:latin typeface="프리젠테이션 5 Medium" pitchFamily="2" charset="-127"/>
-                <a:ea typeface="프리젠테이션 5 Medium" pitchFamily="2" charset="-127"/>
-              </a:rPr>
-              <a:t> </a:t>
-            </a:r>
-            <a:r>
-              <a:rPr sz="1400" b="0" i="0" dirty="0">
-                <a:solidFill>
-                  <a:srgbClr val="C06A1F"/>
-                </a:solidFill>
-                <a:latin typeface="프리젠테이션 5 Medium" pitchFamily="2" charset="-127"/>
-                <a:ea typeface="프리젠테이션 5 Medium" pitchFamily="2" charset="-127"/>
-              </a:rPr>
-              <a:t>(</a:t>
-            </a:r>
-            <a:r>
-              <a:rPr sz="1400" b="0" i="0" dirty="0" err="1">
-                <a:solidFill>
-                  <a:srgbClr val="C06A1F"/>
-                </a:solidFill>
-                <a:latin typeface="프리젠테이션 5 Medium" pitchFamily="2" charset="-127"/>
-                <a:ea typeface="프리젠테이션 5 Medium" pitchFamily="2" charset="-127"/>
-              </a:rPr>
-              <a:t>공격자</a:t>
-            </a:r>
-            <a:r>
-              <a:rPr sz="1400" b="0" i="0" dirty="0">
-                <a:solidFill>
-                  <a:srgbClr val="C06A1F"/>
-                </a:solidFill>
-                <a:latin typeface="프리젠테이션 5 Medium" pitchFamily="2" charset="-127"/>
-                <a:ea typeface="프리젠테이션 5 Medium" pitchFamily="2" charset="-127"/>
-              </a:rPr>
-              <a:t> </a:t>
-            </a:r>
-            <a:r>
-              <a:rPr sz="1400" b="0" i="0" dirty="0" err="1">
-                <a:solidFill>
-                  <a:srgbClr val="C06A1F"/>
-                </a:solidFill>
-                <a:latin typeface="프리젠테이션 5 Medium" pitchFamily="2" charset="-127"/>
-                <a:ea typeface="프리젠테이션 5 Medium" pitchFamily="2" charset="-127"/>
-              </a:rPr>
-              <a:t>명령</a:t>
-            </a:r>
-            <a:r>
-              <a:rPr sz="1400" b="0" i="0" dirty="0">
-                <a:solidFill>
-                  <a:srgbClr val="C06A1F"/>
-                </a:solidFill>
-                <a:latin typeface="프리젠테이션 5 Medium" pitchFamily="2" charset="-127"/>
-                <a:ea typeface="프리젠테이션 5 Medium" pitchFamily="2" charset="-127"/>
-              </a:rPr>
-              <a:t> </a:t>
-            </a:r>
-            <a:r>
-              <a:rPr sz="1400" b="0" i="0" dirty="0" err="1">
-                <a:solidFill>
-                  <a:srgbClr val="C06A1F"/>
-                </a:solidFill>
-                <a:latin typeface="프리젠테이션 5 Medium" pitchFamily="2" charset="-127"/>
-                <a:ea typeface="프리젠테이션 5 Medium" pitchFamily="2" charset="-127"/>
-              </a:rPr>
-              <a:t>삽입</a:t>
-            </a:r>
-            <a:r>
-              <a:rPr sz="1400" b="0" i="0" dirty="0">
-                <a:solidFill>
-                  <a:srgbClr val="C06A1F"/>
-                </a:solidFill>
-                <a:latin typeface="프리젠테이션 5 Medium" pitchFamily="2" charset="-127"/>
-                <a:ea typeface="프리젠테이션 5 Medium" pitchFamily="2" charset="-127"/>
-              </a:rPr>
-              <a:t>)</a:t>
-            </a:r>
-            <a:r>
-              <a:rPr sz="1400" b="0" i="0" dirty="0">
-                <a:solidFill>
-                  <a:srgbClr val="565C66"/>
-                </a:solidFill>
-                <a:latin typeface="프리젠테이션 5 Medium" pitchFamily="2" charset="-127"/>
-                <a:ea typeface="프리젠테이션 5 Medium" pitchFamily="2" charset="-127"/>
-              </a:rPr>
-              <a:t>] → </a:t>
-            </a:r>
-            <a:r>
-              <a:rPr sz="1400" b="1" i="0" dirty="0">
-                <a:solidFill>
-                  <a:srgbClr val="16181D"/>
-                </a:solidFill>
-                <a:latin typeface="프리젠테이션 5 Medium" pitchFamily="2" charset="-127"/>
-                <a:ea typeface="프리젠테이션 5 Medium" pitchFamily="2" charset="-127"/>
-              </a:rPr>
-              <a:t>LLM</a:t>
-            </a:r>
-            <a:r>
-              <a:rPr sz="1400" b="0" i="0" dirty="0">
-                <a:solidFill>
-                  <a:srgbClr val="565C66"/>
-                </a:solidFill>
-                <a:latin typeface="프리젠테이션 5 Medium" pitchFamily="2" charset="-127"/>
-                <a:ea typeface="프리젠테이션 5 Medium" pitchFamily="2" charset="-127"/>
-              </a:rPr>
-              <a:t> → </a:t>
-            </a:r>
-            <a:r>
-              <a:rPr sz="1400" b="0" i="0" dirty="0" err="1">
-                <a:solidFill>
-                  <a:srgbClr val="C1442A"/>
-                </a:solidFill>
-                <a:latin typeface="프리젠테이션 5 Medium" pitchFamily="2" charset="-127"/>
-                <a:ea typeface="프리젠테이션 5 Medium" pitchFamily="2" charset="-127"/>
-              </a:rPr>
-              <a:t>공격</a:t>
-            </a:r>
-            <a:r>
-              <a:rPr sz="1400" b="0" i="0" dirty="0">
-                <a:solidFill>
-                  <a:srgbClr val="C1442A"/>
-                </a:solidFill>
-                <a:latin typeface="프리젠테이션 5 Medium" pitchFamily="2" charset="-127"/>
-                <a:ea typeface="프리젠테이션 5 Medium" pitchFamily="2" charset="-127"/>
-              </a:rPr>
-              <a:t> </a:t>
-            </a:r>
-            <a:r>
-              <a:rPr sz="1400" b="0" i="0" dirty="0" err="1">
-                <a:solidFill>
-                  <a:srgbClr val="C1442A"/>
-                </a:solidFill>
-                <a:latin typeface="프리젠테이션 5 Medium" pitchFamily="2" charset="-127"/>
-                <a:ea typeface="프리젠테이션 5 Medium" pitchFamily="2" charset="-127"/>
-              </a:rPr>
-              <a:t>실행</a:t>
-            </a:r>
-            <a:endParaRPr sz="1400" b="0" i="0" dirty="0">
-              <a:solidFill>
-                <a:srgbClr val="C1442A"/>
-              </a:solidFill>
-              <a:latin typeface="프리젠테이션 5 Medium" pitchFamily="2" charset="-127"/>
-              <a:ea typeface="프리젠테이션 5 Medium" pitchFamily="2" charset="-127"/>
-            </a:endParaRPr>
-          </a:p>
-        </p:txBody>
-      </p:sp>
-      <p:sp>
-        <p:nvSpPr>
-          <p:cNvPr id="15" name="TextBox 14">
-            <a:extLst>
-              <a:ext uri="{FF2B5EF4-FFF2-40B4-BE49-F238E27FC236}">
-                <a16:creationId xmlns:a16="http://schemas.microsoft.com/office/drawing/2014/main" id="{E667CEED-1777-349D-C36E-C4501904379E}"/>
-              </a:ext>
-            </a:extLst>
-          </p:cNvPr>
-          <p:cNvSpPr txBox="1"/>
-          <p:nvPr/>
-        </p:nvSpPr>
-        <p:spPr>
-          <a:xfrm>
-            <a:off x="1538162" y="3134882"/>
-            <a:ext cx="4174375" cy="482183"/>
-          </a:xfrm>
-          <a:prstGeom prst="rect">
-            <a:avLst/>
-          </a:prstGeom>
-          <a:noFill/>
-        </p:spPr>
-        <p:txBody>
-          <a:bodyPr wrap="square" lIns="0" tIns="0" rIns="0" bIns="0" anchor="t">
-            <a:spAutoFit/>
-          </a:bodyPr>
-          <a:lstStyle/>
-          <a:p>
-            <a:r>
-              <a:rPr sz="1400" b="1" i="0" dirty="0">
-                <a:solidFill>
-                  <a:srgbClr val="2F6FCE"/>
-                </a:solidFill>
-                <a:latin typeface="프리젠테이션 5 Medium" pitchFamily="2" charset="-127"/>
-                <a:ea typeface="프리젠테이션 5 Medium" pitchFamily="2" charset="-127"/>
-              </a:rPr>
-              <a:t>Read Head</a:t>
-            </a:r>
-          </a:p>
-          <a:p>
-            <a:pPr>
-              <a:spcBef>
-                <a:spcPts val="400"/>
-              </a:spcBef>
-            </a:pPr>
-            <a:r>
-              <a:rPr sz="1400" b="0" i="0" dirty="0" err="1">
-                <a:solidFill>
-                  <a:srgbClr val="565C66"/>
-                </a:solidFill>
-                <a:latin typeface="프리젠테이션 5 Medium" pitchFamily="2" charset="-127"/>
-                <a:ea typeface="프리젠테이션 5 Medium" pitchFamily="2" charset="-127"/>
-              </a:rPr>
-              <a:t>외부</a:t>
-            </a:r>
-            <a:r>
-              <a:rPr sz="1400" b="0" i="0" dirty="0">
-                <a:solidFill>
-                  <a:srgbClr val="565C66"/>
-                </a:solidFill>
-                <a:latin typeface="프리젠테이션 5 Medium" pitchFamily="2" charset="-127"/>
-                <a:ea typeface="프리젠테이션 5 Medium" pitchFamily="2" charset="-127"/>
-              </a:rPr>
-              <a:t> </a:t>
-            </a:r>
-            <a:r>
-              <a:rPr sz="1400" b="0" i="0" dirty="0" err="1">
-                <a:solidFill>
-                  <a:srgbClr val="565C66"/>
-                </a:solidFill>
-                <a:latin typeface="프리젠테이션 5 Medium" pitchFamily="2" charset="-127"/>
-                <a:ea typeface="프리젠테이션 5 Medium" pitchFamily="2" charset="-127"/>
-              </a:rPr>
-              <a:t>데이터의</a:t>
-            </a:r>
-            <a:r>
-              <a:rPr sz="1400" b="0" i="0" dirty="0">
-                <a:solidFill>
-                  <a:srgbClr val="565C66"/>
-                </a:solidFill>
-                <a:latin typeface="프리젠테이션 5 Medium" pitchFamily="2" charset="-127"/>
-                <a:ea typeface="프리젠테이션 5 Medium" pitchFamily="2" charset="-127"/>
-              </a:rPr>
-              <a:t> </a:t>
-            </a:r>
-            <a:r>
-              <a:rPr sz="1400" b="0" i="0" dirty="0" err="1">
-                <a:solidFill>
-                  <a:srgbClr val="565C66"/>
-                </a:solidFill>
-                <a:latin typeface="프리젠테이션 5 Medium" pitchFamily="2" charset="-127"/>
-                <a:ea typeface="프리젠테이션 5 Medium" pitchFamily="2" charset="-127"/>
-              </a:rPr>
-              <a:t>내용을</a:t>
-            </a:r>
-            <a:r>
-              <a:rPr sz="1400" b="0" i="0" dirty="0">
-                <a:solidFill>
-                  <a:srgbClr val="565C66"/>
-                </a:solidFill>
-                <a:latin typeface="프리젠테이션 5 Medium" pitchFamily="2" charset="-127"/>
-                <a:ea typeface="프리젠테이션 5 Medium" pitchFamily="2" charset="-127"/>
-              </a:rPr>
-              <a:t> </a:t>
-            </a:r>
-            <a:r>
-              <a:rPr sz="1400" b="0" i="0" dirty="0" err="1">
-                <a:solidFill>
-                  <a:srgbClr val="565C66"/>
-                </a:solidFill>
-                <a:latin typeface="프리젠테이션 5 Medium" pitchFamily="2" charset="-127"/>
-                <a:ea typeface="프리젠테이션 5 Medium" pitchFamily="2" charset="-127"/>
-              </a:rPr>
-              <a:t>읽는</a:t>
-            </a:r>
-            <a:r>
-              <a:rPr sz="1400" b="0" i="0" dirty="0">
-                <a:solidFill>
-                  <a:srgbClr val="565C66"/>
-                </a:solidFill>
-                <a:latin typeface="프리젠테이션 5 Medium" pitchFamily="2" charset="-127"/>
-                <a:ea typeface="프리젠테이션 5 Medium" pitchFamily="2" charset="-127"/>
-              </a:rPr>
-              <a:t> 데 </a:t>
-            </a:r>
-            <a:r>
-              <a:rPr sz="1400" b="0" i="0" dirty="0" err="1">
-                <a:solidFill>
-                  <a:srgbClr val="565C66"/>
-                </a:solidFill>
-                <a:latin typeface="프리젠테이션 5 Medium" pitchFamily="2" charset="-127"/>
-                <a:ea typeface="프리젠테이션 5 Medium" pitchFamily="2" charset="-127"/>
-              </a:rPr>
-              <a:t>관여</a:t>
-            </a:r>
-            <a:r>
-              <a:rPr sz="1400" b="0" i="0" dirty="0">
-                <a:solidFill>
-                  <a:srgbClr val="565C66"/>
-                </a:solidFill>
-                <a:latin typeface="프리젠테이션 5 Medium" pitchFamily="2" charset="-127"/>
-                <a:ea typeface="프리젠테이션 5 Medium" pitchFamily="2" charset="-127"/>
-              </a:rPr>
-              <a:t> — </a:t>
-            </a:r>
-            <a:r>
-              <a:rPr sz="1400" b="0" i="0" dirty="0" err="1">
-                <a:solidFill>
-                  <a:srgbClr val="565C66"/>
-                </a:solidFill>
-                <a:latin typeface="프리젠테이션 5 Medium" pitchFamily="2" charset="-127"/>
-                <a:ea typeface="프리젠테이션 5 Medium" pitchFamily="2" charset="-127"/>
-              </a:rPr>
-              <a:t>정상</a:t>
-            </a:r>
-            <a:r>
-              <a:rPr sz="1400" b="0" i="0" dirty="0">
-                <a:solidFill>
-                  <a:srgbClr val="565C66"/>
-                </a:solidFill>
-                <a:latin typeface="프리젠테이션 5 Medium" pitchFamily="2" charset="-127"/>
-                <a:ea typeface="프리젠테이션 5 Medium" pitchFamily="2" charset="-127"/>
-              </a:rPr>
-              <a:t> </a:t>
-            </a:r>
-            <a:r>
-              <a:rPr sz="1400" b="0" i="0" dirty="0" err="1">
-                <a:solidFill>
-                  <a:srgbClr val="565C66"/>
-                </a:solidFill>
-                <a:latin typeface="프리젠테이션 5 Medium" pitchFamily="2" charset="-127"/>
-                <a:ea typeface="프리젠테이션 5 Medium" pitchFamily="2" charset="-127"/>
-              </a:rPr>
-              <a:t>기능을</a:t>
-            </a:r>
-            <a:r>
-              <a:rPr sz="1400" b="0" i="0" dirty="0">
-                <a:solidFill>
-                  <a:srgbClr val="565C66"/>
-                </a:solidFill>
-                <a:latin typeface="프리젠테이션 5 Medium" pitchFamily="2" charset="-127"/>
-                <a:ea typeface="프리젠테이션 5 Medium" pitchFamily="2" charset="-127"/>
-              </a:rPr>
-              <a:t> </a:t>
-            </a:r>
-            <a:r>
-              <a:rPr sz="1400" b="0" i="0" dirty="0" err="1">
-                <a:solidFill>
-                  <a:srgbClr val="565C66"/>
-                </a:solidFill>
-                <a:latin typeface="프리젠테이션 5 Medium" pitchFamily="2" charset="-127"/>
-                <a:ea typeface="프리젠테이션 5 Medium" pitchFamily="2" charset="-127"/>
-              </a:rPr>
-              <a:t>담당</a:t>
-            </a:r>
-            <a:endParaRPr sz="1400" b="0" i="0" dirty="0">
-              <a:solidFill>
-                <a:srgbClr val="565C66"/>
-              </a:solidFill>
-              <a:latin typeface="프리젠테이션 5 Medium" pitchFamily="2" charset="-127"/>
-              <a:ea typeface="프리젠테이션 5 Medium" pitchFamily="2" charset="-127"/>
-            </a:endParaRPr>
-          </a:p>
-        </p:txBody>
-      </p:sp>
-      <p:sp>
-        <p:nvSpPr>
-          <p:cNvPr id="21" name="TextBox 20">
-            <a:extLst>
-              <a:ext uri="{FF2B5EF4-FFF2-40B4-BE49-F238E27FC236}">
-                <a16:creationId xmlns:a16="http://schemas.microsoft.com/office/drawing/2014/main" id="{E2949205-E297-703D-EFF8-DD578196E492}"/>
-              </a:ext>
-            </a:extLst>
-          </p:cNvPr>
-          <p:cNvSpPr txBox="1"/>
-          <p:nvPr/>
-        </p:nvSpPr>
-        <p:spPr>
-          <a:xfrm>
-            <a:off x="6552126" y="3134882"/>
-            <a:ext cx="4196694" cy="482183"/>
-          </a:xfrm>
-          <a:prstGeom prst="rect">
-            <a:avLst/>
-          </a:prstGeom>
-          <a:noFill/>
-        </p:spPr>
-        <p:txBody>
-          <a:bodyPr wrap="square" lIns="0" tIns="0" rIns="0" bIns="0" anchor="t">
-            <a:spAutoFit/>
-          </a:bodyPr>
-          <a:lstStyle/>
-          <a:p>
-            <a:r>
-              <a:rPr sz="1400" b="1" i="0" dirty="0">
-                <a:solidFill>
-                  <a:srgbClr val="2F6FCE"/>
-                </a:solidFill>
-                <a:latin typeface="프리젠테이션 5 Medium" pitchFamily="2" charset="-127"/>
-                <a:ea typeface="프리젠테이션 5 Medium" pitchFamily="2" charset="-127"/>
-              </a:rPr>
-              <a:t>Control Head</a:t>
-            </a:r>
-          </a:p>
-          <a:p>
-            <a:pPr>
-              <a:spcBef>
-                <a:spcPts val="400"/>
-              </a:spcBef>
-            </a:pPr>
-            <a:r>
-              <a:rPr sz="1400" b="0" i="0" dirty="0" err="1">
-                <a:solidFill>
-                  <a:srgbClr val="565C66"/>
-                </a:solidFill>
-                <a:latin typeface="프리젠테이션 5 Medium" pitchFamily="2" charset="-127"/>
-                <a:ea typeface="프리젠테이션 5 Medium" pitchFamily="2" charset="-127"/>
-              </a:rPr>
-              <a:t>데이터</a:t>
-            </a:r>
-            <a:r>
-              <a:rPr sz="1400" b="0" i="0" dirty="0">
-                <a:solidFill>
-                  <a:srgbClr val="565C66"/>
-                </a:solidFill>
-                <a:latin typeface="프리젠테이션 5 Medium" pitchFamily="2" charset="-127"/>
-                <a:ea typeface="프리젠테이션 5 Medium" pitchFamily="2" charset="-127"/>
-              </a:rPr>
-              <a:t> 속 “</a:t>
-            </a:r>
-            <a:r>
-              <a:rPr sz="1400" b="0" i="0" dirty="0" err="1">
-                <a:solidFill>
-                  <a:srgbClr val="565C66"/>
-                </a:solidFill>
-                <a:latin typeface="프리젠테이션 5 Medium" pitchFamily="2" charset="-127"/>
-                <a:ea typeface="프리젠테이션 5 Medium" pitchFamily="2" charset="-127"/>
-              </a:rPr>
-              <a:t>명령”을</a:t>
-            </a:r>
-            <a:r>
-              <a:rPr sz="1400" b="0" i="0" dirty="0">
-                <a:solidFill>
-                  <a:srgbClr val="565C66"/>
-                </a:solidFill>
-                <a:latin typeface="프리젠테이션 5 Medium" pitchFamily="2" charset="-127"/>
-                <a:ea typeface="프리젠테이션 5 Medium" pitchFamily="2" charset="-127"/>
-              </a:rPr>
-              <a:t> </a:t>
-            </a:r>
-            <a:r>
-              <a:rPr sz="1400" b="0" i="0" dirty="0" err="1">
-                <a:solidFill>
-                  <a:srgbClr val="565C66"/>
-                </a:solidFill>
-                <a:latin typeface="프리젠테이션 5 Medium" pitchFamily="2" charset="-127"/>
-                <a:ea typeface="프리젠테이션 5 Medium" pitchFamily="2" charset="-127"/>
-              </a:rPr>
-              <a:t>실행에</a:t>
-            </a:r>
-            <a:r>
-              <a:rPr sz="1400" b="0" i="0" dirty="0">
-                <a:solidFill>
-                  <a:srgbClr val="565C66"/>
-                </a:solidFill>
-                <a:latin typeface="프리젠테이션 5 Medium" pitchFamily="2" charset="-127"/>
-                <a:ea typeface="프리젠테이션 5 Medium" pitchFamily="2" charset="-127"/>
-              </a:rPr>
-              <a:t> </a:t>
-            </a:r>
-            <a:r>
-              <a:rPr sz="1400" b="0" i="0" dirty="0" err="1">
-                <a:solidFill>
-                  <a:srgbClr val="565C66"/>
-                </a:solidFill>
-                <a:latin typeface="프리젠테이션 5 Medium" pitchFamily="2" charset="-127"/>
-                <a:ea typeface="프리젠테이션 5 Medium" pitchFamily="2" charset="-127"/>
-              </a:rPr>
-              <a:t>옮기는</a:t>
-            </a:r>
-            <a:r>
-              <a:rPr sz="1400" b="0" i="0" dirty="0">
-                <a:solidFill>
-                  <a:srgbClr val="565C66"/>
-                </a:solidFill>
-                <a:latin typeface="프리젠테이션 5 Medium" pitchFamily="2" charset="-127"/>
-                <a:ea typeface="프리젠테이션 5 Medium" pitchFamily="2" charset="-127"/>
-              </a:rPr>
-              <a:t> 데 </a:t>
-            </a:r>
-            <a:r>
-              <a:rPr sz="1400" b="0" i="0" dirty="0" err="1">
-                <a:solidFill>
-                  <a:srgbClr val="565C66"/>
-                </a:solidFill>
-                <a:latin typeface="프리젠테이션 5 Medium" pitchFamily="2" charset="-127"/>
-                <a:ea typeface="프리젠테이션 5 Medium" pitchFamily="2" charset="-127"/>
-              </a:rPr>
-              <a:t>관여</a:t>
-            </a:r>
-            <a:r>
-              <a:rPr sz="1400" b="0" i="0" dirty="0">
-                <a:solidFill>
-                  <a:srgbClr val="565C66"/>
-                </a:solidFill>
-                <a:latin typeface="프리젠테이션 5 Medium" pitchFamily="2" charset="-127"/>
-                <a:ea typeface="프리젠테이션 5 Medium" pitchFamily="2" charset="-127"/>
-              </a:rPr>
-              <a:t> — </a:t>
-            </a:r>
-            <a:r>
-              <a:rPr sz="1400" b="0" i="0" dirty="0" err="1">
-                <a:solidFill>
-                  <a:srgbClr val="565C66"/>
-                </a:solidFill>
-                <a:latin typeface="프리젠테이션 5 Medium" pitchFamily="2" charset="-127"/>
-                <a:ea typeface="프리젠테이션 5 Medium" pitchFamily="2" charset="-127"/>
-              </a:rPr>
-              <a:t>공격이</a:t>
-            </a:r>
-            <a:r>
-              <a:rPr sz="1400" b="0" i="0" dirty="0">
-                <a:solidFill>
-                  <a:srgbClr val="565C66"/>
-                </a:solidFill>
-                <a:latin typeface="프리젠테이션 5 Medium" pitchFamily="2" charset="-127"/>
-                <a:ea typeface="프리젠테이션 5 Medium" pitchFamily="2" charset="-127"/>
-              </a:rPr>
-              <a:t> </a:t>
-            </a:r>
-            <a:r>
-              <a:rPr sz="1400" b="0" i="0" dirty="0" err="1">
-                <a:solidFill>
-                  <a:srgbClr val="565C66"/>
-                </a:solidFill>
-                <a:latin typeface="프리젠테이션 5 Medium" pitchFamily="2" charset="-127"/>
-                <a:ea typeface="프리젠테이션 5 Medium" pitchFamily="2" charset="-127"/>
-              </a:rPr>
-              <a:t>성공하는</a:t>
-            </a:r>
-            <a:r>
-              <a:rPr sz="1400" b="0" i="0" dirty="0">
-                <a:solidFill>
-                  <a:srgbClr val="565C66"/>
-                </a:solidFill>
-                <a:latin typeface="프리젠테이션 5 Medium" pitchFamily="2" charset="-127"/>
-                <a:ea typeface="프리젠테이션 5 Medium" pitchFamily="2" charset="-127"/>
-              </a:rPr>
-              <a:t> </a:t>
-            </a:r>
-            <a:r>
-              <a:rPr sz="1400" b="0" i="0" dirty="0" err="1">
-                <a:solidFill>
-                  <a:srgbClr val="565C66"/>
-                </a:solidFill>
-                <a:latin typeface="프리젠테이션 5 Medium" pitchFamily="2" charset="-127"/>
-                <a:ea typeface="프리젠테이션 5 Medium" pitchFamily="2" charset="-127"/>
-              </a:rPr>
-              <a:t>경로</a:t>
-            </a:r>
-            <a:endParaRPr sz="1400" b="0" i="0" dirty="0">
-              <a:solidFill>
-                <a:srgbClr val="565C66"/>
-              </a:solidFill>
-              <a:latin typeface="프리젠테이션 5 Medium" pitchFamily="2" charset="-127"/>
-              <a:ea typeface="프리젠테이션 5 Medium" pitchFamily="2" charset="-127"/>
-            </a:endParaRPr>
-          </a:p>
-        </p:txBody>
-      </p:sp>
-      <p:sp>
-        <p:nvSpPr>
-          <p:cNvPr id="28" name="TextBox 27">
-            <a:extLst>
-              <a:ext uri="{FF2B5EF4-FFF2-40B4-BE49-F238E27FC236}">
-                <a16:creationId xmlns:a16="http://schemas.microsoft.com/office/drawing/2014/main" id="{EACF2754-93F8-556E-9224-4271E1E7A9B1}"/>
-              </a:ext>
-            </a:extLst>
-          </p:cNvPr>
-          <p:cNvSpPr txBox="1"/>
-          <p:nvPr/>
-        </p:nvSpPr>
-        <p:spPr>
-          <a:xfrm>
-            <a:off x="1794012" y="4745102"/>
-            <a:ext cx="8603672" cy="722442"/>
-          </a:xfrm>
-          <a:prstGeom prst="rect">
-            <a:avLst/>
-          </a:prstGeom>
-          <a:noFill/>
-        </p:spPr>
-        <p:txBody>
-          <a:bodyPr wrap="square">
-            <a:spAutoFit/>
-          </a:bodyPr>
-          <a:lstStyle/>
-          <a:p>
-            <a:pPr>
-              <a:lnSpc>
-                <a:spcPct val="135000"/>
-              </a:lnSpc>
-            </a:pPr>
-            <a:r>
-              <a:rPr lang="ko-KR" altLang="en-US" sz="1600" b="0" i="0" dirty="0">
-                <a:solidFill>
-                  <a:srgbClr val="565C66"/>
-                </a:solidFill>
-                <a:latin typeface="프리젠테이션 5 Medium" pitchFamily="2" charset="-127"/>
-                <a:ea typeface="프리젠테이션 5 Medium" pitchFamily="2" charset="-127"/>
-              </a:rPr>
-              <a:t>둘이 분리되어 있다면 </a:t>
-            </a:r>
-            <a:r>
-              <a:rPr lang="en-US" altLang="ko-KR" sz="1600" b="0" i="0" dirty="0">
-                <a:solidFill>
-                  <a:srgbClr val="565C66"/>
-                </a:solidFill>
-                <a:latin typeface="프리젠테이션 5 Medium" pitchFamily="2" charset="-127"/>
-                <a:ea typeface="프리젠테이션 5 Medium" pitchFamily="2" charset="-127"/>
-              </a:rPr>
-              <a:t>control head</a:t>
-            </a:r>
-            <a:r>
-              <a:rPr lang="ko-KR" altLang="en-US" sz="1600" b="0" i="0" dirty="0">
-                <a:solidFill>
-                  <a:srgbClr val="565C66"/>
-                </a:solidFill>
-                <a:latin typeface="프리젠테이션 5 Medium" pitchFamily="2" charset="-127"/>
-                <a:ea typeface="프리젠테이션 5 Medium" pitchFamily="2" charset="-127"/>
-              </a:rPr>
-              <a:t>만 무력화해 </a:t>
-            </a:r>
-            <a:r>
-              <a:rPr lang="en-US" altLang="ko-KR" sz="1600" b="0" i="0" dirty="0">
-                <a:solidFill>
-                  <a:srgbClr val="565C66"/>
-                </a:solidFill>
-                <a:latin typeface="프리젠테이션 5 Medium" pitchFamily="2" charset="-127"/>
-                <a:ea typeface="프리젠테이션 5 Medium" pitchFamily="2" charset="-127"/>
-              </a:rPr>
-              <a:t>read </a:t>
-            </a:r>
-            <a:r>
-              <a:rPr lang="ko-KR" altLang="en-US" sz="1600" b="0" i="0" dirty="0">
-                <a:solidFill>
-                  <a:srgbClr val="565C66"/>
-                </a:solidFill>
-                <a:latin typeface="프리젠테이션 5 Medium" pitchFamily="2" charset="-127"/>
-                <a:ea typeface="프리젠테이션 5 Medium" pitchFamily="2" charset="-127"/>
-              </a:rPr>
-              <a:t>기능은 보존한 채 공격만 방어 가능</a:t>
-            </a:r>
-            <a:r>
-              <a:rPr lang="en-US" altLang="ko-KR" sz="1600" b="0" i="0" dirty="0">
-                <a:solidFill>
-                  <a:srgbClr val="565C66"/>
-                </a:solidFill>
-                <a:latin typeface="프리젠테이션 5 Medium" pitchFamily="2" charset="-127"/>
-                <a:ea typeface="프리젠테이션 5 Medium" pitchFamily="2" charset="-127"/>
-              </a:rPr>
-              <a:t> </a:t>
-            </a:r>
-          </a:p>
-          <a:p>
-            <a:pPr>
-              <a:lnSpc>
-                <a:spcPct val="135000"/>
-              </a:lnSpc>
-            </a:pPr>
-            <a:r>
-              <a:rPr lang="ko-KR" altLang="en-US" sz="1600" b="0" i="0" dirty="0">
-                <a:solidFill>
-                  <a:srgbClr val="565C66"/>
-                </a:solidFill>
-                <a:latin typeface="프리젠테이션 5 Medium" pitchFamily="2" charset="-127"/>
-                <a:ea typeface="프리젠테이션 5 Medium" pitchFamily="2" charset="-127"/>
-              </a:rPr>
-              <a:t>방법은 두 단계</a:t>
-            </a:r>
-            <a:r>
-              <a:rPr lang="en-US" altLang="ko-KR" sz="1600" b="0" i="0" dirty="0">
-                <a:solidFill>
-                  <a:srgbClr val="565C66"/>
-                </a:solidFill>
-                <a:latin typeface="프리젠테이션 5 Medium" pitchFamily="2" charset="-127"/>
-                <a:ea typeface="프리젠테이션 5 Medium" pitchFamily="2" charset="-127"/>
-              </a:rPr>
-              <a:t>: </a:t>
-            </a:r>
-            <a:r>
-              <a:rPr lang="ko-KR" altLang="en-US" sz="1600" b="1" i="0" dirty="0">
-                <a:solidFill>
-                  <a:srgbClr val="16181D"/>
-                </a:solidFill>
-                <a:latin typeface="프리젠테이션 5 Medium" pitchFamily="2" charset="-127"/>
-                <a:ea typeface="프리젠테이션 5 Medium" pitchFamily="2" charset="-127"/>
-              </a:rPr>
-              <a:t>① </a:t>
-            </a:r>
-            <a:r>
-              <a:rPr lang="en-US" altLang="ko-KR" sz="1600" b="1" i="0" dirty="0">
-                <a:solidFill>
-                  <a:srgbClr val="16181D"/>
-                </a:solidFill>
-                <a:latin typeface="프리젠테이션 5 Medium" pitchFamily="2" charset="-127"/>
-                <a:ea typeface="프리젠테이션 5 Medium" pitchFamily="2" charset="-127"/>
-              </a:rPr>
-              <a:t>relevance</a:t>
-            </a:r>
-            <a:r>
-              <a:rPr lang="ko-KR" altLang="en-US" sz="1600" b="1" i="0" dirty="0">
-                <a:solidFill>
-                  <a:srgbClr val="16181D"/>
-                </a:solidFill>
-                <a:latin typeface="프리젠테이션 5 Medium" pitchFamily="2" charset="-127"/>
-                <a:ea typeface="프리젠테이션 5 Medium" pitchFamily="2" charset="-127"/>
-              </a:rPr>
-              <a:t>로 </a:t>
-            </a:r>
-            <a:r>
-              <a:rPr lang="en-US" altLang="ko-KR" sz="1600" b="1" i="0" dirty="0">
-                <a:solidFill>
-                  <a:srgbClr val="16181D"/>
-                </a:solidFill>
-                <a:latin typeface="프리젠테이션 5 Medium" pitchFamily="2" charset="-127"/>
-                <a:ea typeface="프리젠테이션 5 Medium" pitchFamily="2" charset="-127"/>
-              </a:rPr>
-              <a:t>head</a:t>
-            </a:r>
-            <a:r>
-              <a:rPr lang="ko-KR" altLang="en-US" sz="1600" b="1" i="0" dirty="0">
-                <a:solidFill>
-                  <a:srgbClr val="16181D"/>
-                </a:solidFill>
-                <a:latin typeface="프리젠테이션 5 Medium" pitchFamily="2" charset="-127"/>
-                <a:ea typeface="프리젠테이션 5 Medium" pitchFamily="2" charset="-127"/>
-              </a:rPr>
-              <a:t>를 찾고 </a:t>
-            </a:r>
-            <a:r>
-              <a:rPr lang="ko-KR" altLang="en-US" sz="1600" b="1" dirty="0">
-                <a:solidFill>
-                  <a:srgbClr val="16181D"/>
-                </a:solidFill>
-                <a:latin typeface="프리젠테이션 5 Medium" pitchFamily="2" charset="-127"/>
-                <a:ea typeface="프리젠테이션 5 Medium" pitchFamily="2" charset="-127"/>
-              </a:rPr>
-              <a:t> </a:t>
-            </a:r>
-            <a:r>
-              <a:rPr lang="ko-KR" altLang="en-US" sz="1600" b="1" i="0" dirty="0">
-                <a:solidFill>
-                  <a:srgbClr val="16181D"/>
-                </a:solidFill>
-                <a:latin typeface="프리젠테이션 5 Medium" pitchFamily="2" charset="-127"/>
-                <a:ea typeface="프리젠테이션 5 Medium" pitchFamily="2" charset="-127"/>
-              </a:rPr>
-              <a:t>② 그 </a:t>
-            </a:r>
-            <a:r>
-              <a:rPr lang="en-US" altLang="ko-KR" sz="1600" b="1" i="0" dirty="0">
-                <a:solidFill>
-                  <a:srgbClr val="16181D"/>
-                </a:solidFill>
-                <a:latin typeface="프리젠테이션 5 Medium" pitchFamily="2" charset="-127"/>
-                <a:ea typeface="프리젠테이션 5 Medium" pitchFamily="2" charset="-127"/>
-              </a:rPr>
-              <a:t>head</a:t>
-            </a:r>
-            <a:r>
-              <a:rPr lang="ko-KR" altLang="en-US" sz="1600" b="1" i="0" dirty="0">
-                <a:solidFill>
-                  <a:srgbClr val="16181D"/>
-                </a:solidFill>
-                <a:latin typeface="프리젠테이션 5 Medium" pitchFamily="2" charset="-127"/>
-                <a:ea typeface="프리젠테이션 5 Medium" pitchFamily="2" charset="-127"/>
-              </a:rPr>
-              <a:t>의 </a:t>
-            </a:r>
-            <a:r>
-              <a:rPr lang="en-US" altLang="ko-KR" sz="1600" b="1" i="0" dirty="0" err="1">
-                <a:solidFill>
-                  <a:srgbClr val="16181D"/>
-                </a:solidFill>
-                <a:latin typeface="프리젠테이션 5 Medium" pitchFamily="2" charset="-127"/>
-                <a:ea typeface="프리젠테이션 5 Medium" pitchFamily="2" charset="-127"/>
-              </a:rPr>
-              <a:t>D_inj</a:t>
-            </a:r>
-            <a:r>
-              <a:rPr lang="ko-KR" altLang="en-US" sz="1600" b="1" i="0" dirty="0">
-                <a:solidFill>
-                  <a:srgbClr val="16181D"/>
-                </a:solidFill>
-                <a:latin typeface="프리젠테이션 5 Medium" pitchFamily="2" charset="-127"/>
-                <a:ea typeface="프리젠테이션 5 Medium" pitchFamily="2" charset="-127"/>
-              </a:rPr>
-              <a:t> 방향 </a:t>
-            </a:r>
-            <a:r>
-              <a:rPr lang="en-US" altLang="ko-KR" sz="1600" b="1" i="0" dirty="0">
-                <a:solidFill>
-                  <a:srgbClr val="16181D"/>
-                </a:solidFill>
-                <a:latin typeface="프리젠테이션 5 Medium" pitchFamily="2" charset="-127"/>
-                <a:ea typeface="프리젠테이션 5 Medium" pitchFamily="2" charset="-127"/>
-              </a:rPr>
-              <a:t>attention edge</a:t>
-            </a:r>
-            <a:r>
-              <a:rPr lang="ko-KR" altLang="en-US" sz="1600" b="1" i="0" dirty="0">
-                <a:solidFill>
-                  <a:srgbClr val="16181D"/>
-                </a:solidFill>
-                <a:latin typeface="프리젠테이션 5 Medium" pitchFamily="2" charset="-127"/>
-                <a:ea typeface="프리젠테이션 5 Medium" pitchFamily="2" charset="-127"/>
-              </a:rPr>
-              <a:t>만 끊는다</a:t>
-            </a:r>
-            <a:r>
-              <a:rPr lang="en-US" altLang="ko-KR" sz="1600" b="1" i="0" dirty="0">
-                <a:solidFill>
-                  <a:srgbClr val="16181D"/>
-                </a:solidFill>
-                <a:latin typeface="프리젠테이션 5 Medium" pitchFamily="2" charset="-127"/>
-                <a:ea typeface="프리젠테이션 5 Medium" pitchFamily="2" charset="-127"/>
-              </a:rPr>
-              <a:t>.</a:t>
-            </a:r>
-          </a:p>
-        </p:txBody>
-      </p:sp>
-    </p:spTree>
-    <p:extLst>
-      <p:ext uri="{BB962C8B-B14F-4D97-AF65-F5344CB8AC3E}">
-        <p14:creationId xmlns:p14="http://schemas.microsoft.com/office/powerpoint/2010/main" val="968100418"/>
-      </p:ext>
-    </p:extLst>
-  </p:cSld>
-  <p:clrMapOvr>
-    <a:masterClrMapping/>
-  </p:clrMapOvr>
-</p:sld>
-</file>
-
-<file path=ppt/slides/slide3.xml><?xml version="1.0" encoding="utf-8"?>
 <p:sld xmlns:a="http://schemas.openxmlformats.org/drawingml/2006/main" xmlns:r="http://schemas.openxmlformats.org/officeDocument/2006/relationships" xmlns:p="http://schemas.openxmlformats.org/presentationml/2006/main">
   <p:cSld>
     <p:spTree>
@@ -19245,7 +18969,7 @@
 </p:sld>
 </file>
 
-<file path=ppt/slides/slide4.xml><?xml version="1.0" encoding="utf-8"?>
+<file path=ppt/slides/slide3.xml><?xml version="1.0" encoding="utf-8"?>
 <p:sld xmlns:a="http://schemas.openxmlformats.org/drawingml/2006/main" xmlns:r="http://schemas.openxmlformats.org/officeDocument/2006/relationships" xmlns:p="http://schemas.openxmlformats.org/presentationml/2006/main">
   <p:cSld>
     <p:spTree>
@@ -20245,7 +19969,7 @@
 </p:sld>
 </file>
 
-<file path=ppt/slides/slide5.xml><?xml version="1.0" encoding="utf-8"?>
+<file path=ppt/slides/slide4.xml><?xml version="1.0" encoding="utf-8"?>
 <p:sld xmlns:a="http://schemas.openxmlformats.org/drawingml/2006/main" xmlns:r="http://schemas.openxmlformats.org/officeDocument/2006/relationships" xmlns:p="http://schemas.openxmlformats.org/presentationml/2006/main">
   <p:cSld>
     <p:spTree>
@@ -20264,277 +19988,232 @@
       </p:grpSpPr>
       <p:sp>
         <p:nvSpPr>
-          <p:cNvPr id="2" name="Rectangle 1"/>
-          <p:cNvSpPr/>
-          <p:nvPr/>
+          <p:cNvPr id="3" name="제목 2">
+            <a:extLst>
+              <a:ext uri="{FF2B5EF4-FFF2-40B4-BE49-F238E27FC236}">
+                <a16:creationId xmlns:a16="http://schemas.microsoft.com/office/drawing/2014/main" id="{2177C468-DE04-5456-4313-8DD2291994FD}"/>
+              </a:ext>
+            </a:extLst>
+          </p:cNvPr>
+          <p:cNvSpPr>
+            <a:spLocks noGrp="1"/>
+          </p:cNvSpPr>
+          <p:nvPr>
+            <p:ph type="title" idx="102"/>
+          </p:nvPr>
         </p:nvSpPr>
         <p:spPr>
           <a:xfrm>
-            <a:off x="0" y="0"/>
-            <a:ext cx="12188952" cy="6858000"/>
+            <a:off x="195943" y="2480854"/>
+            <a:ext cx="11551920" cy="1097280"/>
           </a:xfrm>
-          <a:prstGeom prst="rect">
-            <a:avLst/>
-          </a:prstGeom>
-          <a:solidFill>
-            <a:srgbClr val="FFFFFF"/>
-          </a:solidFill>
-          <a:ln>
-            <a:noFill/>
-          </a:ln>
-          <a:effectLst/>
         </p:spPr>
-        <p:style>
-          <a:lnRef idx="1">
-            <a:schemeClr val="accent1"/>
-          </a:lnRef>
-          <a:fillRef idx="3">
-            <a:schemeClr val="accent1"/>
-          </a:fillRef>
-          <a:effectRef idx="2">
-            <a:schemeClr val="accent1"/>
-          </a:effectRef>
-          <a:fontRef idx="minor">
-            <a:schemeClr val="lt1"/>
-          </a:fontRef>
-        </p:style>
         <p:txBody>
-          <a:bodyPr rtlCol="0" anchor="ctr"/>
+          <a:bodyPr/>
           <a:lstStyle/>
           <a:p>
-            <a:pPr algn="ctr"/>
-            <a:endParaRPr/>
+            <a:r>
+              <a:rPr lang="en-US" altLang="ko-KR" sz="4800" dirty="0">
+                <a:latin typeface="프리젠테이션 5 Medium" pitchFamily="2" charset="-127"/>
+                <a:ea typeface="프리젠테이션 5 Medium" pitchFamily="2" charset="-127"/>
+              </a:rPr>
+              <a:t>Read Head,</a:t>
+            </a:r>
+            <a:r>
+              <a:rPr lang="ko-KR" altLang="en-US" sz="4800" dirty="0">
+                <a:latin typeface="프리젠테이션 5 Medium" pitchFamily="2" charset="-127"/>
+                <a:ea typeface="프리젠테이션 5 Medium" pitchFamily="2" charset="-127"/>
+              </a:rPr>
+              <a:t> </a:t>
+            </a:r>
+            <a:r>
+              <a:rPr lang="en-US" altLang="ko-KR" sz="4800" dirty="0">
+                <a:latin typeface="프리젠테이션 5 Medium" pitchFamily="2" charset="-127"/>
+                <a:ea typeface="프리젠테이션 5 Medium" pitchFamily="2" charset="-127"/>
+              </a:rPr>
+              <a:t>Control Head</a:t>
+            </a:r>
+            <a:r>
+              <a:rPr lang="ko-KR" altLang="en-US" sz="4800" dirty="0">
+                <a:latin typeface="프리젠테이션 5 Medium" pitchFamily="2" charset="-127"/>
+                <a:ea typeface="프리젠테이션 5 Medium" pitchFamily="2" charset="-127"/>
+              </a:rPr>
+              <a:t> 분리 </a:t>
+            </a:r>
+            <a:r>
+              <a:rPr lang="en-US" altLang="ko-KR" sz="4800" dirty="0">
+                <a:latin typeface="프리젠테이션 5 Medium" pitchFamily="2" charset="-127"/>
+                <a:ea typeface="프리젠테이션 5 Medium" pitchFamily="2" charset="-127"/>
+              </a:rPr>
+              <a:t>PoC</a:t>
+            </a:r>
           </a:p>
         </p:txBody>
       </p:sp>
       <p:sp>
         <p:nvSpPr>
-          <p:cNvPr id="3" name="Rectangle 2"/>
-          <p:cNvSpPr/>
-          <p:nvPr/>
+          <p:cNvPr id="4" name="텍스트 개체 틀 3">
+            <a:extLst>
+              <a:ext uri="{FF2B5EF4-FFF2-40B4-BE49-F238E27FC236}">
+                <a16:creationId xmlns:a16="http://schemas.microsoft.com/office/drawing/2014/main" id="{3EAE1255-7519-D80E-B995-55F7E828629E}"/>
+              </a:ext>
+            </a:extLst>
+          </p:cNvPr>
+          <p:cNvSpPr>
+            <a:spLocks noGrp="1"/>
+          </p:cNvSpPr>
+          <p:nvPr>
+            <p:ph type="body" idx="103"/>
+          </p:nvPr>
         </p:nvSpPr>
         <p:spPr>
           <a:xfrm>
-            <a:off x="640080" y="2084831"/>
-            <a:ext cx="1005840" cy="50292"/>
+            <a:off x="1728652" y="3429000"/>
+            <a:ext cx="8486502" cy="457200"/>
           </a:xfrm>
-          <a:prstGeom prst="rect">
-            <a:avLst/>
-          </a:prstGeom>
-          <a:solidFill>
-            <a:srgbClr val="C06A1F"/>
-          </a:solidFill>
-          <a:ln>
-            <a:noFill/>
-          </a:ln>
-          <a:effectLst/>
         </p:spPr>
-        <p:style>
-          <a:lnRef idx="1">
-            <a:schemeClr val="accent1"/>
-          </a:lnRef>
-          <a:fillRef idx="3">
-            <a:schemeClr val="accent1"/>
-          </a:fillRef>
-          <a:effectRef idx="2">
-            <a:schemeClr val="accent1"/>
-          </a:effectRef>
-          <a:fontRef idx="minor">
-            <a:schemeClr val="lt1"/>
-          </a:fontRef>
-        </p:style>
         <p:txBody>
-          <a:bodyPr rtlCol="0" anchor="ctr"/>
+          <a:bodyPr>
+            <a:normAutofit fontScale="92500"/>
+          </a:bodyPr>
           <a:lstStyle/>
           <a:p>
-            <a:pPr algn="ctr"/>
-            <a:endParaRPr/>
+            <a:r>
+              <a:rPr lang="en-US" altLang="ko-KR" sz="2400" dirty="0" err="1">
+                <a:solidFill>
+                  <a:srgbClr val="5FB8C4"/>
+                </a:solidFill>
+                <a:latin typeface="프리젠테이션 5 Medium" pitchFamily="2" charset="-127"/>
+                <a:ea typeface="프리젠테이션 5 Medium" pitchFamily="2" charset="-127"/>
+                <a:cs typeface="Calibri" pitchFamily="34" charset="-120"/>
+              </a:rPr>
+              <a:t>AgentDojo</a:t>
+            </a:r>
+            <a:r>
+              <a:rPr lang="en-US" altLang="ko-KR" sz="2400" dirty="0">
+                <a:solidFill>
+                  <a:srgbClr val="5FB8C4"/>
+                </a:solidFill>
+                <a:latin typeface="프리젠테이션 5 Medium" pitchFamily="2" charset="-127"/>
+                <a:ea typeface="프리젠테이션 5 Medium" pitchFamily="2" charset="-127"/>
+                <a:cs typeface="Calibri" pitchFamily="34" charset="-120"/>
+              </a:rPr>
+              <a:t> </a:t>
+            </a:r>
+            <a:r>
+              <a:rPr lang="ko-KR" altLang="en-US" sz="2400" dirty="0">
+                <a:solidFill>
+                  <a:srgbClr val="5FB8C4"/>
+                </a:solidFill>
+                <a:latin typeface="프리젠테이션 5 Medium" pitchFamily="2" charset="-127"/>
+                <a:ea typeface="프리젠테이션 5 Medium" pitchFamily="2" charset="-127"/>
+                <a:cs typeface="Calibri" pitchFamily="34" charset="-120"/>
+              </a:rPr>
+              <a:t>네이티브 평가 도입  </a:t>
+            </a:r>
+            <a:r>
+              <a:rPr lang="en-US" altLang="ko-KR" sz="2400" dirty="0">
+                <a:solidFill>
+                  <a:srgbClr val="5FB8C4"/>
+                </a:solidFill>
+                <a:latin typeface="프리젠테이션 5 Medium" pitchFamily="2" charset="-127"/>
+                <a:ea typeface="프리젠테이션 5 Medium" pitchFamily="2" charset="-127"/>
+                <a:cs typeface="Calibri" pitchFamily="34" charset="-120"/>
+              </a:rPr>
+              <a:t>·  head </a:t>
+            </a:r>
+            <a:r>
+              <a:rPr lang="ko-KR" altLang="en-US" sz="2400" dirty="0">
+                <a:solidFill>
+                  <a:srgbClr val="5FB8C4"/>
+                </a:solidFill>
+                <a:latin typeface="프리젠테이션 5 Medium" pitchFamily="2" charset="-127"/>
+                <a:ea typeface="프리젠테이션 5 Medium" pitchFamily="2" charset="-127"/>
+                <a:cs typeface="Calibri" pitchFamily="34" charset="-120"/>
+              </a:rPr>
+              <a:t>탐색 방법론 재설계  </a:t>
+            </a:r>
+            <a:r>
+              <a:rPr lang="en-US" altLang="ko-KR" sz="2400" dirty="0">
+                <a:solidFill>
+                  <a:srgbClr val="5FB8C4"/>
+                </a:solidFill>
+                <a:latin typeface="프리젠테이션 5 Medium" pitchFamily="2" charset="-127"/>
+                <a:ea typeface="프리젠테이션 5 Medium" pitchFamily="2" charset="-127"/>
+                <a:cs typeface="Calibri" pitchFamily="34" charset="-120"/>
+              </a:rPr>
+              <a:t>·  proxy </a:t>
+            </a:r>
+            <a:r>
+              <a:rPr lang="ko-KR" altLang="en-US" sz="2400" dirty="0">
+                <a:solidFill>
+                  <a:srgbClr val="5FB8C4"/>
+                </a:solidFill>
+                <a:latin typeface="프리젠테이션 5 Medium" pitchFamily="2" charset="-127"/>
+                <a:ea typeface="프리젠테이션 5 Medium" pitchFamily="2" charset="-127"/>
+                <a:cs typeface="Calibri" pitchFamily="34" charset="-120"/>
+              </a:rPr>
+              <a:t>지표 </a:t>
+            </a:r>
+            <a:r>
+              <a:rPr lang="ko-KR" altLang="en-US" sz="2400" dirty="0" err="1">
+                <a:solidFill>
+                  <a:srgbClr val="5FB8C4"/>
+                </a:solidFill>
+                <a:latin typeface="프리젠테이션 5 Medium" pitchFamily="2" charset="-127"/>
+                <a:ea typeface="프리젠테이션 5 Medium" pitchFamily="2" charset="-127"/>
+                <a:cs typeface="Calibri" pitchFamily="34" charset="-120"/>
+              </a:rPr>
+              <a:t>재검증</a:t>
+            </a:r>
+            <a:endParaRPr lang="ko-KR" altLang="en-US" sz="2400" dirty="0">
+              <a:solidFill>
+                <a:srgbClr val="5FB8C4"/>
+              </a:solidFill>
+              <a:latin typeface="프리젠테이션 5 Medium" pitchFamily="2" charset="-127"/>
+              <a:ea typeface="프리젠테이션 5 Medium" pitchFamily="2" charset="-127"/>
+              <a:cs typeface="Calibri" pitchFamily="34" charset="-120"/>
+            </a:endParaRPr>
           </a:p>
         </p:txBody>
       </p:sp>
       <p:sp>
         <p:nvSpPr>
-          <p:cNvPr id="4" name="TextBox 3"/>
-          <p:cNvSpPr txBox="1"/>
-          <p:nvPr/>
+          <p:cNvPr id="5" name="텍스트 개체 틀 4">
+            <a:extLst>
+              <a:ext uri="{FF2B5EF4-FFF2-40B4-BE49-F238E27FC236}">
+                <a16:creationId xmlns:a16="http://schemas.microsoft.com/office/drawing/2014/main" id="{2EC17B35-4365-F89F-F120-6110CE71454E}"/>
+              </a:ext>
+            </a:extLst>
+          </p:cNvPr>
+          <p:cNvSpPr>
+            <a:spLocks noGrp="1"/>
+          </p:cNvSpPr>
+          <p:nvPr>
+            <p:ph type="body" idx="104"/>
+          </p:nvPr>
         </p:nvSpPr>
-        <p:spPr>
-          <a:xfrm>
-            <a:off x="640080" y="2286000"/>
-            <a:ext cx="8686800" cy="365760"/>
-          </a:xfrm>
-          <a:prstGeom prst="rect">
-            <a:avLst/>
-          </a:prstGeom>
-          <a:noFill/>
-        </p:spPr>
+        <p:spPr/>
         <p:txBody>
-          <a:bodyPr wrap="square" lIns="0" tIns="0" rIns="0" bIns="0">
-            <a:spAutoFit/>
-          </a:bodyPr>
+          <a:bodyPr/>
           <a:lstStyle/>
           <a:p>
-            <a:pPr algn="l">
-              <a:lnSpc>
-                <a:spcPct val="125000"/>
-              </a:lnSpc>
-            </a:pPr>
-            <a:r>
-              <a:rPr sz="1300" b="1">
-                <a:solidFill>
-                  <a:srgbClr val="C06A1F"/>
-                </a:solidFill>
-                <a:latin typeface="Consolas"/>
-                <a:ea typeface="Consolas"/>
-                <a:cs typeface="Consolas"/>
-              </a:rPr>
-              <a:t>IPI DEFENSE · FOLLOW-UP REPORT</a:t>
-            </a:r>
-          </a:p>
-        </p:txBody>
-      </p:sp>
-      <p:sp>
-        <p:nvSpPr>
-          <p:cNvPr id="5" name="TextBox 4"/>
-          <p:cNvSpPr txBox="1"/>
-          <p:nvPr/>
-        </p:nvSpPr>
-        <p:spPr>
-          <a:xfrm>
-            <a:off x="640080" y="2697480"/>
-            <a:ext cx="10515600" cy="2011680"/>
-          </a:xfrm>
-          <a:prstGeom prst="rect">
-            <a:avLst/>
-          </a:prstGeom>
-          <a:noFill/>
-        </p:spPr>
-        <p:txBody>
-          <a:bodyPr wrap="square" lIns="0" tIns="0" rIns="0" bIns="0">
-            <a:spAutoFit/>
-          </a:bodyPr>
-          <a:lstStyle/>
-          <a:p>
-            <a:pPr algn="l">
-              <a:lnSpc>
-                <a:spcPct val="120000"/>
-              </a:lnSpc>
-            </a:pPr>
-            <a:r>
-              <a:rPr sz="3400" b="1">
-                <a:solidFill>
-                  <a:srgbClr val="16181D"/>
-                </a:solidFill>
-                <a:latin typeface="Malgun Gothic"/>
-                <a:ea typeface="Malgun Gothic"/>
-                <a:cs typeface="Malgun Gothic"/>
-              </a:rPr>
-              <a:t>Read Head, Control Head 분리 PoC</a:t>
-            </a:r>
-          </a:p>
-          <a:p>
-            <a:pPr algn="l">
-              <a:lnSpc>
-                <a:spcPct val="120000"/>
-              </a:lnSpc>
-            </a:pPr>
-            <a:r>
-              <a:rPr sz="3400" b="1">
-                <a:solidFill>
-                  <a:srgbClr val="16181D"/>
-                </a:solidFill>
-                <a:latin typeface="Malgun Gothic"/>
-                <a:ea typeface="Malgun Gothic"/>
-                <a:cs typeface="Malgun Gothic"/>
-              </a:rPr>
-              <a:t>— 교수님 피드백 대응 결과 (2차)</a:t>
-            </a:r>
-          </a:p>
-        </p:txBody>
-      </p:sp>
-      <p:sp>
-        <p:nvSpPr>
-          <p:cNvPr id="6" name="TextBox 5"/>
-          <p:cNvSpPr txBox="1"/>
-          <p:nvPr/>
-        </p:nvSpPr>
-        <p:spPr>
-          <a:xfrm>
-            <a:off x="640080" y="4160520"/>
-            <a:ext cx="9692640" cy="914400"/>
-          </a:xfrm>
-          <a:prstGeom prst="rect">
-            <a:avLst/>
-          </a:prstGeom>
-          <a:noFill/>
-        </p:spPr>
-        <p:txBody>
-          <a:bodyPr wrap="square" lIns="0" tIns="0" rIns="0" bIns="0">
-            <a:spAutoFit/>
-          </a:bodyPr>
-          <a:lstStyle/>
-          <a:p>
-            <a:pPr algn="l">
-              <a:lnSpc>
-                <a:spcPct val="125000"/>
-              </a:lnSpc>
-            </a:pPr>
-            <a:r>
-              <a:rPr sz="1500" b="0">
-                <a:solidFill>
-                  <a:srgbClr val="565C66"/>
-                </a:solidFill>
-                <a:latin typeface="Malgun Gothic"/>
-                <a:ea typeface="Malgun Gothic"/>
-                <a:cs typeface="Malgun Gothic"/>
-              </a:rPr>
-              <a:t>AgentDojo 네이티브 평가 도입  ·  head 탐색 방법론 재설계  ·  proxy 지표 재검증</a:t>
-            </a:r>
-          </a:p>
-        </p:txBody>
-      </p:sp>
-      <p:sp>
-        <p:nvSpPr>
-          <p:cNvPr id="7" name="TextBox 6"/>
-          <p:cNvSpPr txBox="1"/>
-          <p:nvPr/>
-        </p:nvSpPr>
-        <p:spPr>
-          <a:xfrm>
-            <a:off x="640080" y="5943600"/>
-            <a:ext cx="10058400" cy="365760"/>
-          </a:xfrm>
-          <a:prstGeom prst="rect">
-            <a:avLst/>
-          </a:prstGeom>
-          <a:noFill/>
-        </p:spPr>
-        <p:txBody>
-          <a:bodyPr wrap="square" lIns="0" tIns="0" rIns="0" bIns="0">
-            <a:spAutoFit/>
-          </a:bodyPr>
-          <a:lstStyle/>
-          <a:p>
-            <a:pPr algn="l">
-              <a:lnSpc>
-                <a:spcPct val="125000"/>
-              </a:lnSpc>
-            </a:pPr>
-            <a:r>
-              <a:rPr sz="1150" b="0">
-                <a:solidFill>
-                  <a:srgbClr val="8B9099"/>
-                </a:solidFill>
-                <a:latin typeface="Consolas"/>
-                <a:ea typeface="Consolas"/>
-                <a:cs typeface="Consolas"/>
-              </a:rPr>
-              <a:t>1차 발표 07-28  ·  피드백 07-29  ·  대응 실험 07-29~31  ·  2차 발표 2026-08-19       원종빈</a:t>
+            <a:r>
+              <a:rPr lang="ko-KR" altLang="en-US" sz="1600" dirty="0">
+                <a:latin typeface="프리젠테이션 5 Medium" pitchFamily="2" charset="-127"/>
+                <a:ea typeface="프리젠테이션 5 Medium" pitchFamily="2" charset="-127"/>
+              </a:rPr>
+              <a:t>원종빈</a:t>
             </a:r>
           </a:p>
         </p:txBody>
       </p:sp>
     </p:spTree>
+    <p:extLst>
+      <p:ext uri="{BB962C8B-B14F-4D97-AF65-F5344CB8AC3E}">
+        <p14:creationId xmlns:p14="http://schemas.microsoft.com/office/powerpoint/2010/main" val="3270782358"/>
+      </p:ext>
+    </p:extLst>
   </p:cSld>
   <p:clrMapOvr>
     <a:masterClrMapping/>
@@ -20542,12 +20221,18 @@
 </p:sld>
 </file>
 
-<file path=ppt/slides/slide6.xml><?xml version="1.0" encoding="utf-8"?>
+<file path=ppt/slides/slide5.xml><?xml version="1.0" encoding="utf-8"?>
 <p:sld xmlns:a="http://schemas.openxmlformats.org/drawingml/2006/main" xmlns:r="http://schemas.openxmlformats.org/officeDocument/2006/relationships" xmlns:p="http://schemas.openxmlformats.org/presentationml/2006/main">
   <p:cSld>
     <p:spTree>
       <p:nvGrpSpPr>
-        <p:cNvPr id="1" name=""/>
+        <p:cNvPr id="1" name="">
+          <a:extLst>
+            <a:ext uri="{FF2B5EF4-FFF2-40B4-BE49-F238E27FC236}">
+              <a16:creationId xmlns:a16="http://schemas.microsoft.com/office/drawing/2014/main" id="{073D78F2-5014-4F22-6A28-9B6CA957B4C8}"/>
+            </a:ext>
+          </a:extLst>
+        </p:cNvPr>
         <p:cNvGrpSpPr/>
         <p:nvPr/>
       </p:nvGrpSpPr>
@@ -20561,59 +20246,133 @@
       </p:grpSpPr>
       <p:sp>
         <p:nvSpPr>
-          <p:cNvPr id="2" name="Rectangle 1"/>
-          <p:cNvSpPr/>
-          <p:nvPr/>
+          <p:cNvPr id="2" name="제목 1">
+            <a:extLst>
+              <a:ext uri="{FF2B5EF4-FFF2-40B4-BE49-F238E27FC236}">
+                <a16:creationId xmlns:a16="http://schemas.microsoft.com/office/drawing/2014/main" id="{22D1AB6D-260C-ABC6-7FAB-87259C5AC458}"/>
+              </a:ext>
+            </a:extLst>
+          </p:cNvPr>
+          <p:cNvSpPr>
+            <a:spLocks noGrp="1"/>
+          </p:cNvSpPr>
+          <p:nvPr>
+            <p:ph type="title" idx="100"/>
+          </p:nvPr>
         </p:nvSpPr>
-        <p:spPr>
-          <a:xfrm>
-            <a:off x="0" y="0"/>
-            <a:ext cx="12188952" cy="6858000"/>
-          </a:xfrm>
-          <a:prstGeom prst="rect">
-            <a:avLst/>
-          </a:prstGeom>
-          <a:solidFill>
-            <a:srgbClr val="FFFFFF"/>
-          </a:solidFill>
-          <a:ln>
-            <a:noFill/>
-          </a:ln>
-          <a:effectLst/>
-        </p:spPr>
-        <p:style>
-          <a:lnRef idx="1">
-            <a:schemeClr val="accent1"/>
-          </a:lnRef>
-          <a:fillRef idx="3">
-            <a:schemeClr val="accent1"/>
-          </a:fillRef>
-          <a:effectRef idx="2">
-            <a:schemeClr val="accent1"/>
-          </a:effectRef>
-          <a:fontRef idx="minor">
-            <a:schemeClr val="lt1"/>
-          </a:fontRef>
-        </p:style>
+        <p:spPr/>
         <p:txBody>
-          <a:bodyPr rtlCol="0" anchor="ctr"/>
+          <a:bodyPr>
+            <a:normAutofit fontScale="90000"/>
+          </a:bodyPr>
           <a:lstStyle/>
           <a:p>
-            <a:pPr algn="ctr"/>
-            <a:endParaRPr/>
+            <a:r>
+              <a:rPr lang="ko-KR" altLang="en-US" sz="3600" dirty="0">
+                <a:latin typeface="프리젠테이션 5 Medium" pitchFamily="2" charset="-127"/>
+                <a:ea typeface="프리젠테이션 5 Medium" pitchFamily="2" charset="-127"/>
+              </a:rPr>
+              <a:t>이전 내용</a:t>
+            </a:r>
           </a:p>
         </p:txBody>
       </p:sp>
       <p:sp>
         <p:nvSpPr>
-          <p:cNvPr id="3" name="TextBox 2"/>
+          <p:cNvPr id="3" name="텍스트 개체 틀 2">
+            <a:extLst>
+              <a:ext uri="{FF2B5EF4-FFF2-40B4-BE49-F238E27FC236}">
+                <a16:creationId xmlns:a16="http://schemas.microsoft.com/office/drawing/2014/main" id="{6237DF72-2D17-D200-1493-5DC9A457AEB3}"/>
+              </a:ext>
+            </a:extLst>
+          </p:cNvPr>
+          <p:cNvSpPr>
+            <a:spLocks noGrp="1"/>
+          </p:cNvSpPr>
+          <p:nvPr>
+            <p:ph type="body" idx="101"/>
+          </p:nvPr>
+        </p:nvSpPr>
+        <p:spPr/>
+        <p:txBody>
+          <a:bodyPr/>
+          <a:lstStyle/>
+          <a:p>
+            <a:r>
+              <a:rPr lang="en-US" altLang="ko-KR" dirty="0">
+                <a:latin typeface="프리젠테이션 5 Medium" pitchFamily="2" charset="-127"/>
+                <a:ea typeface="프리젠테이션 5 Medium" pitchFamily="2" charset="-127"/>
+              </a:rPr>
+              <a:t>1</a:t>
+            </a:r>
+            <a:r>
+              <a:rPr lang="ko-KR" altLang="en-US" dirty="0">
+                <a:latin typeface="프리젠테이션 5 Medium" pitchFamily="2" charset="-127"/>
+                <a:ea typeface="프리젠테이션 5 Medium" pitchFamily="2" charset="-127"/>
+              </a:rPr>
+              <a:t>차 발표 요약 </a:t>
+            </a:r>
+            <a:r>
+              <a:rPr lang="en-US" altLang="ko-KR" dirty="0">
+                <a:latin typeface="프리젠테이션 5 Medium" pitchFamily="2" charset="-127"/>
+                <a:ea typeface="프리젠테이션 5 Medium" pitchFamily="2" charset="-127"/>
+              </a:rPr>
+              <a:t>— </a:t>
+            </a:r>
+            <a:r>
+              <a:rPr lang="ko-KR" altLang="en-US" dirty="0">
+                <a:latin typeface="프리젠테이션 5 Medium" pitchFamily="2" charset="-127"/>
+                <a:ea typeface="프리젠테이션 5 Medium" pitchFamily="2" charset="-127"/>
+              </a:rPr>
+              <a:t>가설 </a:t>
+            </a:r>
+            <a:r>
+              <a:rPr lang="en-US" altLang="ko-KR" dirty="0">
+                <a:latin typeface="프리젠테이션 5 Medium" pitchFamily="2" charset="-127"/>
+                <a:ea typeface="프리젠테이션 5 Medium" pitchFamily="2" charset="-127"/>
+              </a:rPr>
+              <a:t>· </a:t>
+            </a:r>
+            <a:r>
+              <a:rPr lang="ko-KR" altLang="en-US" dirty="0">
+                <a:latin typeface="프리젠테이션 5 Medium" pitchFamily="2" charset="-127"/>
+                <a:ea typeface="프리젠테이션 5 Medium" pitchFamily="2" charset="-127"/>
+              </a:rPr>
+              <a:t>개입 </a:t>
+            </a:r>
+            <a:r>
+              <a:rPr lang="en-US" altLang="ko-KR" dirty="0">
+                <a:latin typeface="프리젠테이션 5 Medium" pitchFamily="2" charset="-127"/>
+                <a:ea typeface="프리젠테이션 5 Medium" pitchFamily="2" charset="-127"/>
+              </a:rPr>
+              <a:t>· </a:t>
+            </a:r>
+            <a:r>
+              <a:rPr lang="ko-KR" altLang="en-US" dirty="0">
+                <a:latin typeface="프리젠테이션 5 Medium" pitchFamily="2" charset="-127"/>
+                <a:ea typeface="프리젠테이션 5 Medium" pitchFamily="2" charset="-127"/>
+              </a:rPr>
+              <a:t>그때의 결과</a:t>
+            </a:r>
+          </a:p>
+        </p:txBody>
+      </p:sp>
+      <p:sp>
+        <p:nvSpPr>
+          <p:cNvPr id="9" name="TextBox 8">
+            <a:extLst>
+              <a:ext uri="{FF2B5EF4-FFF2-40B4-BE49-F238E27FC236}">
+                <a16:creationId xmlns:a16="http://schemas.microsoft.com/office/drawing/2014/main" id="{9D684A8A-D965-C1D1-DAC8-3C08D97A990A}"/>
+              </a:ext>
+            </a:extLst>
+          </p:cNvPr>
           <p:cNvSpPr txBox="1"/>
           <p:nvPr/>
         </p:nvSpPr>
         <p:spPr>
           <a:xfrm>
-            <a:off x="640080" y="411480"/>
-            <a:ext cx="10908792" cy="365760"/>
+            <a:off x="3796146" y="1949678"/>
+            <a:ext cx="4599404" cy="215444"/>
           </a:xfrm>
           <a:prstGeom prst="rect">
             <a:avLst/>
@@ -20621,216 +20380,251 @@
           <a:noFill/>
         </p:spPr>
         <p:txBody>
-          <a:bodyPr wrap="square" lIns="0" tIns="0" rIns="0" bIns="0">
+          <a:bodyPr wrap="square" lIns="0" tIns="0" rIns="0" bIns="0" anchor="ctr">
             <a:spAutoFit/>
           </a:bodyPr>
           <a:lstStyle/>
           <a:p>
-            <a:pPr algn="l">
-              <a:lnSpc>
-                <a:spcPct val="125000"/>
-              </a:lnSpc>
-            </a:pPr>
-            <a:r>
-              <a:rPr sz="1200" b="1">
+            <a:pPr algn="ctr"/>
+            <a:r>
+              <a:rPr sz="1400" b="0" i="0" dirty="0">
+                <a:solidFill>
+                  <a:srgbClr val="565C66"/>
+                </a:solidFill>
+                <a:latin typeface="프리젠테이션 5 Medium" pitchFamily="2" charset="-127"/>
+                <a:ea typeface="프리젠테이션 5 Medium" pitchFamily="2" charset="-127"/>
+              </a:rPr>
+              <a:t>[</a:t>
+            </a:r>
+            <a:r>
+              <a:rPr sz="1400" b="0" i="0" dirty="0" err="1">
+                <a:solidFill>
+                  <a:srgbClr val="565C66"/>
+                </a:solidFill>
+                <a:latin typeface="프리젠테이션 5 Medium" pitchFamily="2" charset="-127"/>
+                <a:ea typeface="프리젠테이션 5 Medium" pitchFamily="2" charset="-127"/>
+              </a:rPr>
+              <a:t>정상</a:t>
+            </a:r>
+            <a:r>
+              <a:rPr sz="1400" b="0" i="0" dirty="0">
+                <a:solidFill>
+                  <a:srgbClr val="565C66"/>
+                </a:solidFill>
+                <a:latin typeface="프리젠테이션 5 Medium" pitchFamily="2" charset="-127"/>
+                <a:ea typeface="프리젠테이션 5 Medium" pitchFamily="2" charset="-127"/>
+              </a:rPr>
+              <a:t> </a:t>
+            </a:r>
+            <a:r>
+              <a:rPr sz="1400" b="0" i="0" dirty="0" err="1">
+                <a:solidFill>
+                  <a:srgbClr val="565C66"/>
+                </a:solidFill>
+                <a:latin typeface="프리젠테이션 5 Medium" pitchFamily="2" charset="-127"/>
+                <a:ea typeface="프리젠테이션 5 Medium" pitchFamily="2" charset="-127"/>
+              </a:rPr>
+              <a:t>지시</a:t>
+            </a:r>
+            <a:r>
+              <a:rPr sz="1400" b="0" i="0" dirty="0">
+                <a:solidFill>
+                  <a:srgbClr val="565C66"/>
+                </a:solidFill>
+                <a:latin typeface="프리젠테이션 5 Medium" pitchFamily="2" charset="-127"/>
+                <a:ea typeface="프리젠테이션 5 Medium" pitchFamily="2" charset="-127"/>
+              </a:rPr>
+              <a:t>] + [</a:t>
+            </a:r>
+            <a:r>
+              <a:rPr sz="1400" b="0" i="0" dirty="0" err="1">
+                <a:solidFill>
+                  <a:srgbClr val="565C66"/>
+                </a:solidFill>
+                <a:latin typeface="프리젠테이션 5 Medium" pitchFamily="2" charset="-127"/>
+                <a:ea typeface="프리젠테이션 5 Medium" pitchFamily="2" charset="-127"/>
+              </a:rPr>
+              <a:t>외부</a:t>
+            </a:r>
+            <a:r>
+              <a:rPr sz="1400" b="0" i="0" dirty="0">
+                <a:solidFill>
+                  <a:srgbClr val="565C66"/>
+                </a:solidFill>
+                <a:latin typeface="프리젠테이션 5 Medium" pitchFamily="2" charset="-127"/>
+                <a:ea typeface="프리젠테이션 5 Medium" pitchFamily="2" charset="-127"/>
+              </a:rPr>
+              <a:t> </a:t>
+            </a:r>
+            <a:r>
+              <a:rPr sz="1400" b="0" i="0" dirty="0" err="1">
+                <a:solidFill>
+                  <a:srgbClr val="565C66"/>
+                </a:solidFill>
+                <a:latin typeface="프리젠테이션 5 Medium" pitchFamily="2" charset="-127"/>
+                <a:ea typeface="프리젠테이션 5 Medium" pitchFamily="2" charset="-127"/>
+              </a:rPr>
+              <a:t>데이터</a:t>
+            </a:r>
+            <a:r>
+              <a:rPr sz="1400" b="0" i="0" dirty="0">
+                <a:solidFill>
+                  <a:srgbClr val="565C66"/>
+                </a:solidFill>
+                <a:latin typeface="프리젠테이션 5 Medium" pitchFamily="2" charset="-127"/>
+                <a:ea typeface="프리젠테이션 5 Medium" pitchFamily="2" charset="-127"/>
+              </a:rPr>
+              <a:t> </a:t>
+            </a:r>
+            <a:r>
+              <a:rPr sz="1400" b="0" i="0" dirty="0">
                 <a:solidFill>
                   <a:srgbClr val="C06A1F"/>
                 </a:solidFill>
-                <a:latin typeface="Consolas"/>
-                <a:ea typeface="Consolas"/>
-                <a:cs typeface="Consolas"/>
-              </a:rPr>
-              <a:t>01 · 이전 내용</a:t>
-            </a:r>
+                <a:latin typeface="프리젠테이션 5 Medium" pitchFamily="2" charset="-127"/>
+                <a:ea typeface="프리젠테이션 5 Medium" pitchFamily="2" charset="-127"/>
+              </a:rPr>
+              <a:t>(</a:t>
+            </a:r>
+            <a:r>
+              <a:rPr sz="1400" b="0" i="0" dirty="0" err="1">
+                <a:solidFill>
+                  <a:srgbClr val="C06A1F"/>
+                </a:solidFill>
+                <a:latin typeface="프리젠테이션 5 Medium" pitchFamily="2" charset="-127"/>
+                <a:ea typeface="프리젠테이션 5 Medium" pitchFamily="2" charset="-127"/>
+              </a:rPr>
+              <a:t>공격자</a:t>
+            </a:r>
+            <a:r>
+              <a:rPr sz="1400" b="0" i="0" dirty="0">
+                <a:solidFill>
+                  <a:srgbClr val="C06A1F"/>
+                </a:solidFill>
+                <a:latin typeface="프리젠테이션 5 Medium" pitchFamily="2" charset="-127"/>
+                <a:ea typeface="프리젠테이션 5 Medium" pitchFamily="2" charset="-127"/>
+              </a:rPr>
+              <a:t> </a:t>
+            </a:r>
+            <a:r>
+              <a:rPr sz="1400" b="0" i="0" dirty="0" err="1">
+                <a:solidFill>
+                  <a:srgbClr val="C06A1F"/>
+                </a:solidFill>
+                <a:latin typeface="프리젠테이션 5 Medium" pitchFamily="2" charset="-127"/>
+                <a:ea typeface="프리젠테이션 5 Medium" pitchFamily="2" charset="-127"/>
+              </a:rPr>
+              <a:t>명령</a:t>
+            </a:r>
+            <a:r>
+              <a:rPr sz="1400" b="0" i="0" dirty="0">
+                <a:solidFill>
+                  <a:srgbClr val="C06A1F"/>
+                </a:solidFill>
+                <a:latin typeface="프리젠테이션 5 Medium" pitchFamily="2" charset="-127"/>
+                <a:ea typeface="프리젠테이션 5 Medium" pitchFamily="2" charset="-127"/>
+              </a:rPr>
+              <a:t> </a:t>
+            </a:r>
+            <a:r>
+              <a:rPr sz="1400" b="0" i="0" dirty="0" err="1">
+                <a:solidFill>
+                  <a:srgbClr val="C06A1F"/>
+                </a:solidFill>
+                <a:latin typeface="프리젠테이션 5 Medium" pitchFamily="2" charset="-127"/>
+                <a:ea typeface="프리젠테이션 5 Medium" pitchFamily="2" charset="-127"/>
+              </a:rPr>
+              <a:t>삽입</a:t>
+            </a:r>
+            <a:r>
+              <a:rPr sz="1400" b="0" i="0" dirty="0">
+                <a:solidFill>
+                  <a:srgbClr val="C06A1F"/>
+                </a:solidFill>
+                <a:latin typeface="프리젠테이션 5 Medium" pitchFamily="2" charset="-127"/>
+                <a:ea typeface="프리젠테이션 5 Medium" pitchFamily="2" charset="-127"/>
+              </a:rPr>
+              <a:t>)</a:t>
+            </a:r>
+            <a:r>
+              <a:rPr sz="1400" b="0" i="0" dirty="0">
+                <a:solidFill>
+                  <a:srgbClr val="565C66"/>
+                </a:solidFill>
+                <a:latin typeface="프리젠테이션 5 Medium" pitchFamily="2" charset="-127"/>
+                <a:ea typeface="프리젠테이션 5 Medium" pitchFamily="2" charset="-127"/>
+              </a:rPr>
+              <a:t>] → </a:t>
+            </a:r>
+            <a:r>
+              <a:rPr sz="1400" b="1" i="0" dirty="0">
+                <a:solidFill>
+                  <a:srgbClr val="16181D"/>
+                </a:solidFill>
+                <a:latin typeface="프리젠테이션 5 Medium" pitchFamily="2" charset="-127"/>
+                <a:ea typeface="프리젠테이션 5 Medium" pitchFamily="2" charset="-127"/>
+              </a:rPr>
+              <a:t>LLM</a:t>
+            </a:r>
+            <a:r>
+              <a:rPr sz="1400" b="0" i="0" dirty="0">
+                <a:solidFill>
+                  <a:srgbClr val="565C66"/>
+                </a:solidFill>
+                <a:latin typeface="프리젠테이션 5 Medium" pitchFamily="2" charset="-127"/>
+                <a:ea typeface="프리젠테이션 5 Medium" pitchFamily="2" charset="-127"/>
+              </a:rPr>
+              <a:t> → </a:t>
+            </a:r>
+            <a:r>
+              <a:rPr sz="1400" b="0" i="0" dirty="0" err="1">
+                <a:solidFill>
+                  <a:srgbClr val="C1442A"/>
+                </a:solidFill>
+                <a:latin typeface="프리젠테이션 5 Medium" pitchFamily="2" charset="-127"/>
+                <a:ea typeface="프리젠테이션 5 Medium" pitchFamily="2" charset="-127"/>
+              </a:rPr>
+              <a:t>공격</a:t>
+            </a:r>
+            <a:r>
+              <a:rPr sz="1400" b="0" i="0" dirty="0">
+                <a:solidFill>
+                  <a:srgbClr val="C1442A"/>
+                </a:solidFill>
+                <a:latin typeface="프리젠테이션 5 Medium" pitchFamily="2" charset="-127"/>
+                <a:ea typeface="프리젠테이션 5 Medium" pitchFamily="2" charset="-127"/>
+              </a:rPr>
+              <a:t> </a:t>
+            </a:r>
+            <a:r>
+              <a:rPr sz="1400" b="0" i="0" dirty="0" err="1">
+                <a:solidFill>
+                  <a:srgbClr val="C1442A"/>
+                </a:solidFill>
+                <a:latin typeface="프리젠테이션 5 Medium" pitchFamily="2" charset="-127"/>
+                <a:ea typeface="프리젠테이션 5 Medium" pitchFamily="2" charset="-127"/>
+              </a:rPr>
+              <a:t>실행</a:t>
+            </a:r>
+            <a:endParaRPr sz="1400" b="0" i="0" dirty="0">
+              <a:solidFill>
+                <a:srgbClr val="C1442A"/>
+              </a:solidFill>
+              <a:latin typeface="프리젠테이션 5 Medium" pitchFamily="2" charset="-127"/>
+              <a:ea typeface="프리젠테이션 5 Medium" pitchFamily="2" charset="-127"/>
+            </a:endParaRPr>
           </a:p>
         </p:txBody>
       </p:sp>
       <p:sp>
         <p:nvSpPr>
-          <p:cNvPr id="4" name="TextBox 3"/>
-          <p:cNvSpPr txBox="1"/>
-          <p:nvPr/>
-        </p:nvSpPr>
-        <p:spPr>
-          <a:xfrm>
-            <a:off x="640080" y="777240"/>
-            <a:ext cx="10908792" cy="822960"/>
-          </a:xfrm>
-          <a:prstGeom prst="rect">
-            <a:avLst/>
-          </a:prstGeom>
-          <a:noFill/>
-        </p:spPr>
-        <p:txBody>
-          <a:bodyPr wrap="square" lIns="0" tIns="0" rIns="0" bIns="0">
-            <a:spAutoFit/>
-          </a:bodyPr>
-          <a:lstStyle/>
-          <a:p>
-            <a:pPr algn="l">
-              <a:lnSpc>
-                <a:spcPct val="110000"/>
-              </a:lnSpc>
-            </a:pPr>
-            <a:r>
-              <a:rPr sz="2600" b="1">
-                <a:solidFill>
-                  <a:srgbClr val="16181D"/>
-                </a:solidFill>
-                <a:latin typeface="Malgun Gothic"/>
-                <a:ea typeface="Malgun Gothic"/>
-                <a:cs typeface="Malgun Gothic"/>
-              </a:rPr>
-              <a:t>1차 발표 요약 — 가설 · 개입 · 그때의 결과</a:t>
-            </a:r>
-          </a:p>
-        </p:txBody>
-      </p:sp>
-      <p:sp>
-        <p:nvSpPr>
-          <p:cNvPr id="5" name="Rounded Rectangle 4"/>
-          <p:cNvSpPr/>
-          <p:nvPr/>
-        </p:nvSpPr>
-        <p:spPr>
-          <a:xfrm>
-            <a:off x="640080" y="1572768"/>
-            <a:ext cx="10908792" cy="731520"/>
-          </a:xfrm>
-          <a:prstGeom prst="roundRect">
-            <a:avLst>
-              <a:gd name="adj" fmla="val 9000"/>
-            </a:avLst>
-          </a:prstGeom>
-          <a:solidFill>
-            <a:srgbClr val="F2F2F4"/>
-          </a:solidFill>
-          <a:ln>
-            <a:noFill/>
-          </a:ln>
-          <a:effectLst/>
-        </p:spPr>
-        <p:style>
-          <a:lnRef idx="1">
-            <a:schemeClr val="accent1"/>
-          </a:lnRef>
-          <a:fillRef idx="3">
-            <a:schemeClr val="accent1"/>
-          </a:fillRef>
-          <a:effectRef idx="2">
-            <a:schemeClr val="accent1"/>
-          </a:effectRef>
-          <a:fontRef idx="minor">
-            <a:schemeClr val="lt1"/>
-          </a:fontRef>
-        </p:style>
-        <p:txBody>
-          <a:bodyPr rtlCol="0" anchor="ctr"/>
-          <a:lstStyle/>
-          <a:p>
-            <a:endParaRPr/>
-          </a:p>
-        </p:txBody>
-      </p:sp>
-      <p:sp>
-        <p:nvSpPr>
-          <p:cNvPr id="6" name="TextBox 5"/>
-          <p:cNvSpPr txBox="1"/>
-          <p:nvPr/>
-        </p:nvSpPr>
-        <p:spPr>
-          <a:xfrm>
-            <a:off x="914400" y="1764792"/>
-            <a:ext cx="10332720" cy="411480"/>
-          </a:xfrm>
-          <a:prstGeom prst="rect">
-            <a:avLst/>
-          </a:prstGeom>
-          <a:noFill/>
-        </p:spPr>
-        <p:txBody>
-          <a:bodyPr wrap="square" lIns="0" tIns="0" rIns="0" bIns="0">
-            <a:spAutoFit/>
-          </a:bodyPr>
-          <a:lstStyle/>
-          <a:p>
-            <a:pPr algn="l">
-              <a:lnSpc>
-                <a:spcPct val="125000"/>
-              </a:lnSpc>
-            </a:pPr>
-            <a:r>
-              <a:rPr sz="1300" b="0">
-                <a:solidFill>
-                  <a:srgbClr val="565C66"/>
-                </a:solidFill>
-                <a:latin typeface="Consolas"/>
-                <a:ea typeface="Consolas"/>
-                <a:cs typeface="Consolas"/>
-              </a:rPr>
-              <a:t>[정상 지시] + [외부 데이터 </a:t>
-            </a:r>
-            <a:r>
-              <a:rPr sz="1300" b="0">
-                <a:solidFill>
-                  <a:srgbClr val="C06A1F"/>
-                </a:solidFill>
-                <a:latin typeface="Consolas"/>
-                <a:ea typeface="Consolas"/>
-                <a:cs typeface="Consolas"/>
-              </a:rPr>
-              <a:t>(공격자 명령 삽입)</a:t>
-            </a:r>
-            <a:r>
-              <a:rPr sz="1300" b="0">
-                <a:solidFill>
-                  <a:srgbClr val="565C66"/>
-                </a:solidFill>
-                <a:latin typeface="Consolas"/>
-                <a:ea typeface="Consolas"/>
-                <a:cs typeface="Consolas"/>
-              </a:rPr>
-              <a:t>] → </a:t>
-            </a:r>
-            <a:r>
-              <a:rPr sz="1300" b="1">
-                <a:solidFill>
-                  <a:srgbClr val="16181D"/>
-                </a:solidFill>
-                <a:latin typeface="Consolas"/>
-                <a:ea typeface="Consolas"/>
-                <a:cs typeface="Consolas"/>
-              </a:rPr>
-              <a:t>LLM</a:t>
-            </a:r>
-            <a:r>
-              <a:rPr sz="1300" b="0">
-                <a:solidFill>
-                  <a:srgbClr val="565C66"/>
-                </a:solidFill>
-                <a:latin typeface="Consolas"/>
-                <a:ea typeface="Consolas"/>
-                <a:cs typeface="Consolas"/>
-              </a:rPr>
-              <a:t> → </a:t>
-            </a:r>
-            <a:r>
-              <a:rPr sz="1300" b="0">
-                <a:solidFill>
-                  <a:srgbClr val="C1442A"/>
-                </a:solidFill>
-                <a:latin typeface="Consolas"/>
-                <a:ea typeface="Consolas"/>
-                <a:cs typeface="Consolas"/>
-              </a:rPr>
-              <a:t>공격 실행</a:t>
-            </a:r>
-          </a:p>
-        </p:txBody>
-      </p:sp>
-      <p:sp>
-        <p:nvSpPr>
-          <p:cNvPr id="7" name="Rounded Rectangle 6"/>
+          <p:cNvPr id="5" name="Rounded Rectangle 6">
+            <a:extLst>
+              <a:ext uri="{FF2B5EF4-FFF2-40B4-BE49-F238E27FC236}">
+                <a16:creationId xmlns:a16="http://schemas.microsoft.com/office/drawing/2014/main" id="{B0442E96-98ED-E09A-AA65-200C13D80439}"/>
+              </a:ext>
+            </a:extLst>
+          </p:cNvPr>
           <p:cNvSpPr/>
           <p:nvPr/>
         </p:nvSpPr>
@@ -20870,20 +20664,29 @@
           <a:bodyPr rtlCol="0" anchor="ctr"/>
           <a:lstStyle/>
           <a:p>
-            <a:endParaRPr/>
+            <a:endParaRPr>
+              <a:latin typeface="프리젠테이션 5 Medium" pitchFamily="2" charset="-127"/>
+              <a:ea typeface="프리젠테이션 5 Medium" pitchFamily="2" charset="-127"/>
+            </a:endParaRPr>
           </a:p>
         </p:txBody>
       </p:sp>
       <p:sp>
         <p:nvSpPr>
-          <p:cNvPr id="8" name="TextBox 7"/>
+          <p:cNvPr id="7" name="TextBox 6">
+            <a:extLst>
+              <a:ext uri="{FF2B5EF4-FFF2-40B4-BE49-F238E27FC236}">
+                <a16:creationId xmlns:a16="http://schemas.microsoft.com/office/drawing/2014/main" id="{00E86DF1-D05A-BDF5-936B-B1B7CEF36E14}"/>
+              </a:ext>
+            </a:extLst>
+          </p:cNvPr>
           <p:cNvSpPr txBox="1"/>
           <p:nvPr/>
         </p:nvSpPr>
         <p:spPr>
           <a:xfrm>
             <a:off x="868680" y="2670048"/>
-            <a:ext cx="4864608" cy="868680"/>
+            <a:ext cx="4864608" cy="664734"/>
           </a:xfrm>
           <a:prstGeom prst="rect">
             <a:avLst/>
@@ -20898,47 +20701,314 @@
           <a:p>
             <a:pPr algn="l">
               <a:lnSpc>
-                <a:spcPct val="115000"/>
+                <a:spcPct val="150000"/>
               </a:lnSpc>
             </a:pPr>
             <a:r>
-              <a:rPr sz="1350" b="1">
+              <a:rPr sz="1600" b="1" dirty="0" err="1">
                 <a:solidFill>
                   <a:srgbClr val="2F6FCE"/>
                 </a:solidFill>
-                <a:latin typeface="Malgun Gothic"/>
-                <a:ea typeface="Malgun Gothic"/>
+                <a:latin typeface="프리젠테이션 5 Medium" pitchFamily="2" charset="-127"/>
+                <a:ea typeface="프리젠테이션 5 Medium" pitchFamily="2" charset="-127"/>
                 <a:cs typeface="Malgun Gothic"/>
               </a:rPr>
-              <a:t>가설 — Read Head ≠ Control Head</a:t>
+              <a:t>가설</a:t>
+            </a:r>
+            <a:r>
+              <a:rPr sz="1600" b="1" dirty="0">
+                <a:solidFill>
+                  <a:srgbClr val="2F6FCE"/>
+                </a:solidFill>
+                <a:latin typeface="프리젠테이션 5 Medium" pitchFamily="2" charset="-127"/>
+                <a:ea typeface="프리젠테이션 5 Medium" pitchFamily="2" charset="-127"/>
+                <a:cs typeface="Malgun Gothic"/>
+              </a:rPr>
+              <a:t> — Read Head ≠ Control Head</a:t>
             </a:r>
           </a:p>
           <a:p>
             <a:pPr algn="l">
               <a:lnSpc>
-                <a:spcPct val="125000"/>
+                <a:spcPct val="150000"/>
               </a:lnSpc>
               <a:spcBef>
                 <a:spcPts val="400"/>
               </a:spcBef>
             </a:pPr>
             <a:r>
-              <a:rPr sz="1150" b="0">
+              <a:rPr sz="1200" b="0" dirty="0" err="1">
                 <a:solidFill>
                   <a:srgbClr val="565C66"/>
                 </a:solidFill>
-                <a:latin typeface="Malgun Gothic"/>
-                <a:ea typeface="Malgun Gothic"/>
+                <a:latin typeface="프리젠테이션 5 Medium" pitchFamily="2" charset="-127"/>
+                <a:ea typeface="프리젠테이션 5 Medium" pitchFamily="2" charset="-127"/>
                 <a:cs typeface="Malgun Gothic"/>
               </a:rPr>
-              <a:t>외부 데이터의 내용을 읽는 head와, 그 속의 명령을 실행에 옮기는 head가 분리되어 있다</a:t>
-            </a:r>
+              <a:t>외부</a:t>
+            </a:r>
+            <a:r>
+              <a:rPr sz="1200" b="0" dirty="0">
+                <a:solidFill>
+                  <a:srgbClr val="565C66"/>
+                </a:solidFill>
+                <a:latin typeface="프리젠테이션 5 Medium" pitchFamily="2" charset="-127"/>
+                <a:ea typeface="프리젠테이션 5 Medium" pitchFamily="2" charset="-127"/>
+                <a:cs typeface="Malgun Gothic"/>
+              </a:rPr>
+              <a:t> </a:t>
+            </a:r>
+            <a:r>
+              <a:rPr sz="1200" b="0" dirty="0" err="1">
+                <a:solidFill>
+                  <a:srgbClr val="565C66"/>
+                </a:solidFill>
+                <a:latin typeface="프리젠테이션 5 Medium" pitchFamily="2" charset="-127"/>
+                <a:ea typeface="프리젠테이션 5 Medium" pitchFamily="2" charset="-127"/>
+                <a:cs typeface="Malgun Gothic"/>
+              </a:rPr>
+              <a:t>데이터의</a:t>
+            </a:r>
+            <a:r>
+              <a:rPr sz="1200" b="0" dirty="0">
+                <a:solidFill>
+                  <a:srgbClr val="565C66"/>
+                </a:solidFill>
+                <a:latin typeface="프리젠테이션 5 Medium" pitchFamily="2" charset="-127"/>
+                <a:ea typeface="프리젠테이션 5 Medium" pitchFamily="2" charset="-127"/>
+                <a:cs typeface="Malgun Gothic"/>
+              </a:rPr>
+              <a:t> </a:t>
+            </a:r>
+            <a:r>
+              <a:rPr sz="1200" b="0" dirty="0" err="1">
+                <a:solidFill>
+                  <a:srgbClr val="565C66"/>
+                </a:solidFill>
+                <a:latin typeface="프리젠테이션 5 Medium" pitchFamily="2" charset="-127"/>
+                <a:ea typeface="프리젠테이션 5 Medium" pitchFamily="2" charset="-127"/>
+                <a:cs typeface="Malgun Gothic"/>
+              </a:rPr>
+              <a:t>내용을</a:t>
+            </a:r>
+            <a:r>
+              <a:rPr sz="1200" b="0" dirty="0">
+                <a:solidFill>
+                  <a:srgbClr val="565C66"/>
+                </a:solidFill>
+                <a:latin typeface="프리젠테이션 5 Medium" pitchFamily="2" charset="-127"/>
+                <a:ea typeface="프리젠테이션 5 Medium" pitchFamily="2" charset="-127"/>
+                <a:cs typeface="Malgun Gothic"/>
+              </a:rPr>
+              <a:t> </a:t>
+            </a:r>
+            <a:r>
+              <a:rPr sz="1200" b="0" dirty="0" err="1">
+                <a:solidFill>
+                  <a:srgbClr val="565C66"/>
+                </a:solidFill>
+                <a:latin typeface="프리젠테이션 5 Medium" pitchFamily="2" charset="-127"/>
+                <a:ea typeface="프리젠테이션 5 Medium" pitchFamily="2" charset="-127"/>
+                <a:cs typeface="Malgun Gothic"/>
+              </a:rPr>
+              <a:t>읽는</a:t>
+            </a:r>
+            <a:r>
+              <a:rPr sz="1200" b="0" dirty="0">
+                <a:solidFill>
+                  <a:srgbClr val="565C66"/>
+                </a:solidFill>
+                <a:latin typeface="프리젠테이션 5 Medium" pitchFamily="2" charset="-127"/>
+                <a:ea typeface="프리젠테이션 5 Medium" pitchFamily="2" charset="-127"/>
+                <a:cs typeface="Malgun Gothic"/>
+              </a:rPr>
+              <a:t> </a:t>
+            </a:r>
+            <a:r>
+              <a:rPr sz="1200" b="0" dirty="0" err="1">
+                <a:solidFill>
+                  <a:srgbClr val="565C66"/>
+                </a:solidFill>
+                <a:latin typeface="프리젠테이션 5 Medium" pitchFamily="2" charset="-127"/>
+                <a:ea typeface="프리젠테이션 5 Medium" pitchFamily="2" charset="-127"/>
+                <a:cs typeface="Malgun Gothic"/>
+              </a:rPr>
+              <a:t>head와</a:t>
+            </a:r>
+            <a:r>
+              <a:rPr sz="1200" b="0" dirty="0">
+                <a:solidFill>
+                  <a:srgbClr val="565C66"/>
+                </a:solidFill>
+                <a:latin typeface="프리젠테이션 5 Medium" pitchFamily="2" charset="-127"/>
+                <a:ea typeface="프리젠테이션 5 Medium" pitchFamily="2" charset="-127"/>
+                <a:cs typeface="Malgun Gothic"/>
+              </a:rPr>
+              <a:t>, 그 </a:t>
+            </a:r>
+            <a:r>
+              <a:rPr sz="1200" b="0" dirty="0" err="1">
+                <a:solidFill>
+                  <a:srgbClr val="565C66"/>
+                </a:solidFill>
+                <a:latin typeface="프리젠테이션 5 Medium" pitchFamily="2" charset="-127"/>
+                <a:ea typeface="프리젠테이션 5 Medium" pitchFamily="2" charset="-127"/>
+                <a:cs typeface="Malgun Gothic"/>
+              </a:rPr>
+              <a:t>속의</a:t>
+            </a:r>
+            <a:r>
+              <a:rPr sz="1200" b="0" dirty="0">
+                <a:solidFill>
+                  <a:srgbClr val="565C66"/>
+                </a:solidFill>
+                <a:latin typeface="프리젠테이션 5 Medium" pitchFamily="2" charset="-127"/>
+                <a:ea typeface="프리젠테이션 5 Medium" pitchFamily="2" charset="-127"/>
+                <a:cs typeface="Malgun Gothic"/>
+              </a:rPr>
+              <a:t> </a:t>
+            </a:r>
+            <a:r>
+              <a:rPr sz="1200" b="0" dirty="0" err="1">
+                <a:solidFill>
+                  <a:srgbClr val="565C66"/>
+                </a:solidFill>
+                <a:latin typeface="프리젠테이션 5 Medium" pitchFamily="2" charset="-127"/>
+                <a:ea typeface="프리젠테이션 5 Medium" pitchFamily="2" charset="-127"/>
+                <a:cs typeface="Malgun Gothic"/>
+              </a:rPr>
+              <a:t>명령을</a:t>
+            </a:r>
+            <a:r>
+              <a:rPr sz="1200" b="0" dirty="0">
+                <a:solidFill>
+                  <a:srgbClr val="565C66"/>
+                </a:solidFill>
+                <a:latin typeface="프리젠테이션 5 Medium" pitchFamily="2" charset="-127"/>
+                <a:ea typeface="프리젠테이션 5 Medium" pitchFamily="2" charset="-127"/>
+                <a:cs typeface="Malgun Gothic"/>
+              </a:rPr>
+              <a:t> </a:t>
+            </a:r>
+            <a:r>
+              <a:rPr sz="1200" b="0" dirty="0" err="1">
+                <a:solidFill>
+                  <a:srgbClr val="565C66"/>
+                </a:solidFill>
+                <a:latin typeface="프리젠테이션 5 Medium" pitchFamily="2" charset="-127"/>
+                <a:ea typeface="프리젠테이션 5 Medium" pitchFamily="2" charset="-127"/>
+                <a:cs typeface="Malgun Gothic"/>
+              </a:rPr>
+              <a:t>실행에</a:t>
+            </a:r>
+            <a:r>
+              <a:rPr sz="1200" b="0" dirty="0">
+                <a:solidFill>
+                  <a:srgbClr val="565C66"/>
+                </a:solidFill>
+                <a:latin typeface="프리젠테이션 5 Medium" pitchFamily="2" charset="-127"/>
+                <a:ea typeface="프리젠테이션 5 Medium" pitchFamily="2" charset="-127"/>
+                <a:cs typeface="Malgun Gothic"/>
+              </a:rPr>
+              <a:t> </a:t>
+            </a:r>
+            <a:r>
+              <a:rPr sz="1200" b="0" dirty="0" err="1">
+                <a:solidFill>
+                  <a:srgbClr val="565C66"/>
+                </a:solidFill>
+                <a:latin typeface="프리젠테이션 5 Medium" pitchFamily="2" charset="-127"/>
+                <a:ea typeface="프리젠테이션 5 Medium" pitchFamily="2" charset="-127"/>
+                <a:cs typeface="Malgun Gothic"/>
+              </a:rPr>
+              <a:t>옮기는</a:t>
+            </a:r>
+            <a:r>
+              <a:rPr sz="1200" b="0" dirty="0">
+                <a:solidFill>
+                  <a:srgbClr val="565C66"/>
+                </a:solidFill>
+                <a:latin typeface="프리젠테이션 5 Medium" pitchFamily="2" charset="-127"/>
+                <a:ea typeface="프리젠테이션 5 Medium" pitchFamily="2" charset="-127"/>
+                <a:cs typeface="Malgun Gothic"/>
+              </a:rPr>
+              <a:t> </a:t>
+            </a:r>
+            <a:r>
+              <a:rPr sz="1200" b="0" dirty="0" err="1">
+                <a:solidFill>
+                  <a:srgbClr val="565C66"/>
+                </a:solidFill>
+                <a:latin typeface="프리젠테이션 5 Medium" pitchFamily="2" charset="-127"/>
+                <a:ea typeface="프리젠테이션 5 Medium" pitchFamily="2" charset="-127"/>
+                <a:cs typeface="Malgun Gothic"/>
+              </a:rPr>
+              <a:t>head가</a:t>
+            </a:r>
+            <a:r>
+              <a:rPr sz="1200" b="0" dirty="0">
+                <a:solidFill>
+                  <a:srgbClr val="565C66"/>
+                </a:solidFill>
+                <a:latin typeface="프리젠테이션 5 Medium" pitchFamily="2" charset="-127"/>
+                <a:ea typeface="프리젠테이션 5 Medium" pitchFamily="2" charset="-127"/>
+                <a:cs typeface="Malgun Gothic"/>
+              </a:rPr>
+              <a:t> </a:t>
+            </a:r>
+            <a:r>
+              <a:rPr sz="1200" b="0" dirty="0" err="1">
+                <a:solidFill>
+                  <a:srgbClr val="565C66"/>
+                </a:solidFill>
+                <a:latin typeface="프리젠테이션 5 Medium" pitchFamily="2" charset="-127"/>
+                <a:ea typeface="프리젠테이션 5 Medium" pitchFamily="2" charset="-127"/>
+                <a:cs typeface="Malgun Gothic"/>
+              </a:rPr>
+              <a:t>분리되어</a:t>
+            </a:r>
+            <a:r>
+              <a:rPr sz="1200" b="0" dirty="0">
+                <a:solidFill>
+                  <a:srgbClr val="565C66"/>
+                </a:solidFill>
+                <a:latin typeface="프리젠테이션 5 Medium" pitchFamily="2" charset="-127"/>
+                <a:ea typeface="프리젠테이션 5 Medium" pitchFamily="2" charset="-127"/>
+                <a:cs typeface="Malgun Gothic"/>
+              </a:rPr>
+              <a:t> </a:t>
+            </a:r>
+            <a:r>
+              <a:rPr sz="1200" b="0" dirty="0" err="1">
+                <a:solidFill>
+                  <a:srgbClr val="565C66"/>
+                </a:solidFill>
+                <a:latin typeface="프리젠테이션 5 Medium" pitchFamily="2" charset="-127"/>
+                <a:ea typeface="프리젠테이션 5 Medium" pitchFamily="2" charset="-127"/>
+                <a:cs typeface="Malgun Gothic"/>
+              </a:rPr>
+              <a:t>있다</a:t>
+            </a:r>
+            <a:endParaRPr sz="1200" b="0" dirty="0">
+              <a:solidFill>
+                <a:srgbClr val="565C66"/>
+              </a:solidFill>
+              <a:latin typeface="프리젠테이션 5 Medium" pitchFamily="2" charset="-127"/>
+              <a:ea typeface="프리젠테이션 5 Medium" pitchFamily="2" charset="-127"/>
+              <a:cs typeface="Malgun Gothic"/>
+            </a:endParaRPr>
           </a:p>
         </p:txBody>
       </p:sp>
       <p:sp>
         <p:nvSpPr>
-          <p:cNvPr id="9" name="Rounded Rectangle 8"/>
+          <p:cNvPr id="10" name="Rounded Rectangle 8">
+            <a:extLst>
+              <a:ext uri="{FF2B5EF4-FFF2-40B4-BE49-F238E27FC236}">
+                <a16:creationId xmlns:a16="http://schemas.microsoft.com/office/drawing/2014/main" id="{438D0DCA-727C-02F6-B009-AD8A7912A8EF}"/>
+              </a:ext>
+            </a:extLst>
+          </p:cNvPr>
           <p:cNvSpPr/>
           <p:nvPr/>
         </p:nvSpPr>
@@ -20978,20 +21048,29 @@
           <a:bodyPr rtlCol="0" anchor="ctr"/>
           <a:lstStyle/>
           <a:p>
-            <a:endParaRPr/>
+            <a:endParaRPr>
+              <a:latin typeface="프리젠테이션 5 Medium" pitchFamily="2" charset="-127"/>
+              <a:ea typeface="프리젠테이션 5 Medium" pitchFamily="2" charset="-127"/>
+            </a:endParaRPr>
           </a:p>
         </p:txBody>
       </p:sp>
       <p:sp>
         <p:nvSpPr>
-          <p:cNvPr id="10" name="TextBox 9"/>
+          <p:cNvPr id="12" name="TextBox 11">
+            <a:extLst>
+              <a:ext uri="{FF2B5EF4-FFF2-40B4-BE49-F238E27FC236}">
+                <a16:creationId xmlns:a16="http://schemas.microsoft.com/office/drawing/2014/main" id="{5A6A06FC-7D22-7A49-6AF1-ED729061F2E8}"/>
+              </a:ext>
+            </a:extLst>
+          </p:cNvPr>
           <p:cNvSpPr txBox="1"/>
           <p:nvPr/>
         </p:nvSpPr>
         <p:spPr>
           <a:xfrm>
             <a:off x="6455664" y="2670048"/>
-            <a:ext cx="4864608" cy="868680"/>
+            <a:ext cx="4969718" cy="664734"/>
           </a:xfrm>
           <a:prstGeom prst="rect">
             <a:avLst/>
@@ -21006,51 +21085,269 @@
           <a:p>
             <a:pPr algn="l">
               <a:lnSpc>
-                <a:spcPct val="115000"/>
+                <a:spcPct val="150000"/>
               </a:lnSpc>
             </a:pPr>
             <a:r>
-              <a:rPr sz="1350" b="1">
+              <a:rPr sz="1600" b="1" dirty="0" err="1">
                 <a:solidFill>
                   <a:srgbClr val="2F6FCE"/>
                 </a:solidFill>
-                <a:latin typeface="Malgun Gothic"/>
-                <a:ea typeface="Malgun Gothic"/>
+                <a:latin typeface="프리젠테이션 5 Medium" pitchFamily="2" charset="-127"/>
+                <a:ea typeface="프리젠테이션 5 Medium" pitchFamily="2" charset="-127"/>
                 <a:cs typeface="Malgun Gothic"/>
               </a:rPr>
-              <a:t>개입 — Edge Knockout</a:t>
+              <a:t>개입</a:t>
+            </a:r>
+            <a:r>
+              <a:rPr sz="1600" b="1" dirty="0">
+                <a:solidFill>
+                  <a:srgbClr val="2F6FCE"/>
+                </a:solidFill>
+                <a:latin typeface="프리젠테이션 5 Medium" pitchFamily="2" charset="-127"/>
+                <a:ea typeface="프리젠테이션 5 Medium" pitchFamily="2" charset="-127"/>
+                <a:cs typeface="Malgun Gothic"/>
+              </a:rPr>
+              <a:t> — Edge Knockout</a:t>
             </a:r>
           </a:p>
           <a:p>
             <a:pPr algn="l">
               <a:lnSpc>
-                <a:spcPct val="125000"/>
+                <a:spcPct val="150000"/>
               </a:lnSpc>
               <a:spcBef>
                 <a:spcPts val="400"/>
               </a:spcBef>
             </a:pPr>
             <a:r>
-              <a:rPr sz="1150" b="0">
+              <a:rPr sz="1200" b="0" dirty="0">
                 <a:solidFill>
                   <a:srgbClr val="565C66"/>
                 </a:solidFill>
-                <a:latin typeface="Malgun Gothic"/>
-                <a:ea typeface="Malgun Gothic"/>
+                <a:latin typeface="프리젠테이션 5 Medium" pitchFamily="2" charset="-127"/>
+                <a:ea typeface="프리젠테이션 5 Medium" pitchFamily="2" charset="-127"/>
                 <a:cs typeface="Malgun Gothic"/>
               </a:rPr>
-              <a:t>head 전체를 끄지 않고, 그 head의 D_inj 방향 attention edge만 pre-softmax에서 차단</a:t>
-            </a:r>
+              <a:t>head </a:t>
+            </a:r>
+            <a:r>
+              <a:rPr sz="1200" b="0" dirty="0" err="1">
+                <a:solidFill>
+                  <a:srgbClr val="565C66"/>
+                </a:solidFill>
+                <a:latin typeface="프리젠테이션 5 Medium" pitchFamily="2" charset="-127"/>
+                <a:ea typeface="프리젠테이션 5 Medium" pitchFamily="2" charset="-127"/>
+                <a:cs typeface="Malgun Gothic"/>
+              </a:rPr>
+              <a:t>전체를</a:t>
+            </a:r>
+            <a:r>
+              <a:rPr sz="1200" b="0" dirty="0">
+                <a:solidFill>
+                  <a:srgbClr val="565C66"/>
+                </a:solidFill>
+                <a:latin typeface="프리젠테이션 5 Medium" pitchFamily="2" charset="-127"/>
+                <a:ea typeface="프리젠테이션 5 Medium" pitchFamily="2" charset="-127"/>
+                <a:cs typeface="Malgun Gothic"/>
+              </a:rPr>
+              <a:t> </a:t>
+            </a:r>
+            <a:r>
+              <a:rPr sz="1200" b="0" dirty="0" err="1">
+                <a:solidFill>
+                  <a:srgbClr val="565C66"/>
+                </a:solidFill>
+                <a:latin typeface="프리젠테이션 5 Medium" pitchFamily="2" charset="-127"/>
+                <a:ea typeface="프리젠테이션 5 Medium" pitchFamily="2" charset="-127"/>
+                <a:cs typeface="Malgun Gothic"/>
+              </a:rPr>
+              <a:t>끄지</a:t>
+            </a:r>
+            <a:r>
+              <a:rPr sz="1200" b="0" dirty="0">
+                <a:solidFill>
+                  <a:srgbClr val="565C66"/>
+                </a:solidFill>
+                <a:latin typeface="프리젠테이션 5 Medium" pitchFamily="2" charset="-127"/>
+                <a:ea typeface="프리젠테이션 5 Medium" pitchFamily="2" charset="-127"/>
+                <a:cs typeface="Malgun Gothic"/>
+              </a:rPr>
+              <a:t> </a:t>
+            </a:r>
+            <a:r>
+              <a:rPr sz="1200" b="0" dirty="0" err="1">
+                <a:solidFill>
+                  <a:srgbClr val="565C66"/>
+                </a:solidFill>
+                <a:latin typeface="프리젠테이션 5 Medium" pitchFamily="2" charset="-127"/>
+                <a:ea typeface="프리젠테이션 5 Medium" pitchFamily="2" charset="-127"/>
+                <a:cs typeface="Malgun Gothic"/>
+              </a:rPr>
+              <a:t>않고</a:t>
+            </a:r>
+            <a:r>
+              <a:rPr sz="1200" b="0" dirty="0">
+                <a:solidFill>
+                  <a:srgbClr val="565C66"/>
+                </a:solidFill>
+                <a:latin typeface="프리젠테이션 5 Medium" pitchFamily="2" charset="-127"/>
+                <a:ea typeface="프리젠테이션 5 Medium" pitchFamily="2" charset="-127"/>
+                <a:cs typeface="Malgun Gothic"/>
+              </a:rPr>
+              <a:t>, 그 </a:t>
+            </a:r>
+            <a:r>
+              <a:rPr sz="1200" b="0" dirty="0" err="1">
+                <a:solidFill>
+                  <a:srgbClr val="565C66"/>
+                </a:solidFill>
+                <a:latin typeface="프리젠테이션 5 Medium" pitchFamily="2" charset="-127"/>
+                <a:ea typeface="프리젠테이션 5 Medium" pitchFamily="2" charset="-127"/>
+                <a:cs typeface="Malgun Gothic"/>
+              </a:rPr>
+              <a:t>head의</a:t>
+            </a:r>
+            <a:r>
+              <a:rPr sz="1200" b="0" dirty="0">
+                <a:solidFill>
+                  <a:srgbClr val="565C66"/>
+                </a:solidFill>
+                <a:latin typeface="프리젠테이션 5 Medium" pitchFamily="2" charset="-127"/>
+                <a:ea typeface="프리젠테이션 5 Medium" pitchFamily="2" charset="-127"/>
+                <a:cs typeface="Malgun Gothic"/>
+              </a:rPr>
+              <a:t> </a:t>
+            </a:r>
+            <a:r>
+              <a:rPr sz="1200" b="0" dirty="0" err="1">
+                <a:solidFill>
+                  <a:srgbClr val="565C66"/>
+                </a:solidFill>
+                <a:latin typeface="프리젠테이션 5 Medium" pitchFamily="2" charset="-127"/>
+                <a:ea typeface="프리젠테이션 5 Medium" pitchFamily="2" charset="-127"/>
+                <a:cs typeface="Malgun Gothic"/>
+              </a:rPr>
+              <a:t>D_inj</a:t>
+            </a:r>
+            <a:r>
+              <a:rPr sz="1200" b="0" dirty="0">
+                <a:solidFill>
+                  <a:srgbClr val="565C66"/>
+                </a:solidFill>
+                <a:latin typeface="프리젠테이션 5 Medium" pitchFamily="2" charset="-127"/>
+                <a:ea typeface="프리젠테이션 5 Medium" pitchFamily="2" charset="-127"/>
+                <a:cs typeface="Malgun Gothic"/>
+              </a:rPr>
+              <a:t> </a:t>
+            </a:r>
+            <a:r>
+              <a:rPr sz="1200" b="0" dirty="0" err="1">
+                <a:solidFill>
+                  <a:srgbClr val="565C66"/>
+                </a:solidFill>
+                <a:latin typeface="프리젠테이션 5 Medium" pitchFamily="2" charset="-127"/>
+                <a:ea typeface="프리젠테이션 5 Medium" pitchFamily="2" charset="-127"/>
+                <a:cs typeface="Malgun Gothic"/>
+              </a:rPr>
+              <a:t>방향</a:t>
+            </a:r>
+            <a:r>
+              <a:rPr sz="1200" b="0" dirty="0">
+                <a:solidFill>
+                  <a:srgbClr val="565C66"/>
+                </a:solidFill>
+                <a:latin typeface="프리젠테이션 5 Medium" pitchFamily="2" charset="-127"/>
+                <a:ea typeface="프리젠테이션 5 Medium" pitchFamily="2" charset="-127"/>
+                <a:cs typeface="Malgun Gothic"/>
+              </a:rPr>
+              <a:t> attention </a:t>
+            </a:r>
+            <a:r>
+              <a:rPr sz="1200" b="0" dirty="0" err="1">
+                <a:solidFill>
+                  <a:srgbClr val="565C66"/>
+                </a:solidFill>
+                <a:latin typeface="프리젠테이션 5 Medium" pitchFamily="2" charset="-127"/>
+                <a:ea typeface="프리젠테이션 5 Medium" pitchFamily="2" charset="-127"/>
+                <a:cs typeface="Malgun Gothic"/>
+              </a:rPr>
+              <a:t>edge만</a:t>
+            </a:r>
+            <a:r>
+              <a:rPr sz="1200" b="0" dirty="0">
+                <a:solidFill>
+                  <a:srgbClr val="565C66"/>
+                </a:solidFill>
+                <a:latin typeface="프리젠테이션 5 Medium" pitchFamily="2" charset="-127"/>
+                <a:ea typeface="프리젠테이션 5 Medium" pitchFamily="2" charset="-127"/>
+                <a:cs typeface="Malgun Gothic"/>
+              </a:rPr>
+              <a:t> pre-</a:t>
+            </a:r>
+            <a:r>
+              <a:rPr sz="1200" b="0" dirty="0" err="1">
+                <a:solidFill>
+                  <a:srgbClr val="565C66"/>
+                </a:solidFill>
+                <a:latin typeface="프리젠테이션 5 Medium" pitchFamily="2" charset="-127"/>
+                <a:ea typeface="프리젠테이션 5 Medium" pitchFamily="2" charset="-127"/>
+                <a:cs typeface="Malgun Gothic"/>
+              </a:rPr>
+              <a:t>softmax에서</a:t>
+            </a:r>
+            <a:r>
+              <a:rPr sz="1200" b="0" dirty="0">
+                <a:solidFill>
+                  <a:srgbClr val="565C66"/>
+                </a:solidFill>
+                <a:latin typeface="프리젠테이션 5 Medium" pitchFamily="2" charset="-127"/>
+                <a:ea typeface="프리젠테이션 5 Medium" pitchFamily="2" charset="-127"/>
+                <a:cs typeface="Malgun Gothic"/>
+              </a:rPr>
+              <a:t> </a:t>
+            </a:r>
+            <a:r>
+              <a:rPr sz="1200" b="0" dirty="0" err="1">
+                <a:solidFill>
+                  <a:srgbClr val="565C66"/>
+                </a:solidFill>
+                <a:latin typeface="프리젠테이션 5 Medium" pitchFamily="2" charset="-127"/>
+                <a:ea typeface="프리젠테이션 5 Medium" pitchFamily="2" charset="-127"/>
+                <a:cs typeface="Malgun Gothic"/>
+              </a:rPr>
+              <a:t>차단</a:t>
+            </a:r>
+            <a:endParaRPr sz="1200" b="0" dirty="0">
+              <a:solidFill>
+                <a:srgbClr val="565C66"/>
+              </a:solidFill>
+              <a:latin typeface="프리젠테이션 5 Medium" pitchFamily="2" charset="-127"/>
+              <a:ea typeface="프리젠테이션 5 Medium" pitchFamily="2" charset="-127"/>
+              <a:cs typeface="Malgun Gothic"/>
+            </a:endParaRPr>
           </a:p>
         </p:txBody>
       </p:sp>
       <p:graphicFrame>
         <p:nvGraphicFramePr>
-          <p:cNvPr id="11" name="Table 10"/>
+          <p:cNvPr id="14" name="Table 10">
+            <a:extLst>
+              <a:ext uri="{FF2B5EF4-FFF2-40B4-BE49-F238E27FC236}">
+                <a16:creationId xmlns:a16="http://schemas.microsoft.com/office/drawing/2014/main" id="{075CC660-F717-F483-35A4-8C206AF3FB9B}"/>
+              </a:ext>
+            </a:extLst>
+          </p:cNvPr>
           <p:cNvGraphicFramePr>
             <a:graphicFrameLocks noGrp="1"/>
           </p:cNvGraphicFramePr>
-          <p:nvPr/>
+          <p:nvPr>
+            <p:extLst>
+              <p:ext uri="{D42A27DB-BD31-4B8C-83A1-F6EECF244321}">
+                <p14:modId xmlns:p14="http://schemas.microsoft.com/office/powerpoint/2010/main" val="2015822929"/>
+              </p:ext>
+            </p:extLst>
+          </p:nvPr>
         </p:nvGraphicFramePr>
         <p:xfrm>
           <a:off x="640080" y="3913632"/>
@@ -21104,16 +21401,24 @@
                         </a:lnSpc>
                       </a:pPr>
                       <a:r>
-                        <a:rPr sz="1100" b="1">
+                        <a:rPr sz="1400" b="1" dirty="0" err="1">
                           <a:solidFill>
                             <a:srgbClr val="8B9099"/>
                           </a:solidFill>
-                          <a:latin typeface="Malgun Gothic"/>
-                          <a:ea typeface="Malgun Gothic"/>
+                          <a:latin typeface="프리젠테이션 5 Medium" pitchFamily="2" charset="-127"/>
+                          <a:ea typeface="프리젠테이션 5 Medium" pitchFamily="2" charset="-127"/>
                           <a:cs typeface="Malgun Gothic"/>
                         </a:rPr>
                         <a:t>데이터</a:t>
                       </a:r>
+                      <a:endParaRPr sz="1400" b="1" dirty="0">
+                        <a:solidFill>
+                          <a:srgbClr val="8B9099"/>
+                        </a:solidFill>
+                        <a:latin typeface="프리젠테이션 5 Medium" pitchFamily="2" charset="-127"/>
+                        <a:ea typeface="프리젠테이션 5 Medium" pitchFamily="2" charset="-127"/>
+                        <a:cs typeface="Malgun Gothic"/>
+                      </a:endParaRPr>
                     </a:p>
                   </a:txBody>
                   <a:tcPr marL="82296" marR="82296" marT="41148" marB="41148" anchor="ctr">
@@ -21133,12 +21438,12 @@
                         </a:lnSpc>
                       </a:pPr>
                       <a:r>
-                        <a:rPr sz="1100" b="1">
+                        <a:rPr sz="1400" b="1">
                           <a:solidFill>
                             <a:srgbClr val="8B9099"/>
                           </a:solidFill>
-                          <a:latin typeface="Malgun Gothic"/>
-                          <a:ea typeface="Malgun Gothic"/>
+                          <a:latin typeface="프리젠테이션 5 Medium" pitchFamily="2" charset="-127"/>
+                          <a:ea typeface="프리젠테이션 5 Medium" pitchFamily="2" charset="-127"/>
                           <a:cs typeface="Malgun Gothic"/>
                         </a:rPr>
                         <a:t>k=0 공격 성공</a:t>
@@ -21162,12 +21467,12 @@
                         </a:lnSpc>
                       </a:pPr>
                       <a:r>
-                        <a:rPr sz="1100" b="1">
+                        <a:rPr sz="1400" b="1">
                           <a:solidFill>
                             <a:srgbClr val="8B9099"/>
                           </a:solidFill>
-                          <a:latin typeface="Malgun Gothic"/>
-                          <a:ea typeface="Malgun Gothic"/>
+                          <a:latin typeface="프리젠테이션 5 Medium" pitchFamily="2" charset="-127"/>
+                          <a:ea typeface="프리젠테이션 5 Medium" pitchFamily="2" charset="-127"/>
                           <a:cs typeface="Malgun Gothic"/>
                         </a:rPr>
                         <a:t>knockout 후</a:t>
@@ -21191,12 +21496,12 @@
                         </a:lnSpc>
                       </a:pPr>
                       <a:r>
-                        <a:rPr sz="1100" b="1">
+                        <a:rPr sz="1400" b="1">
                           <a:solidFill>
                             <a:srgbClr val="8B9099"/>
                           </a:solidFill>
-                          <a:latin typeface="Malgun Gothic"/>
-                          <a:ea typeface="Malgun Gothic"/>
+                          <a:latin typeface="프리젠테이션 5 Medium" pitchFamily="2" charset="-127"/>
+                          <a:ea typeface="프리젠테이션 5 Medium" pitchFamily="2" charset="-127"/>
                           <a:cs typeface="Malgun Gothic"/>
                         </a:rPr>
                         <a:t>utility</a:t>
@@ -21227,15 +21532,26 @@
                         </a:lnSpc>
                       </a:pPr>
                       <a:r>
-                        <a:rPr sz="1100" b="0">
+                        <a:rPr sz="1400" b="0" dirty="0" err="1">
                           <a:solidFill>
                             <a:srgbClr val="565C66"/>
                           </a:solidFill>
-                          <a:latin typeface="Malgun Gothic"/>
-                          <a:ea typeface="Malgun Gothic"/>
+                          <a:latin typeface="프리젠테이션 5 Medium" pitchFamily="2" charset="-127"/>
+                          <a:ea typeface="프리젠테이션 5 Medium" pitchFamily="2" charset="-127"/>
                           <a:cs typeface="Malgun Gothic"/>
                         </a:rPr>
-                        <a:t>합성 30템플릿 (0.5B~7B)</a:t>
+                        <a:t>합성</a:t>
+                      </a:r>
+                      <a:r>
+                        <a:rPr sz="1400" b="0" dirty="0">
+                          <a:solidFill>
+                            <a:srgbClr val="565C66"/>
+                          </a:solidFill>
+                          <a:latin typeface="프리젠테이션 5 Medium" pitchFamily="2" charset="-127"/>
+                          <a:ea typeface="프리젠테이션 5 Medium" pitchFamily="2" charset="-127"/>
+                          <a:cs typeface="Malgun Gothic"/>
+                        </a:rPr>
+                        <a:t> 30템플릿 (0.5B~7B)</a:t>
                       </a:r>
                     </a:p>
                   </a:txBody>
@@ -21256,12 +21572,12 @@
                         </a:lnSpc>
                       </a:pPr>
                       <a:r>
-                        <a:rPr sz="1100" b="0">
+                        <a:rPr sz="1400" b="0" dirty="0">
                           <a:solidFill>
                             <a:srgbClr val="565C66"/>
                           </a:solidFill>
-                          <a:latin typeface="Malgun Gothic"/>
-                          <a:ea typeface="Malgun Gothic"/>
+                          <a:latin typeface="프리젠테이션 5 Medium" pitchFamily="2" charset="-127"/>
+                          <a:ea typeface="프리젠테이션 5 Medium" pitchFamily="2" charset="-127"/>
                           <a:cs typeface="Malgun Gothic"/>
                         </a:rPr>
                         <a:t>0.91 ~ 1.00</a:t>
@@ -21285,12 +21601,12 @@
                         </a:lnSpc>
                       </a:pPr>
                       <a:r>
-                        <a:rPr sz="1100" b="1">
+                        <a:rPr sz="1400" b="1">
                           <a:solidFill>
                             <a:srgbClr val="C1442A"/>
                           </a:solidFill>
-                          <a:latin typeface="Malgun Gothic"/>
-                          <a:ea typeface="Malgun Gothic"/>
+                          <a:latin typeface="프리젠테이션 5 Medium" pitchFamily="2" charset="-127"/>
+                          <a:ea typeface="프리젠테이션 5 Medium" pitchFamily="2" charset="-127"/>
                           <a:cs typeface="Malgun Gothic"/>
                         </a:rPr>
                         <a:t>0.0000</a:t>
@@ -21314,12 +21630,12 @@
                         </a:lnSpc>
                       </a:pPr>
                       <a:r>
-                        <a:rPr sz="1100" b="0">
+                        <a:rPr sz="1400" b="0">
                           <a:solidFill>
                             <a:srgbClr val="565C66"/>
                           </a:solidFill>
-                          <a:latin typeface="Malgun Gothic"/>
-                          <a:ea typeface="Malgun Gothic"/>
+                          <a:latin typeface="프리젠테이션 5 Medium" pitchFamily="2" charset="-127"/>
+                          <a:ea typeface="프리젠테이션 5 Medium" pitchFamily="2" charset="-127"/>
                           <a:cs typeface="Malgun Gothic"/>
                         </a:rPr>
                         <a:t>유지 / 소폭 상승</a:t>
@@ -21350,12 +21666,12 @@
                         </a:lnSpc>
                       </a:pPr>
                       <a:r>
-                        <a:rPr sz="1100" b="0">
+                        <a:rPr sz="1400" b="0">
                           <a:solidFill>
                             <a:srgbClr val="565C66"/>
                           </a:solidFill>
-                          <a:latin typeface="Malgun Gothic"/>
-                          <a:ea typeface="Malgun Gothic"/>
+                          <a:latin typeface="프리젠테이션 5 Medium" pitchFamily="2" charset="-127"/>
+                          <a:ea typeface="프리젠테이션 5 Medium" pitchFamily="2" charset="-127"/>
                           <a:cs typeface="Malgun Gothic"/>
                         </a:rPr>
                         <a:t>합성 unseen 문구 4종</a:t>
@@ -21379,12 +21695,12 @@
                         </a:lnSpc>
                       </a:pPr>
                       <a:r>
-                        <a:rPr sz="1100" b="0">
+                        <a:rPr sz="1400" b="0">
                           <a:solidFill>
                             <a:srgbClr val="565C66"/>
                           </a:solidFill>
-                          <a:latin typeface="Malgun Gothic"/>
-                          <a:ea typeface="Malgun Gothic"/>
+                          <a:latin typeface="프리젠테이션 5 Medium" pitchFamily="2" charset="-127"/>
+                          <a:ea typeface="프리젠테이션 5 Medium" pitchFamily="2" charset="-127"/>
                           <a:cs typeface="Malgun Gothic"/>
                         </a:rPr>
                         <a:t>0.92 ~ 1.00</a:t>
@@ -21408,12 +21724,12 @@
                         </a:lnSpc>
                       </a:pPr>
                       <a:r>
-                        <a:rPr sz="1100" b="1">
+                        <a:rPr sz="1400" b="1" dirty="0">
                           <a:solidFill>
                             <a:srgbClr val="C1442A"/>
                           </a:solidFill>
-                          <a:latin typeface="Malgun Gothic"/>
-                          <a:ea typeface="Malgun Gothic"/>
+                          <a:latin typeface="프리젠테이션 5 Medium" pitchFamily="2" charset="-127"/>
+                          <a:ea typeface="프리젠테이션 5 Medium" pitchFamily="2" charset="-127"/>
                           <a:cs typeface="Malgun Gothic"/>
                         </a:rPr>
                         <a:t>0.0000</a:t>
@@ -21437,12 +21753,12 @@
                         </a:lnSpc>
                       </a:pPr>
                       <a:r>
-                        <a:rPr sz="1100" b="0">
+                        <a:rPr sz="1400" b="0">
                           <a:solidFill>
                             <a:srgbClr val="565C66"/>
                           </a:solidFill>
-                          <a:latin typeface="Malgun Gothic"/>
-                          <a:ea typeface="Malgun Gothic"/>
+                          <a:latin typeface="프리젠테이션 5 Medium" pitchFamily="2" charset="-127"/>
+                          <a:ea typeface="프리젠테이션 5 Medium" pitchFamily="2" charset="-127"/>
                           <a:cs typeface="Malgun Gothic"/>
                         </a:rPr>
                         <a:t>유지</a:t>
@@ -21473,12 +21789,12 @@
                         </a:lnSpc>
                       </a:pPr>
                       <a:r>
-                        <a:rPr sz="1100" b="0">
+                        <a:rPr sz="1400" b="0">
                           <a:solidFill>
                             <a:srgbClr val="565C66"/>
                           </a:solidFill>
-                          <a:latin typeface="Malgun Gothic"/>
-                          <a:ea typeface="Malgun Gothic"/>
+                          <a:latin typeface="프리젠테이션 5 Medium" pitchFamily="2" charset="-127"/>
+                          <a:ea typeface="프리젠테이션 5 Medium" pitchFamily="2" charset="-127"/>
                           <a:cs typeface="Malgun Gothic"/>
                         </a:rPr>
                         <a:t>InjecAgent 1,054개 (1.5B)</a:t>
@@ -21502,12 +21818,12 @@
                         </a:lnSpc>
                       </a:pPr>
                       <a:r>
-                        <a:rPr sz="1100" b="0">
+                        <a:rPr sz="1400" b="0">
                           <a:solidFill>
                             <a:srgbClr val="565C66"/>
                           </a:solidFill>
-                          <a:latin typeface="Malgun Gothic"/>
-                          <a:ea typeface="Malgun Gothic"/>
+                          <a:latin typeface="프리젠테이션 5 Medium" pitchFamily="2" charset="-127"/>
+                          <a:ea typeface="프리젠테이션 5 Medium" pitchFamily="2" charset="-127"/>
                           <a:cs typeface="Malgun Gothic"/>
                         </a:rPr>
                         <a:t>0.1894</a:t>
@@ -21531,12 +21847,12 @@
                         </a:lnSpc>
                       </a:pPr>
                       <a:r>
-                        <a:rPr sz="1100" b="0">
+                        <a:rPr sz="1400" b="0" dirty="0">
                           <a:solidFill>
                             <a:srgbClr val="565C66"/>
                           </a:solidFill>
-                          <a:latin typeface="Malgun Gothic"/>
-                          <a:ea typeface="Malgun Gothic"/>
+                          <a:latin typeface="프리젠테이션 5 Medium" pitchFamily="2" charset="-127"/>
+                          <a:ea typeface="프리젠테이션 5 Medium" pitchFamily="2" charset="-127"/>
                           <a:cs typeface="Malgun Gothic"/>
                         </a:rPr>
                         <a:t>0.0406  (4.7배↓)</a:t>
@@ -21560,15 +21876,59 @@
                         </a:lnSpc>
                       </a:pPr>
                       <a:r>
-                        <a:rPr sz="1100" b="0">
+                        <a:rPr sz="1400" b="0" dirty="0">
                           <a:solidFill>
                             <a:srgbClr val="565C66"/>
                           </a:solidFill>
-                          <a:latin typeface="Malgun Gothic"/>
-                          <a:ea typeface="Malgun Gothic"/>
+                          <a:latin typeface="프리젠테이션 5 Medium" pitchFamily="2" charset="-127"/>
+                          <a:ea typeface="프리젠테이션 5 Medium" pitchFamily="2" charset="-127"/>
                           <a:cs typeface="Malgun Gothic"/>
                         </a:rPr>
-                        <a:t>(S9에서 무효 판정)</a:t>
+                        <a:t>(S9에서 </a:t>
+                      </a:r>
+                      <a:r>
+                        <a:rPr sz="1400" b="0" dirty="0" err="1">
+                          <a:solidFill>
+                            <a:srgbClr val="565C66"/>
+                          </a:solidFill>
+                          <a:latin typeface="프리젠테이션 5 Medium" pitchFamily="2" charset="-127"/>
+                          <a:ea typeface="프리젠테이션 5 Medium" pitchFamily="2" charset="-127"/>
+                          <a:cs typeface="Malgun Gothic"/>
+                        </a:rPr>
+                        <a:t>무효</a:t>
+                      </a:r>
+                      <a:r>
+                        <a:rPr sz="1400" b="0" dirty="0">
+                          <a:solidFill>
+                            <a:srgbClr val="565C66"/>
+                          </a:solidFill>
+                          <a:latin typeface="프리젠테이션 5 Medium" pitchFamily="2" charset="-127"/>
+                          <a:ea typeface="프리젠테이션 5 Medium" pitchFamily="2" charset="-127"/>
+                          <a:cs typeface="Malgun Gothic"/>
+                        </a:rPr>
+                        <a:t> </a:t>
+                      </a:r>
+                      <a:r>
+                        <a:rPr sz="1400" b="0" dirty="0" err="1">
+                          <a:solidFill>
+                            <a:srgbClr val="565C66"/>
+                          </a:solidFill>
+                          <a:latin typeface="프리젠테이션 5 Medium" pitchFamily="2" charset="-127"/>
+                          <a:ea typeface="프리젠테이션 5 Medium" pitchFamily="2" charset="-127"/>
+                          <a:cs typeface="Malgun Gothic"/>
+                        </a:rPr>
+                        <a:t>판정</a:t>
+                      </a:r>
+                      <a:r>
+                        <a:rPr sz="1400" b="0" dirty="0">
+                          <a:solidFill>
+                            <a:srgbClr val="565C66"/>
+                          </a:solidFill>
+                          <a:latin typeface="프리젠테이션 5 Medium" pitchFamily="2" charset="-127"/>
+                          <a:ea typeface="프리젠테이션 5 Medium" pitchFamily="2" charset="-127"/>
+                          <a:cs typeface="Malgun Gothic"/>
+                        </a:rPr>
+                        <a:t>)</a:t>
                       </a:r>
                     </a:p>
                   </a:txBody>
@@ -21596,12 +21956,12 @@
                         </a:lnSpc>
                       </a:pPr>
                       <a:r>
-                        <a:rPr sz="1100" b="0">
+                        <a:rPr sz="1400" b="0">
                           <a:solidFill>
                             <a:srgbClr val="565C66"/>
                           </a:solidFill>
-                          <a:latin typeface="Malgun Gothic"/>
-                          <a:ea typeface="Malgun Gothic"/>
+                          <a:latin typeface="프리젠테이션 5 Medium" pitchFamily="2" charset="-127"/>
+                          <a:ea typeface="프리젠테이션 5 Medium" pitchFamily="2" charset="-127"/>
                           <a:cs typeface="Malgun Gothic"/>
                         </a:rPr>
                         <a:t>InjecAgent 1,054개 (7B)</a:t>
@@ -21625,12 +21985,12 @@
                         </a:lnSpc>
                       </a:pPr>
                       <a:r>
-                        <a:rPr sz="1100" b="0">
+                        <a:rPr sz="1400" b="0">
                           <a:solidFill>
                             <a:srgbClr val="565C66"/>
                           </a:solidFill>
-                          <a:latin typeface="Malgun Gothic"/>
-                          <a:ea typeface="Malgun Gothic"/>
+                          <a:latin typeface="프리젠테이션 5 Medium" pitchFamily="2" charset="-127"/>
+                          <a:ea typeface="프리젠테이션 5 Medium" pitchFamily="2" charset="-127"/>
                           <a:cs typeface="Malgun Gothic"/>
                         </a:rPr>
                         <a:t>0.5237</a:t>
@@ -21654,12 +22014,12 @@
                         </a:lnSpc>
                       </a:pPr>
                       <a:r>
-                        <a:rPr sz="1100" b="0">
+                        <a:rPr sz="1400" b="0">
                           <a:solidFill>
                             <a:srgbClr val="565C66"/>
                           </a:solidFill>
-                          <a:latin typeface="Malgun Gothic"/>
-                          <a:ea typeface="Malgun Gothic"/>
+                          <a:latin typeface="프리젠테이션 5 Medium" pitchFamily="2" charset="-127"/>
+                          <a:ea typeface="프리젠테이션 5 Medium" pitchFamily="2" charset="-127"/>
                           <a:cs typeface="Malgun Gothic"/>
                         </a:rPr>
                         <a:t>0.1300  (4.0배↓)</a:t>
@@ -21683,15 +22043,37 @@
                         </a:lnSpc>
                       </a:pPr>
                       <a:r>
-                        <a:rPr sz="1100" b="0">
+                        <a:rPr sz="1400" b="0" dirty="0">
                           <a:solidFill>
                             <a:srgbClr val="565C66"/>
                           </a:solidFill>
-                          <a:latin typeface="Malgun Gothic"/>
-                          <a:ea typeface="Malgun Gothic"/>
+                          <a:latin typeface="프리젠테이션 5 Medium" pitchFamily="2" charset="-127"/>
+                          <a:ea typeface="프리젠테이션 5 Medium" pitchFamily="2" charset="-127"/>
                           <a:cs typeface="Malgun Gothic"/>
                         </a:rPr>
-                        <a:t>(동일)</a:t>
+                        <a:t>(</a:t>
+                      </a:r>
+                      <a:r>
+                        <a:rPr sz="1400" b="0" dirty="0" err="1">
+                          <a:solidFill>
+                            <a:srgbClr val="565C66"/>
+                          </a:solidFill>
+                          <a:latin typeface="프리젠테이션 5 Medium" pitchFamily="2" charset="-127"/>
+                          <a:ea typeface="프리젠테이션 5 Medium" pitchFamily="2" charset="-127"/>
+                          <a:cs typeface="Malgun Gothic"/>
+                        </a:rPr>
+                        <a:t>동일</a:t>
+                      </a:r>
+                      <a:r>
+                        <a:rPr sz="1400" b="0" dirty="0">
+                          <a:solidFill>
+                            <a:srgbClr val="565C66"/>
+                          </a:solidFill>
+                          <a:latin typeface="프리젠테이션 5 Medium" pitchFamily="2" charset="-127"/>
+                          <a:ea typeface="프리젠테이션 5 Medium" pitchFamily="2" charset="-127"/>
+                          <a:cs typeface="Malgun Gothic"/>
+                        </a:rPr>
+                        <a:t>)</a:t>
                       </a:r>
                     </a:p>
                   </a:txBody>
@@ -21713,14 +22095,20 @@
       </p:graphicFrame>
       <p:sp>
         <p:nvSpPr>
-          <p:cNvPr id="12" name="TextBox 11"/>
+          <p:cNvPr id="17" name="TextBox 16">
+            <a:extLst>
+              <a:ext uri="{FF2B5EF4-FFF2-40B4-BE49-F238E27FC236}">
+                <a16:creationId xmlns:a16="http://schemas.microsoft.com/office/drawing/2014/main" id="{0523C995-1A7C-8099-8D5E-A4FE2F2AA35B}"/>
+              </a:ext>
+            </a:extLst>
+          </p:cNvPr>
           <p:cNvSpPr txBox="1"/>
           <p:nvPr/>
         </p:nvSpPr>
         <p:spPr>
           <a:xfrm>
             <a:off x="640080" y="5870448"/>
-            <a:ext cx="10908792" cy="365760"/>
+            <a:ext cx="10908792" cy="202556"/>
           </a:xfrm>
           <a:prstGeom prst="rect">
             <a:avLst/>
@@ -21739,42 +22127,234 @@
               </a:lnSpc>
             </a:pPr>
             <a:r>
-              <a:rPr sz="1050" b="0">
+              <a:rPr sz="1200" b="0" dirty="0" err="1">
                 <a:solidFill>
                   <a:srgbClr val="8B9099"/>
                 </a:solidFill>
-                <a:latin typeface="Malgun Gothic"/>
-                <a:ea typeface="Malgun Gothic"/>
+                <a:latin typeface="프리젠테이션 5 Medium" pitchFamily="2" charset="-127"/>
+                <a:ea typeface="프리젠테이션 5 Medium" pitchFamily="2" charset="-127"/>
                 <a:cs typeface="Malgun Gothic"/>
               </a:rPr>
-              <a:t>당시 결론: </a:t>
-            </a:r>
-            <a:r>
-              <a:rPr sz="1050" b="1">
+              <a:t>당시</a:t>
+            </a:r>
+            <a:r>
+              <a:rPr sz="1200" b="0" dirty="0">
+                <a:solidFill>
+                  <a:srgbClr val="8B9099"/>
+                </a:solidFill>
+                <a:latin typeface="프리젠테이션 5 Medium" pitchFamily="2" charset="-127"/>
+                <a:ea typeface="프리젠테이션 5 Medium" pitchFamily="2" charset="-127"/>
+                <a:cs typeface="Malgun Gothic"/>
+              </a:rPr>
+              <a:t> </a:t>
+            </a:r>
+            <a:r>
+              <a:rPr sz="1200" b="0" dirty="0" err="1">
+                <a:solidFill>
+                  <a:srgbClr val="8B9099"/>
+                </a:solidFill>
+                <a:latin typeface="프리젠테이션 5 Medium" pitchFamily="2" charset="-127"/>
+                <a:ea typeface="프리젠테이션 5 Medium" pitchFamily="2" charset="-127"/>
+                <a:cs typeface="Malgun Gothic"/>
+              </a:rPr>
+              <a:t>결론</a:t>
+            </a:r>
+            <a:r>
+              <a:rPr sz="1200" b="0" dirty="0">
+                <a:solidFill>
+                  <a:srgbClr val="8B9099"/>
+                </a:solidFill>
+                <a:latin typeface="프리젠테이션 5 Medium" pitchFamily="2" charset="-127"/>
+                <a:ea typeface="프리젠테이션 5 Medium" pitchFamily="2" charset="-127"/>
+                <a:cs typeface="Malgun Gothic"/>
+              </a:rPr>
+              <a:t>: </a:t>
+            </a:r>
+            <a:r>
+              <a:rPr sz="1200" b="1" dirty="0">
                 <a:solidFill>
                   <a:srgbClr val="16181D"/>
                 </a:solidFill>
-                <a:latin typeface="Malgun Gothic"/>
-                <a:ea typeface="Malgun Gothic"/>
+                <a:latin typeface="프리젠테이션 5 Medium" pitchFamily="2" charset="-127"/>
+                <a:ea typeface="프리젠테이션 5 Medium" pitchFamily="2" charset="-127"/>
                 <a:cs typeface="Malgun Gothic"/>
               </a:rPr>
-              <a:t>"read head와 control head는 분리되어 있다"</a:t>
-            </a:r>
-            <a:r>
-              <a:rPr sz="1050" b="0">
+              <a:t>"read </a:t>
+            </a:r>
+            <a:r>
+              <a:rPr sz="1200" b="1" dirty="0" err="1">
+                <a:solidFill>
+                  <a:srgbClr val="16181D"/>
+                </a:solidFill>
+                <a:latin typeface="프리젠테이션 5 Medium" pitchFamily="2" charset="-127"/>
+                <a:ea typeface="프리젠테이션 5 Medium" pitchFamily="2" charset="-127"/>
+                <a:cs typeface="Malgun Gothic"/>
+              </a:rPr>
+              <a:t>head와</a:t>
+            </a:r>
+            <a:r>
+              <a:rPr sz="1200" b="1" dirty="0">
+                <a:solidFill>
+                  <a:srgbClr val="16181D"/>
+                </a:solidFill>
+                <a:latin typeface="프리젠테이션 5 Medium" pitchFamily="2" charset="-127"/>
+                <a:ea typeface="프리젠테이션 5 Medium" pitchFamily="2" charset="-127"/>
+                <a:cs typeface="Malgun Gothic"/>
+              </a:rPr>
+              <a:t> control </a:t>
+            </a:r>
+            <a:r>
+              <a:rPr sz="1200" b="1" dirty="0" err="1">
+                <a:solidFill>
+                  <a:srgbClr val="16181D"/>
+                </a:solidFill>
+                <a:latin typeface="프리젠테이션 5 Medium" pitchFamily="2" charset="-127"/>
+                <a:ea typeface="프리젠테이션 5 Medium" pitchFamily="2" charset="-127"/>
+                <a:cs typeface="Malgun Gothic"/>
+              </a:rPr>
+              <a:t>head는</a:t>
+            </a:r>
+            <a:r>
+              <a:rPr sz="1200" b="1" dirty="0">
+                <a:solidFill>
+                  <a:srgbClr val="16181D"/>
+                </a:solidFill>
+                <a:latin typeface="프리젠테이션 5 Medium" pitchFamily="2" charset="-127"/>
+                <a:ea typeface="프리젠테이션 5 Medium" pitchFamily="2" charset="-127"/>
+                <a:cs typeface="Malgun Gothic"/>
+              </a:rPr>
+              <a:t> </a:t>
+            </a:r>
+            <a:r>
+              <a:rPr sz="1200" b="1" dirty="0" err="1">
+                <a:solidFill>
+                  <a:srgbClr val="16181D"/>
+                </a:solidFill>
+                <a:latin typeface="프리젠테이션 5 Medium" pitchFamily="2" charset="-127"/>
+                <a:ea typeface="프리젠테이션 5 Medium" pitchFamily="2" charset="-127"/>
+                <a:cs typeface="Malgun Gothic"/>
+              </a:rPr>
+              <a:t>분리되어</a:t>
+            </a:r>
+            <a:r>
+              <a:rPr sz="1200" b="1" dirty="0">
+                <a:solidFill>
+                  <a:srgbClr val="16181D"/>
+                </a:solidFill>
+                <a:latin typeface="프리젠테이션 5 Medium" pitchFamily="2" charset="-127"/>
+                <a:ea typeface="프리젠테이션 5 Medium" pitchFamily="2" charset="-127"/>
+                <a:cs typeface="Malgun Gothic"/>
+              </a:rPr>
+              <a:t> </a:t>
+            </a:r>
+            <a:r>
+              <a:rPr sz="1200" b="1" dirty="0" err="1">
+                <a:solidFill>
+                  <a:srgbClr val="16181D"/>
+                </a:solidFill>
+                <a:latin typeface="프리젠테이션 5 Medium" pitchFamily="2" charset="-127"/>
+                <a:ea typeface="프리젠테이션 5 Medium" pitchFamily="2" charset="-127"/>
+                <a:cs typeface="Malgun Gothic"/>
+              </a:rPr>
+              <a:t>있다</a:t>
+            </a:r>
+            <a:r>
+              <a:rPr sz="1200" b="1" dirty="0">
+                <a:solidFill>
+                  <a:srgbClr val="16181D"/>
+                </a:solidFill>
+                <a:latin typeface="프리젠테이션 5 Medium" pitchFamily="2" charset="-127"/>
+                <a:ea typeface="프리젠테이션 5 Medium" pitchFamily="2" charset="-127"/>
+                <a:cs typeface="Malgun Gothic"/>
+              </a:rPr>
+              <a:t>"</a:t>
+            </a:r>
+            <a:r>
+              <a:rPr sz="1200" b="0" dirty="0">
                 <a:solidFill>
                   <a:srgbClr val="8B9099"/>
                 </a:solidFill>
-                <a:latin typeface="Malgun Gothic"/>
-                <a:ea typeface="Malgun Gothic"/>
+                <a:latin typeface="프리젠테이션 5 Medium" pitchFamily="2" charset="-127"/>
+                <a:ea typeface="프리젠테이션 5 Medium" pitchFamily="2" charset="-127"/>
                 <a:cs typeface="Malgun Gothic"/>
               </a:rPr>
-              <a:t>   —   jaccard(read,·) 0.18~0.38  vs  jaccard(internal,external) 0.48~0.60</a:t>
+              <a:t>   —   </a:t>
+            </a:r>
+            <a:r>
+              <a:rPr sz="1200" b="0" dirty="0" err="1">
+                <a:solidFill>
+                  <a:srgbClr val="8B9099"/>
+                </a:solidFill>
+                <a:latin typeface="프리젠테이션 5 Medium" pitchFamily="2" charset="-127"/>
+                <a:ea typeface="프리젠테이션 5 Medium" pitchFamily="2" charset="-127"/>
+                <a:cs typeface="Malgun Gothic"/>
+              </a:rPr>
+              <a:t>jaccard</a:t>
+            </a:r>
+            <a:r>
+              <a:rPr sz="1200" b="0" dirty="0">
+                <a:solidFill>
+                  <a:srgbClr val="8B9099"/>
+                </a:solidFill>
+                <a:latin typeface="프리젠테이션 5 Medium" pitchFamily="2" charset="-127"/>
+                <a:ea typeface="프리젠테이션 5 Medium" pitchFamily="2" charset="-127"/>
+                <a:cs typeface="Malgun Gothic"/>
+              </a:rPr>
+              <a:t>(read,·) 0.18~0.38  vs  </a:t>
+            </a:r>
+            <a:r>
+              <a:rPr sz="1200" b="0" dirty="0" err="1">
+                <a:solidFill>
+                  <a:srgbClr val="8B9099"/>
+                </a:solidFill>
+                <a:latin typeface="프리젠테이션 5 Medium" pitchFamily="2" charset="-127"/>
+                <a:ea typeface="프리젠테이션 5 Medium" pitchFamily="2" charset="-127"/>
+                <a:cs typeface="Malgun Gothic"/>
+              </a:rPr>
+              <a:t>jaccard</a:t>
+            </a:r>
+            <a:r>
+              <a:rPr sz="1200" b="0" dirty="0">
+                <a:solidFill>
+                  <a:srgbClr val="8B9099"/>
+                </a:solidFill>
+                <a:latin typeface="프리젠테이션 5 Medium" pitchFamily="2" charset="-127"/>
+                <a:ea typeface="프리젠테이션 5 Medium" pitchFamily="2" charset="-127"/>
+                <a:cs typeface="Malgun Gothic"/>
+              </a:rPr>
+              <a:t>(</a:t>
+            </a:r>
+            <a:r>
+              <a:rPr sz="1200" b="0" dirty="0" err="1">
+                <a:solidFill>
+                  <a:srgbClr val="8B9099"/>
+                </a:solidFill>
+                <a:latin typeface="프리젠테이션 5 Medium" pitchFamily="2" charset="-127"/>
+                <a:ea typeface="프리젠테이션 5 Medium" pitchFamily="2" charset="-127"/>
+                <a:cs typeface="Malgun Gothic"/>
+              </a:rPr>
+              <a:t>internal,external</a:t>
+            </a:r>
+            <a:r>
+              <a:rPr sz="1200" b="0" dirty="0">
+                <a:solidFill>
+                  <a:srgbClr val="8B9099"/>
+                </a:solidFill>
+                <a:latin typeface="프리젠테이션 5 Medium" pitchFamily="2" charset="-127"/>
+                <a:ea typeface="프리젠테이션 5 Medium" pitchFamily="2" charset="-127"/>
+                <a:cs typeface="Malgun Gothic"/>
+              </a:rPr>
+              <a:t>) 0.48~0.60</a:t>
             </a:r>
           </a:p>
         </p:txBody>
       </p:sp>
     </p:spTree>
+    <p:extLst>
+      <p:ext uri="{BB962C8B-B14F-4D97-AF65-F5344CB8AC3E}">
+        <p14:creationId xmlns:p14="http://schemas.microsoft.com/office/powerpoint/2010/main" val="2038724282"/>
+      </p:ext>
+    </p:extLst>
   </p:cSld>
   <p:clrMapOvr>
     <a:masterClrMapping/>
@@ -21782,7 +22362,7 @@
 </p:sld>
 </file>
 
-<file path=ppt/slides/slide7.xml><?xml version="1.0" encoding="utf-8"?>
+<file path=ppt/slides/slide6.xml><?xml version="1.0" encoding="utf-8"?>
 <p:sld xmlns:a="http://schemas.openxmlformats.org/drawingml/2006/main" xmlns:r="http://schemas.openxmlformats.org/officeDocument/2006/relationships" xmlns:p="http://schemas.openxmlformats.org/presentationml/2006/main">
   <p:cSld>
     <p:spTree>
@@ -22645,7 +23225,7 @@
 </p:sld>
 </file>
 
-<file path=ppt/slides/slide8.xml><?xml version="1.0" encoding="utf-8"?>
+<file path=ppt/slides/slide7.xml><?xml version="1.0" encoding="utf-8"?>
 <p:sld xmlns:a="http://schemas.openxmlformats.org/drawingml/2006/main" xmlns:r="http://schemas.openxmlformats.org/officeDocument/2006/relationships" xmlns:p="http://schemas.openxmlformats.org/presentationml/2006/main">
   <p:cSld>
     <p:spTree>
@@ -23785,7 +24365,7 @@
 </p:sld>
 </file>
 
-<file path=ppt/slides/slide9.xml><?xml version="1.0" encoding="utf-8"?>
+<file path=ppt/slides/slide8.xml><?xml version="1.0" encoding="utf-8"?>
 <p:sld xmlns:a="http://schemas.openxmlformats.org/drawingml/2006/main" xmlns:r="http://schemas.openxmlformats.org/officeDocument/2006/relationships" xmlns:p="http://schemas.openxmlformats.org/presentationml/2006/main">
   <p:cSld>
     <p:spTree>
@@ -24837,6 +25417,939 @@
 </p:sld>
 </file>
 
+<file path=ppt/slides/slide9.xml><?xml version="1.0" encoding="utf-8"?>
+<p:sld xmlns:a="http://schemas.openxmlformats.org/drawingml/2006/main" xmlns:r="http://schemas.openxmlformats.org/officeDocument/2006/relationships" xmlns:p="http://schemas.openxmlformats.org/presentationml/2006/main">
+  <p:cSld>
+    <p:spTree>
+      <p:nvGrpSpPr>
+        <p:cNvPr id="1" name=""/>
+        <p:cNvGrpSpPr/>
+        <p:nvPr/>
+      </p:nvGrpSpPr>
+      <p:grpSpPr>
+        <a:xfrm>
+          <a:off x="0" y="0"/>
+          <a:ext cx="0" cy="0"/>
+          <a:chOff x="0" y="0"/>
+          <a:chExt cx="0" cy="0"/>
+        </a:xfrm>
+      </p:grpSpPr>
+      <p:sp>
+        <p:nvSpPr>
+          <p:cNvPr id="2" name="Rectangle 1"/>
+          <p:cNvSpPr/>
+          <p:nvPr/>
+        </p:nvSpPr>
+        <p:spPr>
+          <a:xfrm>
+            <a:off x="0" y="0"/>
+            <a:ext cx="12188952" cy="6858000"/>
+          </a:xfrm>
+          <a:prstGeom prst="rect">
+            <a:avLst/>
+          </a:prstGeom>
+          <a:solidFill>
+            <a:srgbClr val="FFFFFF"/>
+          </a:solidFill>
+          <a:ln>
+            <a:noFill/>
+          </a:ln>
+          <a:effectLst/>
+        </p:spPr>
+        <p:style>
+          <a:lnRef idx="1">
+            <a:schemeClr val="accent1"/>
+          </a:lnRef>
+          <a:fillRef idx="3">
+            <a:schemeClr val="accent1"/>
+          </a:fillRef>
+          <a:effectRef idx="2">
+            <a:schemeClr val="accent1"/>
+          </a:effectRef>
+          <a:fontRef idx="minor">
+            <a:schemeClr val="lt1"/>
+          </a:fontRef>
+        </p:style>
+        <p:txBody>
+          <a:bodyPr rtlCol="0" anchor="ctr"/>
+          <a:lstStyle/>
+          <a:p>
+            <a:pPr algn="ctr"/>
+            <a:endParaRPr/>
+          </a:p>
+        </p:txBody>
+      </p:sp>
+      <p:sp>
+        <p:nvSpPr>
+          <p:cNvPr id="3" name="TextBox 2"/>
+          <p:cNvSpPr txBox="1"/>
+          <p:nvPr/>
+        </p:nvSpPr>
+        <p:spPr>
+          <a:xfrm>
+            <a:off x="640080" y="411480"/>
+            <a:ext cx="10908792" cy="365760"/>
+          </a:xfrm>
+          <a:prstGeom prst="rect">
+            <a:avLst/>
+          </a:prstGeom>
+          <a:noFill/>
+        </p:spPr>
+        <p:txBody>
+          <a:bodyPr wrap="square" lIns="0" tIns="0" rIns="0" bIns="0">
+            <a:spAutoFit/>
+          </a:bodyPr>
+          <a:lstStyle/>
+          <a:p>
+            <a:pPr algn="l">
+              <a:lnSpc>
+                <a:spcPct val="125000"/>
+              </a:lnSpc>
+            </a:pPr>
+            <a:r>
+              <a:rPr sz="1200" b="1">
+                <a:solidFill>
+                  <a:srgbClr val="C06A1F"/>
+                </a:solidFill>
+                <a:latin typeface="Consolas"/>
+                <a:ea typeface="Consolas"/>
+                <a:cs typeface="Consolas"/>
+              </a:rPr>
+              <a:t>02 · 피드백 ① 대응</a:t>
+            </a:r>
+          </a:p>
+        </p:txBody>
+      </p:sp>
+      <p:sp>
+        <p:nvSpPr>
+          <p:cNvPr id="4" name="TextBox 3"/>
+          <p:cNvSpPr txBox="1"/>
+          <p:nvPr/>
+        </p:nvSpPr>
+        <p:spPr>
+          <a:xfrm>
+            <a:off x="640080" y="777240"/>
+            <a:ext cx="10908792" cy="822960"/>
+          </a:xfrm>
+          <a:prstGeom prst="rect">
+            <a:avLst/>
+          </a:prstGeom>
+          <a:noFill/>
+        </p:spPr>
+        <p:txBody>
+          <a:bodyPr wrap="square" lIns="0" tIns="0" rIns="0" bIns="0">
+            <a:spAutoFit/>
+          </a:bodyPr>
+          <a:lstStyle/>
+          <a:p>
+            <a:pPr algn="l">
+              <a:lnSpc>
+                <a:spcPct val="110000"/>
+              </a:lnSpc>
+            </a:pPr>
+            <a:r>
+              <a:rPr sz="2600" b="1">
+                <a:solidFill>
+                  <a:srgbClr val="16181D"/>
+                </a:solidFill>
+                <a:latin typeface="Malgun Gothic"/>
+                <a:ea typeface="Malgun Gothic"/>
+                <a:cs typeface="Malgun Gothic"/>
+              </a:rPr>
+              <a:t>AgentDojo를 어떻게 붙였나 — 탐색과 평가를 분리</a:t>
+            </a:r>
+          </a:p>
+        </p:txBody>
+      </p:sp>
+      <p:sp>
+        <p:nvSpPr>
+          <p:cNvPr id="5" name="Rounded Rectangle 4"/>
+          <p:cNvSpPr/>
+          <p:nvPr/>
+        </p:nvSpPr>
+        <p:spPr>
+          <a:xfrm>
+            <a:off x="640080" y="1691640"/>
+            <a:ext cx="6400800" cy="1691640"/>
+          </a:xfrm>
+          <a:prstGeom prst="roundRect">
+            <a:avLst>
+              <a:gd name="adj" fmla="val 9000"/>
+            </a:avLst>
+          </a:prstGeom>
+          <a:solidFill>
+            <a:srgbClr val="F2F2F4"/>
+          </a:solidFill>
+          <a:ln>
+            <a:noFill/>
+          </a:ln>
+          <a:effectLst/>
+        </p:spPr>
+        <p:style>
+          <a:lnRef idx="1">
+            <a:schemeClr val="accent1"/>
+          </a:lnRef>
+          <a:fillRef idx="3">
+            <a:schemeClr val="accent1"/>
+          </a:fillRef>
+          <a:effectRef idx="2">
+            <a:schemeClr val="accent1"/>
+          </a:effectRef>
+          <a:fontRef idx="minor">
+            <a:schemeClr val="lt1"/>
+          </a:fontRef>
+        </p:style>
+        <p:txBody>
+          <a:bodyPr rtlCol="0" anchor="ctr"/>
+          <a:lstStyle/>
+          <a:p>
+            <a:endParaRPr/>
+          </a:p>
+        </p:txBody>
+      </p:sp>
+      <p:sp>
+        <p:nvSpPr>
+          <p:cNvPr id="6" name="TextBox 5"/>
+          <p:cNvSpPr txBox="1"/>
+          <p:nvPr/>
+        </p:nvSpPr>
+        <p:spPr>
+          <a:xfrm>
+            <a:off x="841248" y="1920240"/>
+            <a:ext cx="5998464" cy="1280160"/>
+          </a:xfrm>
+          <a:prstGeom prst="rect">
+            <a:avLst/>
+          </a:prstGeom>
+          <a:noFill/>
+        </p:spPr>
+        <p:txBody>
+          <a:bodyPr wrap="square" lIns="0" tIns="0" rIns="0" bIns="0">
+            <a:spAutoFit/>
+          </a:bodyPr>
+          <a:lstStyle/>
+          <a:p>
+            <a:pPr algn="l">
+              <a:lnSpc>
+                <a:spcPct val="135000"/>
+              </a:lnSpc>
+            </a:pPr>
+            <a:r>
+              <a:rPr sz="1200" b="0">
+                <a:solidFill>
+                  <a:srgbClr val="16181D"/>
+                </a:solidFill>
+                <a:latin typeface="Consolas"/>
+                <a:ea typeface="Consolas"/>
+                <a:cs typeface="Consolas"/>
+              </a:rPr>
+              <a:t>                ┌─ Track A (탐색)</a:t>
+            </a:r>
+          </a:p>
+          <a:p>
+            <a:pPr algn="l">
+              <a:lnSpc>
+                <a:spcPct val="135000"/>
+              </a:lnSpc>
+            </a:pPr>
+            <a:r>
+              <a:rPr sz="1200" b="0">
+                <a:solidFill>
+                  <a:srgbClr val="2F6FCE"/>
+                </a:solidFill>
+                <a:latin typeface="Consolas"/>
+                <a:ea typeface="Consolas"/>
+                <a:cs typeface="Consolas"/>
+              </a:rPr>
+              <a:t>  AgentDojo ────┤   단일 턴으로 잘라 relevance 계산</a:t>
+            </a:r>
+          </a:p>
+          <a:p>
+            <a:pPr algn="l">
+              <a:lnSpc>
+                <a:spcPct val="135000"/>
+              </a:lnSpc>
+            </a:pPr>
+            <a:r>
+              <a:rPr sz="1200" b="0">
+                <a:solidFill>
+                  <a:srgbClr val="16181D"/>
+                </a:solidFill>
+                <a:latin typeface="Consolas"/>
+                <a:ea typeface="Consolas"/>
+                <a:cs typeface="Consolas"/>
+              </a:rPr>
+              <a:t>                └─ Track B (평가)</a:t>
+            </a:r>
+          </a:p>
+          <a:p>
+            <a:pPr algn="l">
+              <a:lnSpc>
+                <a:spcPct val="135000"/>
+              </a:lnSpc>
+            </a:pPr>
+            <a:r>
+              <a:rPr sz="1200" b="0">
+                <a:solidFill>
+                  <a:srgbClr val="C06A1F"/>
+                </a:solidFill>
+                <a:latin typeface="Consolas"/>
+                <a:ea typeface="Consolas"/>
+                <a:cs typeface="Consolas"/>
+              </a:rPr>
+              <a:t>                    멀티턴 agent loop + 네이티브 채점</a:t>
+            </a:r>
+          </a:p>
+        </p:txBody>
+      </p:sp>
+      <p:sp>
+        <p:nvSpPr>
+          <p:cNvPr id="7" name="Rounded Rectangle 6"/>
+          <p:cNvSpPr/>
+          <p:nvPr/>
+        </p:nvSpPr>
+        <p:spPr>
+          <a:xfrm>
+            <a:off x="7360920" y="1691640"/>
+            <a:ext cx="4187952" cy="1691640"/>
+          </a:xfrm>
+          <a:prstGeom prst="roundRect">
+            <a:avLst>
+              <a:gd name="adj" fmla="val 9000"/>
+            </a:avLst>
+          </a:prstGeom>
+          <a:solidFill>
+            <a:srgbClr val="F2F2F4"/>
+          </a:solidFill>
+          <a:ln>
+            <a:noFill/>
+          </a:ln>
+          <a:effectLst/>
+        </p:spPr>
+        <p:style>
+          <a:lnRef idx="1">
+            <a:schemeClr val="accent1"/>
+          </a:lnRef>
+          <a:fillRef idx="3">
+            <a:schemeClr val="accent1"/>
+          </a:fillRef>
+          <a:effectRef idx="2">
+            <a:schemeClr val="accent1"/>
+          </a:effectRef>
+          <a:fontRef idx="minor">
+            <a:schemeClr val="lt1"/>
+          </a:fontRef>
+        </p:style>
+        <p:txBody>
+          <a:bodyPr rtlCol="0" anchor="ctr"/>
+          <a:lstStyle/>
+          <a:p>
+            <a:endParaRPr/>
+          </a:p>
+        </p:txBody>
+      </p:sp>
+      <p:sp>
+        <p:nvSpPr>
+          <p:cNvPr id="8" name="TextBox 7"/>
+          <p:cNvSpPr txBox="1"/>
+          <p:nvPr/>
+        </p:nvSpPr>
+        <p:spPr>
+          <a:xfrm>
+            <a:off x="7598664" y="1874519"/>
+            <a:ext cx="3712463" cy="1371600"/>
+          </a:xfrm>
+          <a:prstGeom prst="rect">
+            <a:avLst/>
+          </a:prstGeom>
+          <a:noFill/>
+        </p:spPr>
+        <p:txBody>
+          <a:bodyPr wrap="square" lIns="0" tIns="0" rIns="0" bIns="0">
+            <a:spAutoFit/>
+          </a:bodyPr>
+          <a:lstStyle/>
+          <a:p>
+            <a:pPr algn="l">
+              <a:lnSpc>
+                <a:spcPct val="115000"/>
+              </a:lnSpc>
+            </a:pPr>
+            <a:r>
+              <a:rPr sz="1350" b="1">
+                <a:solidFill>
+                  <a:srgbClr val="2F6FCE"/>
+                </a:solidFill>
+                <a:latin typeface="Malgun Gothic"/>
+                <a:ea typeface="Malgun Gothic"/>
+                <a:cs typeface="Malgun Gothic"/>
+              </a:rPr>
+              <a:t>왜 나눴나</a:t>
+            </a:r>
+          </a:p>
+          <a:p>
+            <a:pPr algn="l">
+              <a:lnSpc>
+                <a:spcPct val="125000"/>
+              </a:lnSpc>
+              <a:spcBef>
+                <a:spcPts val="300"/>
+              </a:spcBef>
+            </a:pPr>
+            <a:r>
+              <a:rPr sz="1100" b="0">
+                <a:solidFill>
+                  <a:srgbClr val="565C66"/>
+                </a:solidFill>
+                <a:latin typeface="Malgun Gothic"/>
+                <a:ea typeface="Malgun Gothic"/>
+                <a:cs typeface="Malgun Gothic"/>
+              </a:rPr>
+              <a:t>탐색은 backward가 필요해 단일 턴이어야 하고, 평가는 반대로 실제 멀티턴이어야 의미가 있다 — 두 요구가 양립 불가.</a:t>
+            </a:r>
+          </a:p>
+        </p:txBody>
+      </p:sp>
+      <p:sp>
+        <p:nvSpPr>
+          <p:cNvPr id="9" name="Rounded Rectangle 8"/>
+          <p:cNvSpPr/>
+          <p:nvPr/>
+        </p:nvSpPr>
+        <p:spPr>
+          <a:xfrm>
+            <a:off x="640080" y="3566160"/>
+            <a:ext cx="6400800" cy="1417320"/>
+          </a:xfrm>
+          <a:prstGeom prst="roundRect">
+            <a:avLst>
+              <a:gd name="adj" fmla="val 9000"/>
+            </a:avLst>
+          </a:prstGeom>
+          <a:solidFill>
+            <a:srgbClr val="DBE9F8"/>
+          </a:solidFill>
+          <a:ln>
+            <a:noFill/>
+          </a:ln>
+          <a:effectLst/>
+        </p:spPr>
+        <p:style>
+          <a:lnRef idx="1">
+            <a:schemeClr val="accent1"/>
+          </a:lnRef>
+          <a:fillRef idx="3">
+            <a:schemeClr val="accent1"/>
+          </a:fillRef>
+          <a:effectRef idx="2">
+            <a:schemeClr val="accent1"/>
+          </a:effectRef>
+          <a:fontRef idx="minor">
+            <a:schemeClr val="lt1"/>
+          </a:fontRef>
+        </p:style>
+        <p:txBody>
+          <a:bodyPr rtlCol="0" anchor="ctr"/>
+          <a:lstStyle/>
+          <a:p>
+            <a:endParaRPr/>
+          </a:p>
+        </p:txBody>
+      </p:sp>
+      <p:sp>
+        <p:nvSpPr>
+          <p:cNvPr id="10" name="TextBox 9"/>
+          <p:cNvSpPr txBox="1"/>
+          <p:nvPr/>
+        </p:nvSpPr>
+        <p:spPr>
+          <a:xfrm>
+            <a:off x="877824" y="3749039"/>
+            <a:ext cx="5925312" cy="1097280"/>
+          </a:xfrm>
+          <a:prstGeom prst="rect">
+            <a:avLst/>
+          </a:prstGeom>
+          <a:noFill/>
+        </p:spPr>
+        <p:txBody>
+          <a:bodyPr wrap="square" lIns="0" tIns="0" rIns="0" bIns="0">
+            <a:spAutoFit/>
+          </a:bodyPr>
+          <a:lstStyle/>
+          <a:p>
+            <a:pPr algn="l">
+              <a:lnSpc>
+                <a:spcPct val="115000"/>
+              </a:lnSpc>
+            </a:pPr>
+            <a:r>
+              <a:rPr sz="1350" b="1">
+                <a:solidFill>
+                  <a:srgbClr val="2F6FCE"/>
+                </a:solidFill>
+                <a:latin typeface="Malgun Gothic"/>
+                <a:ea typeface="Malgun Gothic"/>
+                <a:cs typeface="Malgun Gothic"/>
+              </a:rPr>
+              <a:t>네이티브 채점이란</a:t>
+            </a:r>
+          </a:p>
+          <a:p>
+            <a:pPr algn="l">
+              <a:lnSpc>
+                <a:spcPct val="125000"/>
+              </a:lnSpc>
+              <a:spcBef>
+                <a:spcPts val="400"/>
+              </a:spcBef>
+            </a:pPr>
+            <a:r>
+              <a:rPr sz="1150" b="0">
+                <a:solidFill>
+                  <a:srgbClr val="565C66"/>
+                </a:solidFill>
+                <a:latin typeface="Malgun Gothic"/>
+                <a:ea typeface="Malgun Gothic"/>
+                <a:cs typeface="Malgun Gothic"/>
+              </a:rPr>
+              <a:t>모델 출력 토큰 확률이 아니라, tool을 </a:t>
+            </a:r>
+            <a:r>
+              <a:rPr sz="1150" b="1">
+                <a:solidFill>
+                  <a:srgbClr val="16181D"/>
+                </a:solidFill>
+                <a:latin typeface="Malgun Gothic"/>
+                <a:ea typeface="Malgun Gothic"/>
+                <a:cs typeface="Malgun Gothic"/>
+              </a:rPr>
+              <a:t>실제로 실행한 뒤 환경 상태(계좌 잔액·전송된 메일)를 검사하는 결정론적 함수.</a:t>
+            </a:r>
+            <a:r>
+              <a:rPr sz="1150" b="0">
+                <a:solidFill>
+                  <a:srgbClr val="565C66"/>
+                </a:solidFill>
+                <a:latin typeface="Malgun Gothic"/>
+                <a:ea typeface="Malgun Gothic"/>
+                <a:cs typeface="Malgun Gothic"/>
+              </a:rPr>
+              <a:t> 교수님이 말씀하신 "제대로 된 성능 측정"에 대한 답.</a:t>
+            </a:r>
+          </a:p>
+        </p:txBody>
+      </p:sp>
+      <p:sp>
+        <p:nvSpPr>
+          <p:cNvPr id="11" name="TextBox 10"/>
+          <p:cNvSpPr txBox="1"/>
+          <p:nvPr/>
+        </p:nvSpPr>
+        <p:spPr>
+          <a:xfrm>
+            <a:off x="7360920" y="3566160"/>
+            <a:ext cx="4187952" cy="274320"/>
+          </a:xfrm>
+          <a:prstGeom prst="rect">
+            <a:avLst/>
+          </a:prstGeom>
+          <a:noFill/>
+        </p:spPr>
+        <p:txBody>
+          <a:bodyPr wrap="square" lIns="0" tIns="0" rIns="0" bIns="0">
+            <a:spAutoFit/>
+          </a:bodyPr>
+          <a:lstStyle/>
+          <a:p>
+            <a:pPr algn="l">
+              <a:lnSpc>
+                <a:spcPct val="125000"/>
+              </a:lnSpc>
+            </a:pPr>
+            <a:r>
+              <a:rPr sz="1200" b="1">
+                <a:solidFill>
+                  <a:srgbClr val="2F6FCE"/>
+                </a:solidFill>
+                <a:latin typeface="Malgun Gothic"/>
+                <a:ea typeface="Malgun Gothic"/>
+                <a:cs typeface="Malgun Gothic"/>
+              </a:rPr>
+              <a:t>Track A 어댑터에서 걸린 문제 3가지</a:t>
+            </a:r>
+          </a:p>
+        </p:txBody>
+      </p:sp>
+      <p:graphicFrame>
+        <p:nvGraphicFramePr>
+          <p:cNvPr id="12" name="Table 11"/>
+          <p:cNvGraphicFramePr>
+            <a:graphicFrameLocks noGrp="1"/>
+          </p:cNvGraphicFramePr>
+          <p:nvPr/>
+        </p:nvGraphicFramePr>
+        <p:xfrm>
+          <a:off x="7360920" y="3913632"/>
+          <a:ext cx="4187951" cy="1298448"/>
+        </p:xfrm>
+        <a:graphic>
+          <a:graphicData uri="http://schemas.openxmlformats.org/drawingml/2006/table">
+            <a:tbl>
+              <a:tblPr>
+                <a:tableStyleId>{5C22544A-7EE6-4342-B048-85BDC9FD1C3A}</a:tableStyleId>
+              </a:tblPr>
+              <a:tblGrid>
+                <a:gridCol w="1729806">
+                  <a:extLst>
+                    <a:ext uri="{9D8B030D-6E8A-4147-A177-3AD203B41FA5}">
+                      <a16:colId xmlns:a16="http://schemas.microsoft.com/office/drawing/2014/main" val="20000"/>
+                    </a:ext>
+                  </a:extLst>
+                </a:gridCol>
+                <a:gridCol w="2458145">
+                  <a:extLst>
+                    <a:ext uri="{9D8B030D-6E8A-4147-A177-3AD203B41FA5}">
+                      <a16:colId xmlns:a16="http://schemas.microsoft.com/office/drawing/2014/main" val="20001"/>
+                    </a:ext>
+                  </a:extLst>
+                </a:gridCol>
+              </a:tblGrid>
+              <a:tr h="310896">
+                <a:tc>
+                  <a:txBody>
+                    <a:bodyPr/>
+                    <a:lstStyle/>
+                    <a:p>
+                      <a:pPr algn="l">
+                        <a:lnSpc>
+                          <a:spcPct val="100000"/>
+                        </a:lnSpc>
+                      </a:pPr>
+                      <a:r>
+                        <a:rPr sz="1000" b="1">
+                          <a:solidFill>
+                            <a:srgbClr val="8B9099"/>
+                          </a:solidFill>
+                          <a:latin typeface="Malgun Gothic"/>
+                          <a:ea typeface="Malgun Gothic"/>
+                          <a:cs typeface="Malgun Gothic"/>
+                        </a:rPr>
+                        <a:t>문제</a:t>
+                      </a:r>
+                    </a:p>
+                  </a:txBody>
+                  <a:tcPr marL="82296" marR="82296" marT="41148" marB="41148" anchor="ctr">
+                    <a:solidFill>
+                      <a:srgbClr val="E9EAED"/>
+                    </a:solidFill>
+                  </a:tcPr>
+                </a:tc>
+                <a:tc>
+                  <a:txBody>
+                    <a:bodyPr/>
+                    <a:lstStyle/>
+                    <a:p>
+                      <a:pPr algn="l">
+                        <a:lnSpc>
+                          <a:spcPct val="100000"/>
+                        </a:lnSpc>
+                      </a:pPr>
+                      <a:r>
+                        <a:rPr sz="1000" b="1">
+                          <a:solidFill>
+                            <a:srgbClr val="8B9099"/>
+                          </a:solidFill>
+                          <a:latin typeface="Malgun Gothic"/>
+                          <a:ea typeface="Malgun Gothic"/>
+                          <a:cs typeface="Malgun Gothic"/>
+                        </a:rPr>
+                        <a:t>해결</a:t>
+                      </a:r>
+                    </a:p>
+                  </a:txBody>
+                  <a:tcPr marL="82296" marR="82296" marT="41148" marB="41148" anchor="ctr">
+                    <a:solidFill>
+                      <a:srgbClr val="E9EAED"/>
+                    </a:solidFill>
+                  </a:tcPr>
+                </a:tc>
+                <a:extLst>
+                  <a:ext uri="{0D108BD9-81ED-4DB2-BD59-A6C34878D82A}">
+                    <a16:rowId xmlns:a16="http://schemas.microsoft.com/office/drawing/2014/main" val="10000"/>
+                  </a:ext>
+                </a:extLst>
+              </a:tr>
+              <a:tr h="329184">
+                <a:tc>
+                  <a:txBody>
+                    <a:bodyPr/>
+                    <a:lstStyle/>
+                    <a:p>
+                      <a:pPr algn="l">
+                        <a:lnSpc>
+                          <a:spcPct val="115000"/>
+                        </a:lnSpc>
+                      </a:pPr>
+                      <a:r>
+                        <a:rPr sz="1000" b="0">
+                          <a:solidFill>
+                            <a:srgbClr val="565C66"/>
+                          </a:solidFill>
+                          <a:latin typeface="Malgun Gothic"/>
+                          <a:ea typeface="Malgun Gothic"/>
+                          <a:cs typeface="Malgun Gothic"/>
+                        </a:rPr>
+                        <a:t>YAML 개행 정규화</a:t>
+                      </a:r>
+                    </a:p>
+                  </a:txBody>
+                  <a:tcPr marL="82296" marR="82296" marT="41148" marB="41148" anchor="ctr">
+                    <a:solidFill>
+                      <a:srgbClr val="FFFFFF"/>
+                    </a:solidFill>
+                  </a:tcPr>
+                </a:tc>
+                <a:tc>
+                  <a:txBody>
+                    <a:bodyPr/>
+                    <a:lstStyle/>
+                    <a:p>
+                      <a:pPr algn="l">
+                        <a:lnSpc>
+                          <a:spcPct val="115000"/>
+                        </a:lnSpc>
+                      </a:pPr>
+                      <a:r>
+                        <a:rPr sz="1000" b="0">
+                          <a:solidFill>
+                            <a:srgbClr val="565C66"/>
+                          </a:solidFill>
+                          <a:latin typeface="Malgun Gothic"/>
+                          <a:ea typeface="Malgun Gothic"/>
+                          <a:cs typeface="Malgun Gothic"/>
+                        </a:rPr>
+                        <a:t>&lt;INFORMATION&gt; 태그를 앵커로</a:t>
+                      </a:r>
+                    </a:p>
+                  </a:txBody>
+                  <a:tcPr marL="82296" marR="82296" marT="41148" marB="41148" anchor="ctr">
+                    <a:solidFill>
+                      <a:srgbClr val="FFFFFF"/>
+                    </a:solidFill>
+                  </a:tcPr>
+                </a:tc>
+                <a:extLst>
+                  <a:ext uri="{0D108BD9-81ED-4DB2-BD59-A6C34878D82A}">
+                    <a16:rowId xmlns:a16="http://schemas.microsoft.com/office/drawing/2014/main" val="10001"/>
+                  </a:ext>
+                </a:extLst>
+              </a:tr>
+              <a:tr h="329184">
+                <a:tc>
+                  <a:txBody>
+                    <a:bodyPr/>
+                    <a:lstStyle/>
+                    <a:p>
+                      <a:pPr algn="l">
+                        <a:lnSpc>
+                          <a:spcPct val="115000"/>
+                        </a:lnSpc>
+                      </a:pPr>
+                      <a:r>
+                        <a:rPr sz="1000" b="0">
+                          <a:solidFill>
+                            <a:srgbClr val="565C66"/>
+                          </a:solidFill>
+                          <a:latin typeface="Malgun Gothic"/>
+                          <a:ea typeface="Malgun Gothic"/>
+                          <a:cs typeface="Malgun Gothic"/>
+                        </a:rPr>
+                        <a:t>인자 오염형 공격</a:t>
+                      </a:r>
+                    </a:p>
+                  </a:txBody>
+                  <a:tcPr marL="82296" marR="82296" marT="41148" marB="41148" anchor="ctr">
+                    <a:solidFill>
+                      <a:srgbClr val="F7F7F9"/>
+                    </a:solidFill>
+                  </a:tcPr>
+                </a:tc>
+                <a:tc>
+                  <a:txBody>
+                    <a:bodyPr/>
+                    <a:lstStyle/>
+                    <a:p>
+                      <a:pPr algn="l">
+                        <a:lnSpc>
+                          <a:spcPct val="115000"/>
+                        </a:lnSpc>
+                      </a:pPr>
+                      <a:r>
+                        <a:rPr sz="1000" b="0">
+                          <a:solidFill>
+                            <a:srgbClr val="565C66"/>
+                          </a:solidFill>
+                          <a:latin typeface="Malgun Gothic"/>
+                          <a:ea typeface="Malgun Gothic"/>
+                          <a:cs typeface="Malgun Gothic"/>
+                        </a:rPr>
+                        <a:t>해당 case 제외</a:t>
+                      </a:r>
+                    </a:p>
+                  </a:txBody>
+                  <a:tcPr marL="82296" marR="82296" marT="41148" marB="41148" anchor="ctr">
+                    <a:solidFill>
+                      <a:srgbClr val="F7F7F9"/>
+                    </a:solidFill>
+                  </a:tcPr>
+                </a:tc>
+                <a:extLst>
+                  <a:ext uri="{0D108BD9-81ED-4DB2-BD59-A6C34878D82A}">
+                    <a16:rowId xmlns:a16="http://schemas.microsoft.com/office/drawing/2014/main" val="10002"/>
+                  </a:ext>
+                </a:extLst>
+              </a:tr>
+              <a:tr h="329184">
+                <a:tc>
+                  <a:txBody>
+                    <a:bodyPr/>
+                    <a:lstStyle/>
+                    <a:p>
+                      <a:pPr algn="l">
+                        <a:lnSpc>
+                          <a:spcPct val="115000"/>
+                        </a:lnSpc>
+                      </a:pPr>
+                      <a:r>
+                        <a:rPr sz="1000" b="0">
+                          <a:solidFill>
+                            <a:srgbClr val="565C66"/>
+                          </a:solidFill>
+                          <a:latin typeface="Malgun Gothic"/>
+                          <a:ea typeface="Malgun Gothic"/>
+                          <a:cs typeface="Malgun Gothic"/>
+                        </a:rPr>
+                        <a:t>토큰 충돌</a:t>
+                      </a:r>
+                    </a:p>
+                  </a:txBody>
+                  <a:tcPr marL="82296" marR="82296" marT="41148" marB="41148" anchor="ctr">
+                    <a:solidFill>
+                      <a:srgbClr val="FFFFFF"/>
+                    </a:solidFill>
+                  </a:tcPr>
+                </a:tc>
+                <a:tc>
+                  <a:txBody>
+                    <a:bodyPr/>
+                    <a:lstStyle/>
+                    <a:p>
+                      <a:pPr algn="l">
+                        <a:lnSpc>
+                          <a:spcPct val="115000"/>
+                        </a:lnSpc>
+                      </a:pPr>
+                      <a:r>
+                        <a:rPr sz="1000" b="0">
+                          <a:solidFill>
+                            <a:srgbClr val="565C66"/>
+                          </a:solidFill>
+                          <a:latin typeface="Malgun Gothic"/>
+                          <a:ea typeface="Malgun Gothic"/>
+                          <a:cs typeface="Malgun Gothic"/>
+                        </a:rPr>
+                        <a:t>토큰 id 기준 재필터</a:t>
+                      </a:r>
+                    </a:p>
+                  </a:txBody>
+                  <a:tcPr marL="82296" marR="82296" marT="41148" marB="41148" anchor="ctr">
+                    <a:solidFill>
+                      <a:srgbClr val="FFFFFF"/>
+                    </a:solidFill>
+                  </a:tcPr>
+                </a:tc>
+                <a:extLst>
+                  <a:ext uri="{0D108BD9-81ED-4DB2-BD59-A6C34878D82A}">
+                    <a16:rowId xmlns:a16="http://schemas.microsoft.com/office/drawing/2014/main" val="10003"/>
+                  </a:ext>
+                </a:extLst>
+              </a:tr>
+            </a:tbl>
+          </a:graphicData>
+        </a:graphic>
+      </p:graphicFrame>
+      <p:sp>
+        <p:nvSpPr>
+          <p:cNvPr id="13" name="TextBox 12"/>
+          <p:cNvSpPr txBox="1"/>
+          <p:nvPr/>
+        </p:nvSpPr>
+        <p:spPr>
+          <a:xfrm>
+            <a:off x="640080" y="5760720"/>
+            <a:ext cx="10908792" cy="365760"/>
+          </a:xfrm>
+          <a:prstGeom prst="rect">
+            <a:avLst/>
+          </a:prstGeom>
+          <a:noFill/>
+        </p:spPr>
+        <p:txBody>
+          <a:bodyPr wrap="square" lIns="0" tIns="0" rIns="0" bIns="0">
+            <a:spAutoFit/>
+          </a:bodyPr>
+          <a:lstStyle/>
+          <a:p>
+            <a:pPr algn="l">
+              <a:lnSpc>
+                <a:spcPct val="120000"/>
+              </a:lnSpc>
+            </a:pPr>
+            <a:r>
+              <a:rPr sz="1050" b="0">
+                <a:solidFill>
+                  <a:srgbClr val="8B9099"/>
+                </a:solidFill>
+                <a:latin typeface="Malgun Gothic"/>
+                <a:ea typeface="Malgun Gothic"/>
+                <a:cs typeface="Malgun Gothic"/>
+              </a:rPr>
+              <a:t>Track A: 4개 suite 949조합 → 필터 통과 </a:t>
+            </a:r>
+            <a:r>
+              <a:rPr sz="1050" b="1">
+                <a:solidFill>
+                  <a:srgbClr val="16181D"/>
+                </a:solidFill>
+                <a:latin typeface="Malgun Gothic"/>
+                <a:ea typeface="Malgun Gothic"/>
+                <a:cs typeface="Malgun Gothic"/>
+              </a:rPr>
+              <a:t>220쌍</a:t>
+            </a:r>
+            <a:r>
+              <a:rPr sz="1050" b="0">
+                <a:solidFill>
+                  <a:srgbClr val="8B9099"/>
+                </a:solidFill>
+                <a:latin typeface="Malgun Gothic"/>
+                <a:ea typeface="Malgun Gothic"/>
+                <a:cs typeface="Malgun Gothic"/>
+              </a:rPr>
+              <a:t>       Track B: KnockoutLocalLLM으로 우리 HF 모델을 agentdojo 파이프라인에 직접 끼워, 롤아웃 내내 D_inj edge를 차단</a:t>
+            </a:r>
+          </a:p>
+        </p:txBody>
+      </p:sp>
+    </p:spTree>
+  </p:cSld>
+  <p:clrMapOvr>
+    <a:masterClrMapping/>
+  </p:clrMapOvr>
+</p:sld>
+</file>
+
 <file path=ppt/theme/theme1.xml><?xml version="1.0" encoding="utf-8"?>
 <a:theme xmlns:a="http://schemas.openxmlformats.org/drawingml/2006/main" name="Office Theme">
   <a:themeElements>
